--- a/ppt/GouthamUppu_X25167936_warehouse-robotics-fleet.pptx
+++ b/ppt/GouthamUppu_X25167936_warehouse-robotics-fleet.pptx
@@ -1150,20 +1150,20 @@
         </p:nvSpPr>
         <p:spPr>
           <a:xfrm>
-            <a:off x="640080" y="914400"/>
-            <a:ext cx="10972800" cy="1280160"/>
-          </a:xfrm>
-          <a:prstGeom prst="rect">
-            <a:avLst/>
-          </a:prstGeom>
-          <a:noFill/>
-          <a:ln/>
-        </p:spPr>
-        <p:txBody>
-          <a:bodyPr wrap="square" rtlCol="0" anchor="t"/>
-          <a:lstStyle/>
-          <a:p>
-            <a:pPr algn="l" indent="0" marL="0">
+            <a:off x="548640" y="1051560"/>
+            <a:ext cx="11064240" cy="1188720"/>
+          </a:xfrm>
+          <a:prstGeom prst="rect">
+            <a:avLst/>
+          </a:prstGeom>
+          <a:noFill/>
+          <a:ln/>
+        </p:spPr>
+        <p:txBody>
+          <a:bodyPr wrap="square" rtlCol="0" anchor="ctr"/>
+          <a:lstStyle/>
+          <a:p>
+            <a:pPr algn="ctr" indent="0" marL="0">
               <a:buNone/>
             </a:pPr>
             <a:r>
@@ -1189,8 +1189,8 @@
         </p:nvSpPr>
         <p:spPr>
           <a:xfrm>
-            <a:off x="658368" y="2148840"/>
-            <a:ext cx="10972800" cy="365760"/>
+            <a:off x="548640" y="2286000"/>
+            <a:ext cx="11064240" cy="365760"/>
           </a:xfrm>
           <a:prstGeom prst="rect">
             <a:avLst/>
@@ -1202,7 +1202,7 @@
           <a:bodyPr wrap="square" rtlCol="0" anchor="ctr"/>
           <a:lstStyle/>
           <a:p>
-            <a:pPr indent="0" marL="0">
+            <a:pPr algn="ctr" indent="0" marL="0">
               <a:buNone/>
             </a:pPr>
             <a:r>
@@ -1228,8 +1228,8 @@
         </p:nvSpPr>
         <p:spPr>
           <a:xfrm>
-            <a:off x="658368" y="2697480"/>
-            <a:ext cx="10424160" cy="1371600"/>
+            <a:off x="1463040" y="2926080"/>
+            <a:ext cx="9235440" cy="1371600"/>
           </a:xfrm>
           <a:prstGeom prst="rect">
             <a:avLst/>
@@ -1241,7 +1241,7 @@
           <a:bodyPr wrap="square" rtlCol="0" anchor="ctr"/>
           <a:lstStyle/>
           <a:p>
-            <a:pPr indent="0" marL="0">
+            <a:pPr algn="ctr" indent="0" marL="0">
               <a:lnSpc>
                 <a:spcPct val="110000"/>
               </a:lnSpc>
@@ -1270,7 +1270,7 @@
         </p:nvSpPr>
         <p:spPr>
           <a:xfrm>
-            <a:off x="658368" y="4206240"/>
+            <a:off x="1889608" y="4526280"/>
             <a:ext cx="2651760" cy="566928"/>
           </a:xfrm>
           <a:prstGeom prst="roundRect">
@@ -1297,7 +1297,7 @@
         </p:nvSpPr>
         <p:spPr>
           <a:xfrm>
-            <a:off x="658368" y="4206240"/>
+            <a:off x="1889608" y="4526280"/>
             <a:ext cx="2651760" cy="566928"/>
           </a:xfrm>
           <a:prstGeom prst="rect">
@@ -1314,7 +1314,7 @@
               <a:buNone/>
             </a:pPr>
             <a:r>
-              <a:rPr lang="en-US" sz="1400" b="1" dirty="0">
+              <a:rPr lang="en-US" sz="1350" b="1" dirty="0">
                 <a:solidFill>
                   <a:srgbClr val="EC7A2E"/>
                 </a:solidFill>
@@ -1324,7 +1324,7 @@
               </a:rPr>
               <a:t>50 live signals</a:t>
             </a:r>
-            <a:endParaRPr lang="en-US" sz="1400" dirty="0"/>
+            <a:endParaRPr lang="en-US" sz="1350" dirty="0"/>
           </a:p>
         </p:txBody>
       </p:sp>
@@ -1336,7 +1336,7 @@
         </p:nvSpPr>
         <p:spPr>
           <a:xfrm>
-            <a:off x="3538728" y="4206240"/>
+            <a:off x="4769968" y="4526280"/>
             <a:ext cx="2651760" cy="566928"/>
           </a:xfrm>
           <a:prstGeom prst="roundRect">
@@ -1363,7 +1363,7 @@
         </p:nvSpPr>
         <p:spPr>
           <a:xfrm>
-            <a:off x="3538728" y="4206240"/>
+            <a:off x="4769968" y="4526280"/>
             <a:ext cx="2651760" cy="566928"/>
           </a:xfrm>
           <a:prstGeom prst="rect">
@@ -1380,7 +1380,7 @@
               <a:buNone/>
             </a:pPr>
             <a:r>
-              <a:rPr lang="en-US" sz="1400" b="1" dirty="0">
+              <a:rPr lang="en-US" sz="1350" b="1" dirty="0">
                 <a:solidFill>
                   <a:srgbClr val="EC7A2E"/>
                 </a:solidFill>
@@ -1390,7 +1390,7 @@
               </a:rPr>
               <a:t>10 robots · 2 zones</a:t>
             </a:r>
-            <a:endParaRPr lang="en-US" sz="1400" dirty="0"/>
+            <a:endParaRPr lang="en-US" sz="1350" dirty="0"/>
           </a:p>
         </p:txBody>
       </p:sp>
@@ -1402,7 +1402,7 @@
         </p:nvSpPr>
         <p:spPr>
           <a:xfrm>
-            <a:off x="6419088" y="4206240"/>
+            <a:off x="7650328" y="4526280"/>
             <a:ext cx="2651760" cy="566928"/>
           </a:xfrm>
           <a:prstGeom prst="roundRect">
@@ -1429,7 +1429,7 @@
         </p:nvSpPr>
         <p:spPr>
           <a:xfrm>
-            <a:off x="6419088" y="4206240"/>
+            <a:off x="7650328" y="4526280"/>
             <a:ext cx="2651760" cy="566928"/>
           </a:xfrm>
           <a:prstGeom prst="rect">
@@ -1446,7 +1446,7 @@
               <a:buNone/>
             </a:pPr>
             <a:r>
-              <a:rPr lang="en-US" sz="1400" b="1" dirty="0">
+              <a:rPr lang="en-US" sz="1350" b="1" dirty="0">
                 <a:solidFill>
                   <a:srgbClr val="EC7A2E"/>
                 </a:solidFill>
@@ -1456,7 +1456,7 @@
               </a:rPr>
               <a:t>edge thresholds</a:t>
             </a:r>
-            <a:endParaRPr lang="en-US" sz="1400" dirty="0"/>
+            <a:endParaRPr lang="en-US" sz="1350" dirty="0"/>
           </a:p>
         </p:txBody>
       </p:sp>
@@ -1468,8 +1468,8 @@
         </p:nvSpPr>
         <p:spPr>
           <a:xfrm>
-            <a:off x="658368" y="6126480"/>
-            <a:ext cx="10972800" cy="365760"/>
+            <a:off x="548640" y="6126480"/>
+            <a:ext cx="11064240" cy="365760"/>
           </a:xfrm>
           <a:prstGeom prst="rect">
             <a:avLst/>
@@ -1481,7 +1481,7 @@
           <a:bodyPr wrap="square" rtlCol="0" anchor="ctr"/>
           <a:lstStyle/>
           <a:p>
-            <a:pPr indent="0" marL="0">
+            <a:pPr algn="ctr" indent="0" marL="0">
               <a:buNone/>
             </a:pPr>
             <a:r>
@@ -1578,12 +1578,12 @@
         </p:nvSpPr>
         <p:spPr>
           <a:xfrm>
-            <a:off x="640080" y="2468880"/>
-            <a:ext cx="1572768" cy="1371600"/>
+            <a:off x="640080" y="1554480"/>
+            <a:ext cx="3200400" cy="3383280"/>
           </a:xfrm>
           <a:prstGeom prst="roundRect">
             <a:avLst>
-              <a:gd name="adj" fmla="val 6667"/>
+              <a:gd name="adj" fmla="val 2857"/>
             </a:avLst>
           </a:prstGeom>
           <a:solidFill>
@@ -1599,146 +1599,63 @@
       </p:sp>
       <p:sp>
         <p:nvSpPr>
-          <p:cNvPr id="4" name="Shape 2"/>
-          <p:cNvSpPr/>
-          <p:nvPr/>
-        </p:nvSpPr>
-        <p:spPr>
-          <a:xfrm>
-            <a:off x="1325880" y="2670048"/>
-            <a:ext cx="201168" cy="201168"/>
-          </a:xfrm>
-          <a:prstGeom prst="ellipse">
-            <a:avLst/>
-          </a:prstGeom>
-          <a:solidFill>
-            <a:srgbClr val="74889A"/>
-          </a:solidFill>
-          <a:ln/>
-        </p:spPr>
-      </p:sp>
-      <p:sp>
-        <p:nvSpPr>
-          <p:cNvPr id="5" name="Text 3"/>
-          <p:cNvSpPr/>
-          <p:nvPr/>
-        </p:nvSpPr>
-        <p:spPr>
-          <a:xfrm>
-            <a:off x="594360" y="2926080"/>
-            <a:ext cx="1664208" cy="411480"/>
-          </a:xfrm>
-          <a:prstGeom prst="rect">
-            <a:avLst/>
-          </a:prstGeom>
-          <a:noFill/>
-          <a:ln/>
-        </p:spPr>
-        <p:txBody>
-          <a:bodyPr wrap="square" lIns="0" tIns="0" rIns="0" bIns="0" rtlCol="0" anchor="ctr"/>
+          <p:cNvPr id="4" name="Text 2"/>
+          <p:cNvSpPr/>
+          <p:nvPr/>
+        </p:nvSpPr>
+        <p:spPr>
+          <a:xfrm>
+            <a:off x="640080" y="1691640"/>
+            <a:ext cx="3200400" cy="365760"/>
+          </a:xfrm>
+          <a:prstGeom prst="rect">
+            <a:avLst/>
+          </a:prstGeom>
+          <a:noFill/>
+          <a:ln/>
+        </p:spPr>
+        <p:txBody>
+          <a:bodyPr wrap="square" rtlCol="0" anchor="ctr"/>
           <a:lstStyle/>
           <a:p>
             <a:pPr algn="ctr" indent="0" marL="0">
               <a:buNone/>
             </a:pPr>
             <a:r>
-              <a:rPr lang="en-US" sz="1450" b="1" dirty="0">
-                <a:solidFill>
-                  <a:srgbClr val="20262D"/>
+              <a:rPr lang="en-US" sz="1200" b="1" spc="300" kern="0" dirty="0">
+                <a:solidFill>
+                  <a:srgbClr val="74889A"/>
                 </a:solidFill>
                 <a:latin typeface="Calibri" pitchFamily="34" charset="0"/>
                 <a:ea typeface="Calibri" pitchFamily="34" charset="-122"/>
                 <a:cs typeface="Calibri" pitchFamily="34" charset="-120"/>
               </a:rPr>
-              <a:t>Robot sensors</a:t>
-            </a:r>
-            <a:endParaRPr lang="en-US" sz="1450" dirty="0"/>
-          </a:p>
-        </p:txBody>
-      </p:sp>
-      <p:sp>
-        <p:nvSpPr>
-          <p:cNvPr id="6" name="Text 4"/>
-          <p:cNvSpPr/>
-          <p:nvPr/>
-        </p:nvSpPr>
-        <p:spPr>
-          <a:xfrm>
-            <a:off x="621792" y="3310128"/>
-            <a:ext cx="1609344" cy="457200"/>
-          </a:xfrm>
-          <a:prstGeom prst="rect">
-            <a:avLst/>
-          </a:prstGeom>
-          <a:noFill/>
-          <a:ln/>
-        </p:spPr>
-        <p:txBody>
-          <a:bodyPr wrap="square" lIns="0" tIns="0" rIns="0" bIns="0" rtlCol="0" anchor="t"/>
-          <a:lstStyle/>
-          <a:p>
-            <a:pPr algn="ctr" indent="0" marL="0">
-              <a:buNone/>
-            </a:pPr>
-            <a:r>
-              <a:rPr lang="en-US" sz="1050" dirty="0">
-                <a:solidFill>
-                  <a:srgbClr val="626E78"/>
-                </a:solidFill>
-                <a:latin typeface="Calibri" pitchFamily="34" charset="0"/>
-                <a:ea typeface="Calibri" pitchFamily="34" charset="-122"/>
-                <a:cs typeface="Calibri" pitchFamily="34" charset="-120"/>
-              </a:rPr>
-              <a:t>10 on EC2 · 5 metrics</a:t>
-            </a:r>
-            <a:endParaRPr lang="en-US" sz="1050" dirty="0"/>
-          </a:p>
-        </p:txBody>
-      </p:sp>
-      <p:sp>
-        <p:nvSpPr>
-          <p:cNvPr id="7" name="Shape 5"/>
-          <p:cNvSpPr/>
-          <p:nvPr/>
-        </p:nvSpPr>
-        <p:spPr>
-          <a:xfrm>
-            <a:off x="2231136" y="3154680"/>
-            <a:ext cx="258409" cy="0"/>
-          </a:xfrm>
-          <a:prstGeom prst="line">
-            <a:avLst/>
-          </a:prstGeom>
-          <a:noFill/>
-          <a:ln w="25400">
-            <a:solidFill>
-              <a:srgbClr val="74889A"/>
-            </a:solidFill>
-            <a:prstDash val="solid"/>
-            <a:tailEnd type="triangle"/>
-          </a:ln>
-        </p:spPr>
-      </p:sp>
-      <p:sp>
-        <p:nvSpPr>
-          <p:cNvPr id="8" name="Shape 6"/>
-          <p:cNvSpPr/>
-          <p:nvPr/>
-        </p:nvSpPr>
-        <p:spPr>
-          <a:xfrm>
-            <a:off x="2507833" y="2468880"/>
-            <a:ext cx="1572768" cy="1371600"/>
+              <a:t>EDGE</a:t>
+            </a:r>
+            <a:endParaRPr lang="en-US" sz="1200" dirty="0"/>
+          </a:p>
+        </p:txBody>
+      </p:sp>
+      <p:sp>
+        <p:nvSpPr>
+          <p:cNvPr id="5" name="Shape 3"/>
+          <p:cNvSpPr/>
+          <p:nvPr/>
+        </p:nvSpPr>
+        <p:spPr>
+          <a:xfrm>
+            <a:off x="914400" y="2286000"/>
+            <a:ext cx="2651760" cy="1005840"/>
           </a:xfrm>
           <a:prstGeom prst="roundRect">
             <a:avLst>
-              <a:gd name="adj" fmla="val 6667"/>
+              <a:gd name="adj" fmla="val 7273"/>
             </a:avLst>
           </a:prstGeom>
           <a:solidFill>
-            <a:srgbClr val="EEF1F4"/>
+            <a:srgbClr val="FFFFFF"/>
           </a:solidFill>
-          <a:ln w="19050">
+          <a:ln w="15240">
             <a:solidFill>
               <a:srgbClr val="74889A"/>
             </a:solidFill>
@@ -1748,34 +1665,14 @@
       </p:sp>
       <p:sp>
         <p:nvSpPr>
-          <p:cNvPr id="9" name="Shape 7"/>
-          <p:cNvSpPr/>
-          <p:nvPr/>
-        </p:nvSpPr>
-        <p:spPr>
-          <a:xfrm>
-            <a:off x="3193633" y="2670048"/>
-            <a:ext cx="201168" cy="201168"/>
-          </a:xfrm>
-          <a:prstGeom prst="ellipse">
-            <a:avLst/>
-          </a:prstGeom>
-          <a:solidFill>
-            <a:srgbClr val="74889A"/>
-          </a:solidFill>
-          <a:ln/>
-        </p:spPr>
-      </p:sp>
-      <p:sp>
-        <p:nvSpPr>
-          <p:cNvPr id="10" name="Text 8"/>
-          <p:cNvSpPr/>
-          <p:nvPr/>
-        </p:nvSpPr>
-        <p:spPr>
-          <a:xfrm>
-            <a:off x="2462113" y="2926080"/>
-            <a:ext cx="1664208" cy="411480"/>
+          <p:cNvPr id="6" name="Text 4"/>
+          <p:cNvSpPr/>
+          <p:nvPr/>
+        </p:nvSpPr>
+        <p:spPr>
+          <a:xfrm>
+            <a:off x="914400" y="2432304"/>
+            <a:ext cx="2651760" cy="365760"/>
           </a:xfrm>
           <a:prstGeom prst="rect">
             <a:avLst/>
@@ -1791,7 +1688,7 @@
               <a:buNone/>
             </a:pPr>
             <a:r>
-              <a:rPr lang="en-US" sz="1450" b="1" dirty="0">
+              <a:rPr lang="en-US" sz="1400" b="1" dirty="0">
                 <a:solidFill>
                   <a:srgbClr val="20262D"/>
                 </a:solidFill>
@@ -1799,38 +1696,38 @@
                 <a:ea typeface="Calibri" pitchFamily="34" charset="-122"/>
                 <a:cs typeface="Calibri" pitchFamily="34" charset="-120"/>
               </a:rPr>
-              <a:t>Fog gateway</a:t>
-            </a:r>
-            <a:endParaRPr lang="en-US" sz="1450" dirty="0"/>
-          </a:p>
-        </p:txBody>
-      </p:sp>
-      <p:sp>
-        <p:nvSpPr>
-          <p:cNvPr id="11" name="Text 9"/>
-          <p:cNvSpPr/>
-          <p:nvPr/>
-        </p:nvSpPr>
-        <p:spPr>
-          <a:xfrm>
-            <a:off x="2489545" y="3310128"/>
-            <a:ext cx="1609344" cy="457200"/>
-          </a:xfrm>
-          <a:prstGeom prst="rect">
-            <a:avLst/>
-          </a:prstGeom>
-          <a:noFill/>
-          <a:ln/>
-        </p:spPr>
-        <p:txBody>
-          <a:bodyPr wrap="square" lIns="0" tIns="0" rIns="0" bIns="0" rtlCol="0" anchor="t"/>
+              <a:t>Robot sensors</a:t>
+            </a:r>
+            <a:endParaRPr lang="en-US" sz="1400" dirty="0"/>
+          </a:p>
+        </p:txBody>
+      </p:sp>
+      <p:sp>
+        <p:nvSpPr>
+          <p:cNvPr id="7" name="Text 5"/>
+          <p:cNvSpPr/>
+          <p:nvPr/>
+        </p:nvSpPr>
+        <p:spPr>
+          <a:xfrm>
+            <a:off x="914400" y="2816352"/>
+            <a:ext cx="2651760" cy="365760"/>
+          </a:xfrm>
+          <a:prstGeom prst="rect">
+            <a:avLst/>
+          </a:prstGeom>
+          <a:noFill/>
+          <a:ln/>
+        </p:spPr>
+        <p:txBody>
+          <a:bodyPr wrap="square" lIns="0" tIns="0" rIns="0" bIns="0" rtlCol="0" anchor="ctr"/>
           <a:lstStyle/>
           <a:p>
             <a:pPr algn="ctr" indent="0" marL="0">
               <a:buNone/>
             </a:pPr>
             <a:r>
-              <a:rPr lang="en-US" sz="1050" dirty="0">
+              <a:rPr lang="en-US" sz="1000" dirty="0">
                 <a:solidFill>
                   <a:srgbClr val="626E78"/>
                 </a:solidFill>
@@ -1838,50 +1735,155 @@
                 <a:ea typeface="Calibri" pitchFamily="34" charset="-122"/>
                 <a:cs typeface="Calibri" pitchFamily="34" charset="-120"/>
               </a:rPr>
-              <a:t>windows · thresholds</a:t>
-            </a:r>
-            <a:endParaRPr lang="en-US" sz="1050" dirty="0"/>
-          </a:p>
-        </p:txBody>
-      </p:sp>
-      <p:sp>
-        <p:nvSpPr>
-          <p:cNvPr id="12" name="Shape 10"/>
-          <p:cNvSpPr/>
-          <p:nvPr/>
-        </p:nvSpPr>
-        <p:spPr>
-          <a:xfrm>
-            <a:off x="4098889" y="3154680"/>
-            <a:ext cx="258409" cy="0"/>
-          </a:xfrm>
-          <a:prstGeom prst="line">
-            <a:avLst/>
-          </a:prstGeom>
-          <a:noFill/>
-          <a:ln w="25400">
+              <a:t>10 on EC2 · 5 metrics</a:t>
+            </a:r>
+            <a:endParaRPr lang="en-US" sz="1000" dirty="0"/>
+          </a:p>
+        </p:txBody>
+      </p:sp>
+      <p:sp>
+        <p:nvSpPr>
+          <p:cNvPr id="8" name="Shape 6"/>
+          <p:cNvSpPr/>
+          <p:nvPr/>
+        </p:nvSpPr>
+        <p:spPr>
+          <a:xfrm>
+            <a:off x="914400" y="3520440"/>
+            <a:ext cx="2651760" cy="1005840"/>
+          </a:xfrm>
+          <a:prstGeom prst="roundRect">
+            <a:avLst>
+              <a:gd name="adj" fmla="val 7273"/>
+            </a:avLst>
+          </a:prstGeom>
+          <a:solidFill>
+            <a:srgbClr val="FFFFFF"/>
+          </a:solidFill>
+          <a:ln w="15240">
             <a:solidFill>
               <a:srgbClr val="74889A"/>
             </a:solidFill>
             <a:prstDash val="solid"/>
+          </a:ln>
+        </p:spPr>
+      </p:sp>
+      <p:sp>
+        <p:nvSpPr>
+          <p:cNvPr id="9" name="Text 7"/>
+          <p:cNvSpPr/>
+          <p:nvPr/>
+        </p:nvSpPr>
+        <p:spPr>
+          <a:xfrm>
+            <a:off x="914400" y="3666744"/>
+            <a:ext cx="2651760" cy="365760"/>
+          </a:xfrm>
+          <a:prstGeom prst="rect">
+            <a:avLst/>
+          </a:prstGeom>
+          <a:noFill/>
+          <a:ln/>
+        </p:spPr>
+        <p:txBody>
+          <a:bodyPr wrap="square" lIns="0" tIns="0" rIns="0" bIns="0" rtlCol="0" anchor="ctr"/>
+          <a:lstStyle/>
+          <a:p>
+            <a:pPr algn="ctr" indent="0" marL="0">
+              <a:buNone/>
+            </a:pPr>
+            <a:r>
+              <a:rPr lang="en-US" sz="1400" b="1" dirty="0">
+                <a:solidFill>
+                  <a:srgbClr val="20262D"/>
+                </a:solidFill>
+                <a:latin typeface="Calibri" pitchFamily="34" charset="0"/>
+                <a:ea typeface="Calibri" pitchFamily="34" charset="-122"/>
+                <a:cs typeface="Calibri" pitchFamily="34" charset="-120"/>
+              </a:rPr>
+              <a:t>Fog gateway</a:t>
+            </a:r>
+            <a:endParaRPr lang="en-US" sz="1400" dirty="0"/>
+          </a:p>
+        </p:txBody>
+      </p:sp>
+      <p:sp>
+        <p:nvSpPr>
+          <p:cNvPr id="10" name="Text 8"/>
+          <p:cNvSpPr/>
+          <p:nvPr/>
+        </p:nvSpPr>
+        <p:spPr>
+          <a:xfrm>
+            <a:off x="914400" y="4050792"/>
+            <a:ext cx="2651760" cy="365760"/>
+          </a:xfrm>
+          <a:prstGeom prst="rect">
+            <a:avLst/>
+          </a:prstGeom>
+          <a:noFill/>
+          <a:ln/>
+        </p:spPr>
+        <p:txBody>
+          <a:bodyPr wrap="square" lIns="0" tIns="0" rIns="0" bIns="0" rtlCol="0" anchor="ctr"/>
+          <a:lstStyle/>
+          <a:p>
+            <a:pPr algn="ctr" indent="0" marL="0">
+              <a:buNone/>
+            </a:pPr>
+            <a:r>
+              <a:rPr lang="en-US" sz="1000" dirty="0">
+                <a:solidFill>
+                  <a:srgbClr val="626E78"/>
+                </a:solidFill>
+                <a:latin typeface="Calibri" pitchFamily="34" charset="0"/>
+                <a:ea typeface="Calibri" pitchFamily="34" charset="-122"/>
+                <a:cs typeface="Calibri" pitchFamily="34" charset="-120"/>
+              </a:rPr>
+              <a:t>windows · thresholds</a:t>
+            </a:r>
+            <a:endParaRPr lang="en-US" sz="1000" dirty="0"/>
+          </a:p>
+        </p:txBody>
+      </p:sp>
+      <p:sp>
+        <p:nvSpPr>
+          <p:cNvPr id="11" name="Shape 9"/>
+          <p:cNvSpPr/>
+          <p:nvPr/>
+        </p:nvSpPr>
+        <p:spPr>
+          <a:xfrm>
+            <a:off x="3886200" y="3246120"/>
+            <a:ext cx="502920" cy="0"/>
+          </a:xfrm>
+          <a:prstGeom prst="line">
+            <a:avLst/>
+          </a:prstGeom>
+          <a:noFill/>
+          <a:ln w="31750">
+            <a:solidFill>
+              <a:srgbClr val="33414F"/>
+            </a:solidFill>
+            <a:prstDash val="solid"/>
             <a:tailEnd type="triangle"/>
           </a:ln>
         </p:spPr>
       </p:sp>
       <p:sp>
         <p:nvSpPr>
-          <p:cNvPr id="13" name="Shape 11"/>
-          <p:cNvSpPr/>
-          <p:nvPr/>
-        </p:nvSpPr>
-        <p:spPr>
-          <a:xfrm>
-            <a:off x="4375587" y="2468880"/>
-            <a:ext cx="1572768" cy="1371600"/>
+          <p:cNvPr id="12" name="Shape 10"/>
+          <p:cNvSpPr/>
+          <p:nvPr/>
+        </p:nvSpPr>
+        <p:spPr>
+          <a:xfrm>
+            <a:off x="4572000" y="1554480"/>
+            <a:ext cx="6949440" cy="3383280"/>
           </a:xfrm>
           <a:prstGeom prst="roundRect">
             <a:avLst>
-              <a:gd name="adj" fmla="val 6667"/>
+              <a:gd name="adj" fmla="val 2703"/>
             </a:avLst>
           </a:prstGeom>
           <a:solidFill>
@@ -1897,99 +1899,145 @@
       </p:sp>
       <p:sp>
         <p:nvSpPr>
-          <p:cNvPr id="14" name="Shape 12"/>
-          <p:cNvSpPr/>
-          <p:nvPr/>
-        </p:nvSpPr>
-        <p:spPr>
-          <a:xfrm>
-            <a:off x="5061387" y="2670048"/>
-            <a:ext cx="201168" cy="201168"/>
-          </a:xfrm>
-          <a:prstGeom prst="ellipse">
-            <a:avLst/>
-          </a:prstGeom>
-          <a:solidFill>
-            <a:srgbClr val="33414F"/>
-          </a:solidFill>
-          <a:ln/>
-        </p:spPr>
-      </p:sp>
-      <p:sp>
-        <p:nvSpPr>
-          <p:cNvPr id="15" name="Text 13"/>
-          <p:cNvSpPr/>
-          <p:nvPr/>
-        </p:nvSpPr>
-        <p:spPr>
-          <a:xfrm>
-            <a:off x="4329867" y="2926080"/>
-            <a:ext cx="1664208" cy="411480"/>
-          </a:xfrm>
-          <a:prstGeom prst="rect">
-            <a:avLst/>
-          </a:prstGeom>
-          <a:noFill/>
-          <a:ln/>
-        </p:spPr>
-        <p:txBody>
-          <a:bodyPr wrap="square" lIns="0" tIns="0" rIns="0" bIns="0" rtlCol="0" anchor="ctr"/>
+          <p:cNvPr id="13" name="Text 11"/>
+          <p:cNvSpPr/>
+          <p:nvPr/>
+        </p:nvSpPr>
+        <p:spPr>
+          <a:xfrm>
+            <a:off x="4572000" y="1691640"/>
+            <a:ext cx="6949440" cy="365760"/>
+          </a:xfrm>
+          <a:prstGeom prst="rect">
+            <a:avLst/>
+          </a:prstGeom>
+          <a:noFill/>
+          <a:ln/>
+        </p:spPr>
+        <p:txBody>
+          <a:bodyPr wrap="square" rtlCol="0" anchor="ctr"/>
           <a:lstStyle/>
           <a:p>
             <a:pPr algn="ctr" indent="0" marL="0">
               <a:buNone/>
             </a:pPr>
             <a:r>
-              <a:rPr lang="en-US" sz="1450" b="1" dirty="0">
-                <a:solidFill>
-                  <a:srgbClr val="20262D"/>
+              <a:rPr lang="en-US" sz="1200" b="1" spc="200" kern="0" dirty="0">
+                <a:solidFill>
+                  <a:srgbClr val="33414F"/>
                 </a:solidFill>
                 <a:latin typeface="Calibri" pitchFamily="34" charset="0"/>
                 <a:ea typeface="Calibri" pitchFamily="34" charset="-122"/>
                 <a:cs typeface="Calibri" pitchFamily="34" charset="-120"/>
               </a:rPr>
-              <a:t>Amazon SQS</a:t>
-            </a:r>
-            <a:endParaRPr lang="en-US" sz="1450" dirty="0"/>
-          </a:p>
-        </p:txBody>
-      </p:sp>
-      <p:sp>
-        <p:nvSpPr>
-          <p:cNvPr id="16" name="Text 14"/>
-          <p:cNvSpPr/>
-          <p:nvPr/>
-        </p:nvSpPr>
-        <p:spPr>
-          <a:xfrm>
-            <a:off x="4357299" y="3310128"/>
-            <a:ext cx="1609344" cy="457200"/>
-          </a:xfrm>
-          <a:prstGeom prst="rect">
-            <a:avLst/>
-          </a:prstGeom>
-          <a:noFill/>
-          <a:ln/>
-        </p:spPr>
-        <p:txBody>
-          <a:bodyPr wrap="square" lIns="0" tIns="0" rIns="0" bIns="0" rtlCol="0" anchor="t"/>
+              <a:t>CLOUD (serverless)</a:t>
+            </a:r>
+            <a:endParaRPr lang="en-US" sz="1200" dirty="0"/>
+          </a:p>
+        </p:txBody>
+      </p:sp>
+      <p:sp>
+        <p:nvSpPr>
+          <p:cNvPr id="14" name="Shape 12"/>
+          <p:cNvSpPr/>
+          <p:nvPr/>
+        </p:nvSpPr>
+        <p:spPr>
+          <a:xfrm>
+            <a:off x="4846320" y="2651760"/>
+            <a:ext cx="1463040" cy="1371600"/>
+          </a:xfrm>
+          <a:prstGeom prst="roundRect">
+            <a:avLst>
+              <a:gd name="adj" fmla="val 5333"/>
+            </a:avLst>
+          </a:prstGeom>
+          <a:solidFill>
+            <a:srgbClr val="FFFFFF"/>
+          </a:solidFill>
+          <a:ln w="15240">
+            <a:solidFill>
+              <a:srgbClr val="33414F"/>
+            </a:solidFill>
+            <a:prstDash val="solid"/>
+          </a:ln>
+        </p:spPr>
+      </p:sp>
+      <p:sp>
+        <p:nvSpPr>
+          <p:cNvPr id="15" name="Text 13"/>
+          <p:cNvSpPr/>
+          <p:nvPr/>
+        </p:nvSpPr>
+        <p:spPr>
+          <a:xfrm>
+            <a:off x="4800600" y="2907792"/>
+            <a:ext cx="1554480" cy="457200"/>
+          </a:xfrm>
+          <a:prstGeom prst="rect">
+            <a:avLst/>
+          </a:prstGeom>
+          <a:noFill/>
+          <a:ln/>
+        </p:spPr>
+        <p:txBody>
+          <a:bodyPr wrap="square" lIns="0" tIns="0" rIns="0" bIns="0" rtlCol="0" anchor="ctr"/>
           <a:lstStyle/>
           <a:p>
             <a:pPr algn="ctr" indent="0" marL="0">
               <a:buNone/>
             </a:pPr>
             <a:r>
-              <a:rPr lang="en-US" sz="1050" dirty="0">
-                <a:solidFill>
-                  <a:srgbClr val="626E78"/>
+              <a:rPr lang="en-US" sz="1250" b="1" dirty="0">
+                <a:solidFill>
+                  <a:srgbClr val="20262D"/>
                 </a:solidFill>
                 <a:latin typeface="Calibri" pitchFamily="34" charset="0"/>
                 <a:ea typeface="Calibri" pitchFamily="34" charset="-122"/>
                 <a:cs typeface="Calibri" pitchFamily="34" charset="-120"/>
               </a:rPr>
+              <a:t>Amazon SQS</a:t>
+            </a:r>
+            <a:endParaRPr lang="en-US" sz="1250" dirty="0"/>
+          </a:p>
+        </p:txBody>
+      </p:sp>
+      <p:sp>
+        <p:nvSpPr>
+          <p:cNvPr id="16" name="Text 14"/>
+          <p:cNvSpPr/>
+          <p:nvPr/>
+        </p:nvSpPr>
+        <p:spPr>
+          <a:xfrm>
+            <a:off x="4828032" y="3401568"/>
+            <a:ext cx="1499616" cy="457200"/>
+          </a:xfrm>
+          <a:prstGeom prst="rect">
+            <a:avLst/>
+          </a:prstGeom>
+          <a:noFill/>
+          <a:ln/>
+        </p:spPr>
+        <p:txBody>
+          <a:bodyPr wrap="square" lIns="0" tIns="0" rIns="0" bIns="0" rtlCol="0" anchor="ctr"/>
+          <a:lstStyle/>
+          <a:p>
+            <a:pPr algn="ctr" indent="0" marL="0">
+              <a:buNone/>
+            </a:pPr>
+            <a:r>
+              <a:rPr lang="en-US" sz="900" dirty="0">
+                <a:solidFill>
+                  <a:srgbClr val="626E78"/>
+                </a:solidFill>
+                <a:latin typeface="Calibri" pitchFamily="34" charset="0"/>
+                <a:ea typeface="Calibri" pitchFamily="34" charset="-122"/>
+                <a:cs typeface="Calibri" pitchFamily="34" charset="-120"/>
+              </a:rPr>
               <a:t>batches ≤10</a:t>
             </a:r>
-            <a:endParaRPr lang="en-US" sz="1050" dirty="0"/>
+            <a:endParaRPr lang="en-US" sz="900" dirty="0"/>
           </a:p>
         </p:txBody>
       </p:sp>
@@ -2001,14 +2049,14 @@
         </p:nvSpPr>
         <p:spPr>
           <a:xfrm>
-            <a:off x="5966643" y="3154680"/>
-            <a:ext cx="258409" cy="0"/>
+            <a:off x="6318504" y="3337560"/>
+            <a:ext cx="164592" cy="0"/>
           </a:xfrm>
           <a:prstGeom prst="line">
             <a:avLst/>
           </a:prstGeom>
           <a:noFill/>
-          <a:ln w="25400">
+          <a:ln w="20320">
             <a:solidFill>
               <a:srgbClr val="74889A"/>
             </a:solidFill>
@@ -2025,18 +2073,18 @@
         </p:nvSpPr>
         <p:spPr>
           <a:xfrm>
-            <a:off x="6243340" y="2468880"/>
-            <a:ext cx="1572768" cy="1371600"/>
+            <a:off x="6492240" y="2651760"/>
+            <a:ext cx="1463040" cy="1371600"/>
           </a:xfrm>
           <a:prstGeom prst="roundRect">
             <a:avLst>
-              <a:gd name="adj" fmla="val 6667"/>
+              <a:gd name="adj" fmla="val 5333"/>
             </a:avLst>
           </a:prstGeom>
           <a:solidFill>
-            <a:srgbClr val="EEF1F4"/>
+            <a:srgbClr val="FFFFFF"/>
           </a:solidFill>
-          <a:ln w="19050">
+          <a:ln w="15240">
             <a:solidFill>
               <a:srgbClr val="33414F"/>
             </a:solidFill>
@@ -2046,34 +2094,14 @@
       </p:sp>
       <p:sp>
         <p:nvSpPr>
-          <p:cNvPr id="19" name="Shape 17"/>
-          <p:cNvSpPr/>
-          <p:nvPr/>
-        </p:nvSpPr>
-        <p:spPr>
-          <a:xfrm>
-            <a:off x="6929140" y="2670048"/>
-            <a:ext cx="201168" cy="201168"/>
-          </a:xfrm>
-          <a:prstGeom prst="ellipse">
-            <a:avLst/>
-          </a:prstGeom>
-          <a:solidFill>
-            <a:srgbClr val="33414F"/>
-          </a:solidFill>
-          <a:ln/>
-        </p:spPr>
-      </p:sp>
-      <p:sp>
-        <p:nvSpPr>
-          <p:cNvPr id="20" name="Text 18"/>
-          <p:cNvSpPr/>
-          <p:nvPr/>
-        </p:nvSpPr>
-        <p:spPr>
-          <a:xfrm>
-            <a:off x="6197620" y="2926080"/>
-            <a:ext cx="1664208" cy="411480"/>
+          <p:cNvPr id="19" name="Text 17"/>
+          <p:cNvSpPr/>
+          <p:nvPr/>
+        </p:nvSpPr>
+        <p:spPr>
+          <a:xfrm>
+            <a:off x="6446520" y="2907792"/>
+            <a:ext cx="1554480" cy="457200"/>
           </a:xfrm>
           <a:prstGeom prst="rect">
             <a:avLst/>
@@ -2089,7 +2117,7 @@
               <a:buNone/>
             </a:pPr>
             <a:r>
-              <a:rPr lang="en-US" sz="1450" b="1" dirty="0">
+              <a:rPr lang="en-US" sz="1250" b="1" dirty="0">
                 <a:solidFill>
                   <a:srgbClr val="20262D"/>
                 </a:solidFill>
@@ -2099,36 +2127,36 @@
               </a:rPr>
               <a:t>AWS Lambda</a:t>
             </a:r>
-            <a:endParaRPr lang="en-US" sz="1450" dirty="0"/>
-          </a:p>
-        </p:txBody>
-      </p:sp>
-      <p:sp>
-        <p:nvSpPr>
-          <p:cNvPr id="21" name="Text 19"/>
-          <p:cNvSpPr/>
-          <p:nvPr/>
-        </p:nvSpPr>
-        <p:spPr>
-          <a:xfrm>
-            <a:off x="6225052" y="3310128"/>
-            <a:ext cx="1609344" cy="457200"/>
-          </a:xfrm>
-          <a:prstGeom prst="rect">
-            <a:avLst/>
-          </a:prstGeom>
-          <a:noFill/>
-          <a:ln/>
-        </p:spPr>
-        <p:txBody>
-          <a:bodyPr wrap="square" lIns="0" tIns="0" rIns="0" bIns="0" rtlCol="0" anchor="t"/>
+            <a:endParaRPr lang="en-US" sz="1250" dirty="0"/>
+          </a:p>
+        </p:txBody>
+      </p:sp>
+      <p:sp>
+        <p:nvSpPr>
+          <p:cNvPr id="20" name="Text 18"/>
+          <p:cNvSpPr/>
+          <p:nvPr/>
+        </p:nvSpPr>
+        <p:spPr>
+          <a:xfrm>
+            <a:off x="6473952" y="3401568"/>
+            <a:ext cx="1499616" cy="457200"/>
+          </a:xfrm>
+          <a:prstGeom prst="rect">
+            <a:avLst/>
+          </a:prstGeom>
+          <a:noFill/>
+          <a:ln/>
+        </p:spPr>
+        <p:txBody>
+          <a:bodyPr wrap="square" lIns="0" tIns="0" rIns="0" bIns="0" rtlCol="0" anchor="ctr"/>
           <a:lstStyle/>
           <a:p>
             <a:pPr algn="ctr" indent="0" marL="0">
               <a:buNone/>
             </a:pPr>
             <a:r>
-              <a:rPr lang="en-US" sz="1050" dirty="0">
+              <a:rPr lang="en-US" sz="900" dirty="0">
                 <a:solidFill>
                   <a:srgbClr val="626E78"/>
                 </a:solidFill>
@@ -2138,26 +2166,26 @@
               </a:rPr>
               <a:t>java17 ingest</a:t>
             </a:r>
-            <a:endParaRPr lang="en-US" sz="1050" dirty="0"/>
-          </a:p>
-        </p:txBody>
-      </p:sp>
-      <p:sp>
-        <p:nvSpPr>
-          <p:cNvPr id="22" name="Shape 20"/>
-          <p:cNvSpPr/>
-          <p:nvPr/>
-        </p:nvSpPr>
-        <p:spPr>
-          <a:xfrm>
-            <a:off x="7834396" y="3154680"/>
-            <a:ext cx="258409" cy="0"/>
+            <a:endParaRPr lang="en-US" sz="900" dirty="0"/>
+          </a:p>
+        </p:txBody>
+      </p:sp>
+      <p:sp>
+        <p:nvSpPr>
+          <p:cNvPr id="21" name="Shape 19"/>
+          <p:cNvSpPr/>
+          <p:nvPr/>
+        </p:nvSpPr>
+        <p:spPr>
+          <a:xfrm>
+            <a:off x="7964424" y="3337560"/>
+            <a:ext cx="164592" cy="0"/>
           </a:xfrm>
           <a:prstGeom prst="line">
             <a:avLst/>
           </a:prstGeom>
           <a:noFill/>
-          <a:ln w="25400">
+          <a:ln w="20320">
             <a:solidFill>
               <a:srgbClr val="74889A"/>
             </a:solidFill>
@@ -2168,24 +2196,24 @@
       </p:sp>
       <p:sp>
         <p:nvSpPr>
-          <p:cNvPr id="23" name="Shape 21"/>
-          <p:cNvSpPr/>
-          <p:nvPr/>
-        </p:nvSpPr>
-        <p:spPr>
-          <a:xfrm>
-            <a:off x="8111094" y="2468880"/>
-            <a:ext cx="1572768" cy="1371600"/>
+          <p:cNvPr id="22" name="Shape 20"/>
+          <p:cNvSpPr/>
+          <p:nvPr/>
+        </p:nvSpPr>
+        <p:spPr>
+          <a:xfrm>
+            <a:off x="8138160" y="2651760"/>
+            <a:ext cx="1463040" cy="1371600"/>
           </a:xfrm>
           <a:prstGeom prst="roundRect">
             <a:avLst>
-              <a:gd name="adj" fmla="val 6667"/>
+              <a:gd name="adj" fmla="val 5333"/>
             </a:avLst>
           </a:prstGeom>
           <a:solidFill>
-            <a:srgbClr val="EEF1F4"/>
+            <a:srgbClr val="FFFFFF"/>
           </a:solidFill>
-          <a:ln w="19050">
+          <a:ln w="15240">
             <a:solidFill>
               <a:srgbClr val="33414F"/>
             </a:solidFill>
@@ -2195,34 +2223,14 @@
       </p:sp>
       <p:sp>
         <p:nvSpPr>
-          <p:cNvPr id="24" name="Shape 22"/>
-          <p:cNvSpPr/>
-          <p:nvPr/>
-        </p:nvSpPr>
-        <p:spPr>
-          <a:xfrm>
-            <a:off x="8796894" y="2670048"/>
-            <a:ext cx="201168" cy="201168"/>
-          </a:xfrm>
-          <a:prstGeom prst="ellipse">
-            <a:avLst/>
-          </a:prstGeom>
-          <a:solidFill>
-            <a:srgbClr val="33414F"/>
-          </a:solidFill>
-          <a:ln/>
-        </p:spPr>
-      </p:sp>
-      <p:sp>
-        <p:nvSpPr>
-          <p:cNvPr id="25" name="Text 23"/>
-          <p:cNvSpPr/>
-          <p:nvPr/>
-        </p:nvSpPr>
-        <p:spPr>
-          <a:xfrm>
-            <a:off x="8065374" y="2926080"/>
-            <a:ext cx="1664208" cy="411480"/>
+          <p:cNvPr id="23" name="Text 21"/>
+          <p:cNvSpPr/>
+          <p:nvPr/>
+        </p:nvSpPr>
+        <p:spPr>
+          <a:xfrm>
+            <a:off x="8092440" y="2907792"/>
+            <a:ext cx="1554480" cy="457200"/>
           </a:xfrm>
           <a:prstGeom prst="rect">
             <a:avLst/>
@@ -2238,7 +2246,7 @@
               <a:buNone/>
             </a:pPr>
             <a:r>
-              <a:rPr lang="en-US" sz="1450" b="1" dirty="0">
+              <a:rPr lang="en-US" sz="1250" b="1" dirty="0">
                 <a:solidFill>
                   <a:srgbClr val="20262D"/>
                 </a:solidFill>
@@ -2248,36 +2256,36 @@
               </a:rPr>
               <a:t>DynamoDB</a:t>
             </a:r>
-            <a:endParaRPr lang="en-US" sz="1450" dirty="0"/>
-          </a:p>
-        </p:txBody>
-      </p:sp>
-      <p:sp>
-        <p:nvSpPr>
-          <p:cNvPr id="26" name="Text 24"/>
-          <p:cNvSpPr/>
-          <p:nvPr/>
-        </p:nvSpPr>
-        <p:spPr>
-          <a:xfrm>
-            <a:off x="8092806" y="3310128"/>
-            <a:ext cx="1609344" cy="457200"/>
-          </a:xfrm>
-          <a:prstGeom prst="rect">
-            <a:avLst/>
-          </a:prstGeom>
-          <a:noFill/>
-          <a:ln/>
-        </p:spPr>
-        <p:txBody>
-          <a:bodyPr wrap="square" lIns="0" tIns="0" rIns="0" bIns="0" rtlCol="0" anchor="t"/>
+            <a:endParaRPr lang="en-US" sz="1250" dirty="0"/>
+          </a:p>
+        </p:txBody>
+      </p:sp>
+      <p:sp>
+        <p:nvSpPr>
+          <p:cNvPr id="24" name="Text 22"/>
+          <p:cNvSpPr/>
+          <p:nvPr/>
+        </p:nvSpPr>
+        <p:spPr>
+          <a:xfrm>
+            <a:off x="8119872" y="3401568"/>
+            <a:ext cx="1499616" cy="457200"/>
+          </a:xfrm>
+          <a:prstGeom prst="rect">
+            <a:avLst/>
+          </a:prstGeom>
+          <a:noFill/>
+          <a:ln/>
+        </p:spPr>
+        <p:txBody>
+          <a:bodyPr wrap="square" lIns="0" tIns="0" rIns="0" bIns="0" rtlCol="0" anchor="ctr"/>
           <a:lstStyle/>
           <a:p>
             <a:pPr algn="ctr" indent="0" marL="0">
               <a:buNone/>
             </a:pPr>
             <a:r>
-              <a:rPr lang="en-US" sz="1050" dirty="0">
+              <a:rPr lang="en-US" sz="900" dirty="0">
                 <a:solidFill>
                   <a:srgbClr val="626E78"/>
                 </a:solidFill>
@@ -2287,26 +2295,26 @@
               </a:rPr>
               <a:t>window aggregates</a:t>
             </a:r>
-            <a:endParaRPr lang="en-US" sz="1050" dirty="0"/>
-          </a:p>
-        </p:txBody>
-      </p:sp>
-      <p:sp>
-        <p:nvSpPr>
-          <p:cNvPr id="27" name="Shape 25"/>
-          <p:cNvSpPr/>
-          <p:nvPr/>
-        </p:nvSpPr>
-        <p:spPr>
-          <a:xfrm>
-            <a:off x="9702150" y="3154680"/>
-            <a:ext cx="258409" cy="0"/>
+            <a:endParaRPr lang="en-US" sz="900" dirty="0"/>
+          </a:p>
+        </p:txBody>
+      </p:sp>
+      <p:sp>
+        <p:nvSpPr>
+          <p:cNvPr id="25" name="Shape 23"/>
+          <p:cNvSpPr/>
+          <p:nvPr/>
+        </p:nvSpPr>
+        <p:spPr>
+          <a:xfrm>
+            <a:off x="9610344" y="3337560"/>
+            <a:ext cx="164592" cy="0"/>
           </a:xfrm>
           <a:prstGeom prst="line">
             <a:avLst/>
           </a:prstGeom>
           <a:noFill/>
-          <a:ln w="25400">
+          <a:ln w="20320">
             <a:solidFill>
               <a:srgbClr val="74889A"/>
             </a:solidFill>
@@ -2317,24 +2325,24 @@
       </p:sp>
       <p:sp>
         <p:nvSpPr>
-          <p:cNvPr id="28" name="Shape 26"/>
-          <p:cNvSpPr/>
-          <p:nvPr/>
-        </p:nvSpPr>
-        <p:spPr>
-          <a:xfrm>
-            <a:off x="9978847" y="2468880"/>
-            <a:ext cx="1572768" cy="1371600"/>
+          <p:cNvPr id="26" name="Shape 24"/>
+          <p:cNvSpPr/>
+          <p:nvPr/>
+        </p:nvSpPr>
+        <p:spPr>
+          <a:xfrm>
+            <a:off x="9784080" y="2651760"/>
+            <a:ext cx="1463040" cy="1371600"/>
           </a:xfrm>
           <a:prstGeom prst="roundRect">
             <a:avLst>
-              <a:gd name="adj" fmla="val 6667"/>
+              <a:gd name="adj" fmla="val 5333"/>
             </a:avLst>
           </a:prstGeom>
           <a:solidFill>
-            <a:srgbClr val="EEF1F4"/>
+            <a:srgbClr val="FFFFFF"/>
           </a:solidFill>
-          <a:ln w="19050">
+          <a:ln w="15240">
             <a:solidFill>
               <a:srgbClr val="4C6579"/>
             </a:solidFill>
@@ -2344,34 +2352,14 @@
       </p:sp>
       <p:sp>
         <p:nvSpPr>
-          <p:cNvPr id="29" name="Shape 27"/>
-          <p:cNvSpPr/>
-          <p:nvPr/>
-        </p:nvSpPr>
-        <p:spPr>
-          <a:xfrm>
-            <a:off x="10664647" y="2670048"/>
-            <a:ext cx="201168" cy="201168"/>
-          </a:xfrm>
-          <a:prstGeom prst="ellipse">
-            <a:avLst/>
-          </a:prstGeom>
-          <a:solidFill>
-            <a:srgbClr val="4C6579"/>
-          </a:solidFill>
-          <a:ln/>
-        </p:spPr>
-      </p:sp>
-      <p:sp>
-        <p:nvSpPr>
-          <p:cNvPr id="30" name="Text 28"/>
-          <p:cNvSpPr/>
-          <p:nvPr/>
-        </p:nvSpPr>
-        <p:spPr>
-          <a:xfrm>
-            <a:off x="9933127" y="2926080"/>
-            <a:ext cx="1664208" cy="411480"/>
+          <p:cNvPr id="27" name="Text 25"/>
+          <p:cNvSpPr/>
+          <p:nvPr/>
+        </p:nvSpPr>
+        <p:spPr>
+          <a:xfrm>
+            <a:off x="9738360" y="2907792"/>
+            <a:ext cx="1554480" cy="457200"/>
           </a:xfrm>
           <a:prstGeom prst="rect">
             <a:avLst/>
@@ -2387,7 +2375,7 @@
               <a:buNone/>
             </a:pPr>
             <a:r>
-              <a:rPr lang="en-US" sz="1450" b="1" dirty="0">
+              <a:rPr lang="en-US" sz="1250" b="1" dirty="0">
                 <a:solidFill>
                   <a:srgbClr val="20262D"/>
                 </a:solidFill>
@@ -2397,36 +2385,36 @@
               </a:rPr>
               <a:t>API GW + S3</a:t>
             </a:r>
-            <a:endParaRPr lang="en-US" sz="1450" dirty="0"/>
-          </a:p>
-        </p:txBody>
-      </p:sp>
-      <p:sp>
-        <p:nvSpPr>
-          <p:cNvPr id="31" name="Text 29"/>
-          <p:cNvSpPr/>
-          <p:nvPr/>
-        </p:nvSpPr>
-        <p:spPr>
-          <a:xfrm>
-            <a:off x="9960559" y="3310128"/>
-            <a:ext cx="1609344" cy="457200"/>
-          </a:xfrm>
-          <a:prstGeom prst="rect">
-            <a:avLst/>
-          </a:prstGeom>
-          <a:noFill/>
-          <a:ln/>
-        </p:spPr>
-        <p:txBody>
-          <a:bodyPr wrap="square" lIns="0" tIns="0" rIns="0" bIns="0" rtlCol="0" anchor="t"/>
+            <a:endParaRPr lang="en-US" sz="1250" dirty="0"/>
+          </a:p>
+        </p:txBody>
+      </p:sp>
+      <p:sp>
+        <p:nvSpPr>
+          <p:cNvPr id="28" name="Text 26"/>
+          <p:cNvSpPr/>
+          <p:nvPr/>
+        </p:nvSpPr>
+        <p:spPr>
+          <a:xfrm>
+            <a:off x="9765792" y="3401568"/>
+            <a:ext cx="1499616" cy="457200"/>
+          </a:xfrm>
+          <a:prstGeom prst="rect">
+            <a:avLst/>
+          </a:prstGeom>
+          <a:noFill/>
+          <a:ln/>
+        </p:spPr>
+        <p:txBody>
+          <a:bodyPr wrap="square" lIns="0" tIns="0" rIns="0" bIns="0" rtlCol="0" anchor="ctr"/>
           <a:lstStyle/>
           <a:p>
             <a:pPr algn="ctr" indent="0" marL="0">
               <a:buNone/>
             </a:pPr>
             <a:r>
-              <a:rPr lang="en-US" sz="1050" dirty="0">
+              <a:rPr lang="en-US" sz="900" dirty="0">
                 <a:solidFill>
                   <a:srgbClr val="626E78"/>
                 </a:solidFill>
@@ -2436,98 +2424,20 @@
               </a:rPr>
               <a:t>fleet dashboard</a:t>
             </a:r>
-            <a:endParaRPr lang="en-US" sz="1050" dirty="0"/>
-          </a:p>
-        </p:txBody>
-      </p:sp>
-      <p:sp>
-        <p:nvSpPr>
-          <p:cNvPr id="32" name="Text 30"/>
-          <p:cNvSpPr/>
-          <p:nvPr/>
-        </p:nvSpPr>
-        <p:spPr>
-          <a:xfrm>
-            <a:off x="640080" y="3977640"/>
-            <a:ext cx="3440521" cy="274320"/>
-          </a:xfrm>
-          <a:prstGeom prst="rect">
-            <a:avLst/>
-          </a:prstGeom>
-          <a:noFill/>
-          <a:ln/>
-        </p:spPr>
-        <p:txBody>
-          <a:bodyPr wrap="square" rtlCol="0" anchor="ctr"/>
-          <a:lstStyle/>
-          <a:p>
-            <a:pPr algn="ctr" indent="0" marL="0">
-              <a:buNone/>
-            </a:pPr>
-            <a:r>
-              <a:rPr lang="en-US" sz="1100" b="1" spc="200" kern="0" dirty="0">
-                <a:solidFill>
-                  <a:srgbClr val="74889A"/>
-                </a:solidFill>
-                <a:latin typeface="Calibri" pitchFamily="34" charset="0"/>
-                <a:ea typeface="Calibri" pitchFamily="34" charset="-122"/>
-                <a:cs typeface="Calibri" pitchFamily="34" charset="-120"/>
-              </a:rPr>
-              <a:t>EDGE</a:t>
-            </a:r>
-            <a:endParaRPr lang="en-US" sz="1100" dirty="0"/>
-          </a:p>
-        </p:txBody>
-      </p:sp>
-      <p:sp>
-        <p:nvSpPr>
-          <p:cNvPr id="33" name="Text 31"/>
-          <p:cNvSpPr/>
-          <p:nvPr/>
-        </p:nvSpPr>
-        <p:spPr>
-          <a:xfrm>
-            <a:off x="4375587" y="3977640"/>
-            <a:ext cx="7176028" cy="274320"/>
-          </a:xfrm>
-          <a:prstGeom prst="rect">
-            <a:avLst/>
-          </a:prstGeom>
-          <a:noFill/>
-          <a:ln/>
-        </p:spPr>
-        <p:txBody>
-          <a:bodyPr wrap="square" rtlCol="0" anchor="ctr"/>
-          <a:lstStyle/>
-          <a:p>
-            <a:pPr algn="ctr" indent="0" marL="0">
-              <a:buNone/>
-            </a:pPr>
-            <a:r>
-              <a:rPr lang="en-US" sz="1100" b="1" spc="200" kern="0" dirty="0">
-                <a:solidFill>
-                  <a:srgbClr val="33414F"/>
-                </a:solidFill>
-                <a:latin typeface="Calibri" pitchFamily="34" charset="0"/>
-                <a:ea typeface="Calibri" pitchFamily="34" charset="-122"/>
-                <a:cs typeface="Calibri" pitchFamily="34" charset="-120"/>
-              </a:rPr>
-              <a:t>CLOUD</a:t>
-            </a:r>
-            <a:endParaRPr lang="en-US" sz="1100" dirty="0"/>
-          </a:p>
-        </p:txBody>
-      </p:sp>
-      <p:sp>
-        <p:nvSpPr>
-          <p:cNvPr id="34" name="Text 32"/>
-          <p:cNvSpPr/>
-          <p:nvPr/>
-        </p:nvSpPr>
-        <p:spPr>
-          <a:xfrm>
-            <a:off x="640080" y="5212080"/>
-            <a:ext cx="10972800" cy="640080"/>
+            <a:endParaRPr lang="en-US" sz="900" dirty="0"/>
+          </a:p>
+        </p:txBody>
+      </p:sp>
+      <p:sp>
+        <p:nvSpPr>
+          <p:cNvPr id="29" name="Text 27"/>
+          <p:cNvSpPr/>
+          <p:nvPr/>
+        </p:nvSpPr>
+        <p:spPr>
+          <a:xfrm>
+            <a:off x="640080" y="5257800"/>
+            <a:ext cx="10972800" cy="731520"/>
           </a:xfrm>
           <a:prstGeom prst="rect">
             <a:avLst/>
@@ -2669,34 +2579,14 @@
       </p:sp>
       <p:sp>
         <p:nvSpPr>
-          <p:cNvPr id="4" name="Shape 2"/>
-          <p:cNvSpPr/>
-          <p:nvPr/>
-        </p:nvSpPr>
-        <p:spPr>
-          <a:xfrm>
-            <a:off x="731520" y="1965960"/>
-            <a:ext cx="685800" cy="685800"/>
-          </a:xfrm>
-          <a:prstGeom prst="ellipse">
-            <a:avLst/>
-          </a:prstGeom>
-          <a:solidFill>
-            <a:srgbClr val="33414F"/>
-          </a:solidFill>
-          <a:ln/>
-        </p:spPr>
-      </p:sp>
-      <p:sp>
-        <p:nvSpPr>
-          <p:cNvPr id="5" name="Text 3"/>
-          <p:cNvSpPr/>
-          <p:nvPr/>
-        </p:nvSpPr>
-        <p:spPr>
-          <a:xfrm>
-            <a:off x="731520" y="1965960"/>
-            <a:ext cx="685800" cy="685800"/>
+          <p:cNvPr id="4" name="Text 2"/>
+          <p:cNvSpPr/>
+          <p:nvPr/>
+        </p:nvSpPr>
+        <p:spPr>
+          <a:xfrm>
+            <a:off x="640080" y="1737360"/>
+            <a:ext cx="1097280" cy="1097280"/>
           </a:xfrm>
           <a:prstGeom prst="rect">
             <a:avLst/>
@@ -2708,13 +2598,13 @@
           <a:bodyPr wrap="square" lIns="0" tIns="0" rIns="0" bIns="0" rtlCol="0" anchor="ctr"/>
           <a:lstStyle/>
           <a:p>
-            <a:pPr algn="ctr" indent="0" marL="0">
-              <a:buNone/>
-            </a:pPr>
-            <a:r>
-              <a:rPr lang="en-US" sz="2600" b="1" dirty="0">
-                <a:solidFill>
-                  <a:srgbClr val="FFFFFF"/>
+            <a:pPr indent="0" marL="0">
+              <a:buNone/>
+            </a:pPr>
+            <a:r>
+              <a:rPr lang="en-US" sz="5400" b="1" dirty="0">
+                <a:solidFill>
+                  <a:srgbClr val="EEF1F4"/>
                 </a:solidFill>
                 <a:latin typeface="Times New Roman" pitchFamily="34" charset="0"/>
                 <a:ea typeface="Times New Roman" pitchFamily="34" charset="-122"/>
@@ -2722,9 +2612,32 @@
               </a:rPr>
               <a:t>1</a:t>
             </a:r>
-            <a:endParaRPr lang="en-US" sz="2600" dirty="0"/>
-          </a:p>
-        </p:txBody>
+            <a:endParaRPr lang="en-US" sz="5400" dirty="0"/>
+          </a:p>
+        </p:txBody>
+      </p:sp>
+      <p:sp>
+        <p:nvSpPr>
+          <p:cNvPr id="5" name="Shape 3"/>
+          <p:cNvSpPr/>
+          <p:nvPr/>
+        </p:nvSpPr>
+        <p:spPr>
+          <a:xfrm>
+            <a:off x="1828800" y="1920240"/>
+            <a:ext cx="0" cy="1051560"/>
+          </a:xfrm>
+          <a:prstGeom prst="line">
+            <a:avLst/>
+          </a:prstGeom>
+          <a:noFill/>
+          <a:ln w="25400">
+            <a:solidFill>
+              <a:srgbClr val="4C6579"/>
+            </a:solidFill>
+            <a:prstDash val="solid"/>
+          </a:ln>
+        </p:spPr>
       </p:sp>
       <p:sp>
         <p:nvSpPr>
@@ -2734,8 +2647,8 @@
         </p:nvSpPr>
         <p:spPr>
           <a:xfrm>
-            <a:off x="1691640" y="1920240"/>
-            <a:ext cx="9875520" cy="411480"/>
+            <a:off x="2057400" y="1874520"/>
+            <a:ext cx="9509760" cy="411480"/>
           </a:xfrm>
           <a:prstGeom prst="rect">
             <a:avLst/>
@@ -2759,7 +2672,7 @@
                 <a:ea typeface="Calibri" pitchFamily="34" charset="-122"/>
                 <a:cs typeface="Calibri" pitchFamily="34" charset="-120"/>
               </a:rPr>
-              <a:t>Pipeline health, all green</a:t>
+              <a:t>Ten robots across two zones</a:t>
             </a:r>
             <a:endParaRPr lang="en-US" sz="1800" dirty="0"/>
           </a:p>
@@ -2773,8 +2686,8 @@
         </p:nvSpPr>
         <p:spPr>
           <a:xfrm>
-            <a:off x="1691640" y="2340864"/>
-            <a:ext cx="9875520" cy="640080"/>
+            <a:off x="2057400" y="2313432"/>
+            <a:ext cx="9509760" cy="822960"/>
           </a:xfrm>
           <a:prstGeom prst="rect">
             <a:avLst/>
@@ -2798,7 +2711,7 @@
                 <a:ea typeface="Calibri" pitchFamily="34" charset="-122"/>
                 <a:cs typeface="Calibri" pitchFamily="34" charset="-120"/>
               </a:rPr>
-              <a:t>Gateway, queue, Lambda and pipeline all healthy, with the freshest window seconds old.</a:t>
+              <a:t>Battery, position, task load, motor and temperature for every robot, fifty live signals updating on the fleet board.</a:t>
             </a:r>
             <a:endParaRPr lang="en-US" sz="1350" dirty="0"/>
           </a:p>
@@ -2806,34 +2719,14 @@
       </p:sp>
       <p:sp>
         <p:nvSpPr>
-          <p:cNvPr id="8" name="Shape 6"/>
-          <p:cNvSpPr/>
-          <p:nvPr/>
-        </p:nvSpPr>
-        <p:spPr>
-          <a:xfrm>
-            <a:off x="731520" y="3383280"/>
-            <a:ext cx="685800" cy="685800"/>
-          </a:xfrm>
-          <a:prstGeom prst="ellipse">
-            <a:avLst/>
-          </a:prstGeom>
-          <a:solidFill>
-            <a:srgbClr val="33414F"/>
-          </a:solidFill>
-          <a:ln/>
-        </p:spPr>
-      </p:sp>
-      <p:sp>
-        <p:nvSpPr>
-          <p:cNvPr id="9" name="Text 7"/>
-          <p:cNvSpPr/>
-          <p:nvPr/>
-        </p:nvSpPr>
-        <p:spPr>
-          <a:xfrm>
-            <a:off x="731520" y="3383280"/>
-            <a:ext cx="685800" cy="685800"/>
+          <p:cNvPr id="8" name="Text 6"/>
+          <p:cNvSpPr/>
+          <p:nvPr/>
+        </p:nvSpPr>
+        <p:spPr>
+          <a:xfrm>
+            <a:off x="640080" y="3200400"/>
+            <a:ext cx="1097280" cy="1097280"/>
           </a:xfrm>
           <a:prstGeom prst="rect">
             <a:avLst/>
@@ -2845,13 +2738,13 @@
           <a:bodyPr wrap="square" lIns="0" tIns="0" rIns="0" bIns="0" rtlCol="0" anchor="ctr"/>
           <a:lstStyle/>
           <a:p>
-            <a:pPr algn="ctr" indent="0" marL="0">
-              <a:buNone/>
-            </a:pPr>
-            <a:r>
-              <a:rPr lang="en-US" sz="2600" b="1" dirty="0">
-                <a:solidFill>
-                  <a:srgbClr val="FFFFFF"/>
+            <a:pPr indent="0" marL="0">
+              <a:buNone/>
+            </a:pPr>
+            <a:r>
+              <a:rPr lang="en-US" sz="5400" b="1" dirty="0">
+                <a:solidFill>
+                  <a:srgbClr val="EEF1F4"/>
                 </a:solidFill>
                 <a:latin typeface="Times New Roman" pitchFamily="34" charset="0"/>
                 <a:ea typeface="Times New Roman" pitchFamily="34" charset="-122"/>
@@ -2859,9 +2752,32 @@
               </a:rPr>
               <a:t>2</a:t>
             </a:r>
-            <a:endParaRPr lang="en-US" sz="2600" dirty="0"/>
-          </a:p>
-        </p:txBody>
+            <a:endParaRPr lang="en-US" sz="5400" dirty="0"/>
+          </a:p>
+        </p:txBody>
+      </p:sp>
+      <p:sp>
+        <p:nvSpPr>
+          <p:cNvPr id="9" name="Shape 7"/>
+          <p:cNvSpPr/>
+          <p:nvPr/>
+        </p:nvSpPr>
+        <p:spPr>
+          <a:xfrm>
+            <a:off x="1828800" y="3383280"/>
+            <a:ext cx="0" cy="1051560"/>
+          </a:xfrm>
+          <a:prstGeom prst="line">
+            <a:avLst/>
+          </a:prstGeom>
+          <a:noFill/>
+          <a:ln w="25400">
+            <a:solidFill>
+              <a:srgbClr val="4C6579"/>
+            </a:solidFill>
+            <a:prstDash val="solid"/>
+          </a:ln>
+        </p:spPr>
       </p:sp>
       <p:sp>
         <p:nvSpPr>
@@ -2871,8 +2787,8 @@
         </p:nvSpPr>
         <p:spPr>
           <a:xfrm>
-            <a:off x="1691640" y="3337560"/>
-            <a:ext cx="9875520" cy="411480"/>
+            <a:off x="2057400" y="3337560"/>
+            <a:ext cx="9509760" cy="411480"/>
           </a:xfrm>
           <a:prstGeom prst="rect">
             <a:avLst/>
@@ -2896,7 +2812,7 @@
                 <a:ea typeface="Calibri" pitchFamily="34" charset="-122"/>
                 <a:cs typeface="Calibri" pitchFamily="34" charset="-120"/>
               </a:rPr>
-              <a:t>Live fleet telemetry</a:t>
+              <a:t>Battery degradation, visible early</a:t>
             </a:r>
             <a:endParaRPr lang="en-US" sz="1800" dirty="0"/>
           </a:p>
@@ -2910,8 +2826,8 @@
         </p:nvSpPr>
         <p:spPr>
           <a:xfrm>
-            <a:off x="1691640" y="3758184"/>
-            <a:ext cx="9875520" cy="640080"/>
+            <a:off x="2057400" y="3776472"/>
+            <a:ext cx="9509760" cy="822960"/>
           </a:xfrm>
           <a:prstGeom prst="rect">
             <a:avLst/>
@@ -2935,7 +2851,7 @@
                 <a:ea typeface="Calibri" pitchFamily="34" charset="-122"/>
                 <a:cs typeface="Calibri" pitchFamily="34" charset="-120"/>
               </a:rPr>
-              <a:t>Ten robots across two zones, five channels each, with item counts climbing during the check.</a:t>
+              <a:t>The battery telemetry shows the slow decline a periodic check misses, and an alert raises when a robot crosses its threshold.</a:t>
             </a:r>
             <a:endParaRPr lang="en-US" sz="1350" dirty="0"/>
           </a:p>
@@ -2943,34 +2859,14 @@
       </p:sp>
       <p:sp>
         <p:nvSpPr>
-          <p:cNvPr id="12" name="Shape 10"/>
-          <p:cNvSpPr/>
-          <p:nvPr/>
-        </p:nvSpPr>
-        <p:spPr>
-          <a:xfrm>
-            <a:off x="731520" y="4800600"/>
-            <a:ext cx="685800" cy="685800"/>
-          </a:xfrm>
-          <a:prstGeom prst="ellipse">
-            <a:avLst/>
-          </a:prstGeom>
-          <a:solidFill>
-            <a:srgbClr val="33414F"/>
-          </a:solidFill>
-          <a:ln/>
-        </p:spPr>
-      </p:sp>
-      <p:sp>
-        <p:nvSpPr>
-          <p:cNvPr id="13" name="Text 11"/>
-          <p:cNvSpPr/>
-          <p:nvPr/>
-        </p:nvSpPr>
-        <p:spPr>
-          <a:xfrm>
-            <a:off x="731520" y="4800600"/>
-            <a:ext cx="685800" cy="685800"/>
+          <p:cNvPr id="12" name="Text 10"/>
+          <p:cNvSpPr/>
+          <p:nvPr/>
+        </p:nvSpPr>
+        <p:spPr>
+          <a:xfrm>
+            <a:off x="640080" y="4663440"/>
+            <a:ext cx="1097280" cy="1097280"/>
           </a:xfrm>
           <a:prstGeom prst="rect">
             <a:avLst/>
@@ -2982,13 +2878,13 @@
           <a:bodyPr wrap="square" lIns="0" tIns="0" rIns="0" bIns="0" rtlCol="0" anchor="ctr"/>
           <a:lstStyle/>
           <a:p>
-            <a:pPr algn="ctr" indent="0" marL="0">
-              <a:buNone/>
-            </a:pPr>
-            <a:r>
-              <a:rPr lang="en-US" sz="2600" b="1" dirty="0">
-                <a:solidFill>
-                  <a:srgbClr val="FFFFFF"/>
+            <a:pPr indent="0" marL="0">
+              <a:buNone/>
+            </a:pPr>
+            <a:r>
+              <a:rPr lang="en-US" sz="5400" b="1" dirty="0">
+                <a:solidFill>
+                  <a:srgbClr val="EEF1F4"/>
                 </a:solidFill>
                 <a:latin typeface="Times New Roman" pitchFamily="34" charset="0"/>
                 <a:ea typeface="Times New Roman" pitchFamily="34" charset="-122"/>
@@ -2996,9 +2892,32 @@
               </a:rPr>
               <a:t>3</a:t>
             </a:r>
-            <a:endParaRPr lang="en-US" sz="2600" dirty="0"/>
-          </a:p>
-        </p:txBody>
+            <a:endParaRPr lang="en-US" sz="5400" dirty="0"/>
+          </a:p>
+        </p:txBody>
+      </p:sp>
+      <p:sp>
+        <p:nvSpPr>
+          <p:cNvPr id="13" name="Shape 11"/>
+          <p:cNvSpPr/>
+          <p:nvPr/>
+        </p:nvSpPr>
+        <p:spPr>
+          <a:xfrm>
+            <a:off x="1828800" y="4846320"/>
+            <a:ext cx="0" cy="1051560"/>
+          </a:xfrm>
+          <a:prstGeom prst="line">
+            <a:avLst/>
+          </a:prstGeom>
+          <a:noFill/>
+          <a:ln w="25400">
+            <a:solidFill>
+              <a:srgbClr val="4C6579"/>
+            </a:solidFill>
+            <a:prstDash val="solid"/>
+          </a:ln>
+        </p:spPr>
       </p:sp>
       <p:sp>
         <p:nvSpPr>
@@ -3008,8 +2927,8 @@
         </p:nvSpPr>
         <p:spPr>
           <a:xfrm>
-            <a:off x="1691640" y="4754880"/>
-            <a:ext cx="9875520" cy="411480"/>
+            <a:off x="2057400" y="4800600"/>
+            <a:ext cx="9509760" cy="411480"/>
           </a:xfrm>
           <a:prstGeom prst="rect">
             <a:avLst/>
@@ -3033,7 +2952,7 @@
                 <a:ea typeface="Calibri" pitchFamily="34" charset="-122"/>
                 <a:cs typeface="Calibri" pitchFamily="34" charset="-120"/>
               </a:rPr>
-              <a:t>One command to deploy</a:t>
+              <a:t>Provisioned by one command</a:t>
             </a:r>
             <a:endParaRPr lang="en-US" sz="1800" dirty="0"/>
           </a:p>
@@ -3047,8 +2966,8 @@
         </p:nvSpPr>
         <p:spPr>
           <a:xfrm>
-            <a:off x="1691640" y="5175504"/>
-            <a:ext cx="9875520" cy="640080"/>
+            <a:off x="2057400" y="5239512"/>
+            <a:ext cx="9509760" cy="822960"/>
           </a:xfrm>
           <a:prstGeom prst="rect">
             <a:avLst/>
@@ -3072,7 +2991,7 @@
                 <a:ea typeface="Calibri" pitchFamily="34" charset="-122"/>
                 <a:cs typeface="Calibri" pitchFamily="34" charset="-120"/>
               </a:rPr>
-              <a:t>116 automated tests pass, plus a 2,000-message burst via 32 workers; one Terraform apply provisioned all 24 resources.</a:t>
+              <a:t>Every resource behind this board came from a single Terraform apply — twenty-four resources, nothing clicked by hand.</a:t>
             </a:r>
             <a:endParaRPr lang="en-US" sz="1350" dirty="0"/>
           </a:p>
@@ -3086,7 +3005,7 @@
         </p:nvSpPr>
         <p:spPr>
           <a:xfrm>
-            <a:off x="640080" y="6263640"/>
+            <a:off x="640080" y="6309360"/>
             <a:ext cx="10972800" cy="365760"/>
           </a:xfrm>
           <a:prstGeom prst="rect">
@@ -3157,24 +3076,24 @@
         </p:nvSpPr>
         <p:spPr>
           <a:xfrm>
-            <a:off x="640080" y="640080"/>
-            <a:ext cx="10972800" cy="640080"/>
-          </a:xfrm>
-          <a:prstGeom prst="rect">
-            <a:avLst/>
-          </a:prstGeom>
-          <a:noFill/>
-          <a:ln/>
-        </p:spPr>
-        <p:txBody>
-          <a:bodyPr wrap="square" rtlCol="0" anchor="ctr"/>
+            <a:off x="640080" y="594360"/>
+            <a:ext cx="10972800" cy="822960"/>
+          </a:xfrm>
+          <a:prstGeom prst="rect">
+            <a:avLst/>
+          </a:prstGeom>
+          <a:noFill/>
+          <a:ln/>
+        </p:spPr>
+        <p:txBody>
+          <a:bodyPr wrap="square" rtlCol="0" anchor="t"/>
           <a:lstStyle/>
           <a:p>
             <a:pPr indent="0" marL="0">
               <a:buNone/>
             </a:pPr>
             <a:r>
-              <a:rPr lang="en-US" sz="3000" b="1" dirty="0">
+              <a:rPr lang="en-US" sz="2800" b="1" dirty="0">
                 <a:solidFill>
                   <a:srgbClr val="FFFFFF"/>
                 </a:solidFill>
@@ -3184,30 +3103,65 @@
               </a:rPr>
               <a:t>Hardest Part — the bug only real AWS could expose</a:t>
             </a:r>
-            <a:endParaRPr lang="en-US" sz="3000" dirty="0"/>
-          </a:p>
-        </p:txBody>
-      </p:sp>
-      <p:sp>
-        <p:nvSpPr>
-          <p:cNvPr id="3" name="Shape 1"/>
-          <p:cNvSpPr/>
-          <p:nvPr/>
-        </p:nvSpPr>
-        <p:spPr>
-          <a:xfrm>
-            <a:off x="731520" y="1920240"/>
-            <a:ext cx="10698480" cy="1965960"/>
-          </a:xfrm>
-          <a:prstGeom prst="roundRect">
-            <a:avLst>
-              <a:gd name="adj" fmla="val 4651"/>
-            </a:avLst>
-          </a:prstGeom>
-          <a:solidFill>
-            <a:srgbClr val="2A3138"/>
-          </a:solidFill>
-          <a:ln w="15875">
+            <a:endParaRPr lang="en-US" sz="2800" dirty="0"/>
+          </a:p>
+        </p:txBody>
+      </p:sp>
+      <p:sp>
+        <p:nvSpPr>
+          <p:cNvPr id="3" name="Text 1"/>
+          <p:cNvSpPr/>
+          <p:nvPr/>
+        </p:nvSpPr>
+        <p:spPr>
+          <a:xfrm>
+            <a:off x="731520" y="1965960"/>
+            <a:ext cx="2377440" cy="548640"/>
+          </a:xfrm>
+          <a:prstGeom prst="rect">
+            <a:avLst/>
+          </a:prstGeom>
+          <a:noFill/>
+          <a:ln/>
+        </p:spPr>
+        <p:txBody>
+          <a:bodyPr wrap="square" lIns="0" tIns="0" rIns="0" bIns="0" rtlCol="0" anchor="ctr"/>
+          <a:lstStyle/>
+          <a:p>
+            <a:pPr indent="0" marL="0">
+              <a:buNone/>
+            </a:pPr>
+            <a:r>
+              <a:rPr lang="en-US" sz="2200" b="1" dirty="0">
+                <a:solidFill>
+                  <a:srgbClr val="EC7A2E"/>
+                </a:solidFill>
+                <a:latin typeface="Times New Roman" pitchFamily="34" charset="0"/>
+                <a:ea typeface="Times New Roman" pitchFamily="34" charset="-122"/>
+                <a:cs typeface="Times New Roman" pitchFamily="34" charset="-120"/>
+              </a:rPr>
+              <a:t>Problem</a:t>
+            </a:r>
+            <a:endParaRPr lang="en-US" sz="2200" dirty="0"/>
+          </a:p>
+        </p:txBody>
+      </p:sp>
+      <p:sp>
+        <p:nvSpPr>
+          <p:cNvPr id="4" name="Shape 2"/>
+          <p:cNvSpPr/>
+          <p:nvPr/>
+        </p:nvSpPr>
+        <p:spPr>
+          <a:xfrm>
+            <a:off x="3200400" y="1920240"/>
+            <a:ext cx="0" cy="1737360"/>
+          </a:xfrm>
+          <a:prstGeom prst="line">
+            <a:avLst/>
+          </a:prstGeom>
+          <a:noFill/>
+          <a:ln w="25400">
             <a:solidFill>
               <a:srgbClr val="EC7A2E"/>
             </a:solidFill>
@@ -3217,14 +3171,14 @@
       </p:sp>
       <p:sp>
         <p:nvSpPr>
-          <p:cNvPr id="4" name="Text 2"/>
-          <p:cNvSpPr/>
-          <p:nvPr/>
-        </p:nvSpPr>
-        <p:spPr>
-          <a:xfrm>
-            <a:off x="1005840" y="2103120"/>
-            <a:ext cx="3657600" cy="457200"/>
+          <p:cNvPr id="5" name="Text 3"/>
+          <p:cNvSpPr/>
+          <p:nvPr/>
+        </p:nvSpPr>
+        <p:spPr>
+          <a:xfrm>
+            <a:off x="3474720" y="1920240"/>
+            <a:ext cx="7955280" cy="1874520"/>
           </a:xfrm>
           <a:prstGeom prst="rect">
             <a:avLst/>
@@ -3237,85 +3191,81 @@
           <a:lstStyle/>
           <a:p>
             <a:pPr indent="0" marL="0">
-              <a:buNone/>
-            </a:pPr>
-            <a:r>
-              <a:rPr lang="en-US" sz="1900" b="1" dirty="0">
-                <a:solidFill>
-                  <a:srgbClr val="EC7A2E"/>
+              <a:lnSpc>
+                <a:spcPct val="110000"/>
+              </a:lnSpc>
+              <a:buNone/>
+            </a:pPr>
+            <a:r>
+              <a:rPr lang="en-US" sz="1450" dirty="0">
+                <a:solidFill>
+                  <a:srgbClr val="D2DBE2"/>
+                </a:solidFill>
+                <a:latin typeface="Calibri" pitchFamily="34" charset="0"/>
+                <a:ea typeface="Calibri" pitchFamily="34" charset="-122"/>
+                <a:cs typeface="Calibri" pitchFamily="34" charset="-120"/>
+              </a:rPr>
+              <a:t>All three AWS-facing components always built static test credentials for the local emulator, and the fog publisher always applied its endpoint override — even on real AWS. Every one of the 116 tests passed and the full stack ran cleanly on the emulator, but on real AWS the Lambdas would override their execution-role credentials and be rejected, and the fog node would crash at startup on a missing endpoint.</a:t>
+            </a:r>
+            <a:endParaRPr lang="en-US" sz="1450" dirty="0"/>
+          </a:p>
+        </p:txBody>
+      </p:sp>
+      <p:sp>
+        <p:nvSpPr>
+          <p:cNvPr id="6" name="Text 4"/>
+          <p:cNvSpPr/>
+          <p:nvPr/>
+        </p:nvSpPr>
+        <p:spPr>
+          <a:xfrm>
+            <a:off x="731520" y="4114800"/>
+            <a:ext cx="2377440" cy="548640"/>
+          </a:xfrm>
+          <a:prstGeom prst="rect">
+            <a:avLst/>
+          </a:prstGeom>
+          <a:noFill/>
+          <a:ln/>
+        </p:spPr>
+        <p:txBody>
+          <a:bodyPr wrap="square" lIns="0" tIns="0" rIns="0" bIns="0" rtlCol="0" anchor="ctr"/>
+          <a:lstStyle/>
+          <a:p>
+            <a:pPr indent="0" marL="0">
+              <a:buNone/>
+            </a:pPr>
+            <a:r>
+              <a:rPr lang="en-US" sz="2200" b="1" dirty="0">
+                <a:solidFill>
+                  <a:srgbClr val="74889A"/>
                 </a:solidFill>
                 <a:latin typeface="Times New Roman" pitchFamily="34" charset="0"/>
                 <a:ea typeface="Times New Roman" pitchFamily="34" charset="-122"/>
                 <a:cs typeface="Times New Roman" pitchFamily="34" charset="-120"/>
               </a:rPr>
-              <a:t>Problem</a:t>
-            </a:r>
-            <a:endParaRPr lang="en-US" sz="1900" dirty="0"/>
-          </a:p>
-        </p:txBody>
-      </p:sp>
-      <p:sp>
-        <p:nvSpPr>
-          <p:cNvPr id="5" name="Text 3"/>
-          <p:cNvSpPr/>
-          <p:nvPr/>
-        </p:nvSpPr>
-        <p:spPr>
-          <a:xfrm>
-            <a:off x="1005840" y="2578608"/>
-            <a:ext cx="9966960" cy="1188720"/>
-          </a:xfrm>
-          <a:prstGeom prst="rect">
-            <a:avLst/>
-          </a:prstGeom>
-          <a:noFill/>
-          <a:ln/>
-        </p:spPr>
-        <p:txBody>
-          <a:bodyPr wrap="square" lIns="0" tIns="0" rIns="0" bIns="0" rtlCol="0" anchor="ctr"/>
-          <a:lstStyle/>
-          <a:p>
-            <a:pPr indent="0" marL="0">
-              <a:lnSpc>
-                <a:spcPct val="105000"/>
-              </a:lnSpc>
-              <a:buNone/>
-            </a:pPr>
-            <a:r>
-              <a:rPr lang="en-US" sz="1300" dirty="0">
-                <a:solidFill>
-                  <a:srgbClr val="D2DBE2"/>
-                </a:solidFill>
-                <a:latin typeface="Calibri" pitchFamily="34" charset="0"/>
-                <a:ea typeface="Calibri" pitchFamily="34" charset="-122"/>
-                <a:cs typeface="Calibri" pitchFamily="34" charset="-120"/>
-              </a:rPr>
-              <a:t>All three AWS-facing components always built static test credentials for the local emulator, and the fog publisher always applied its endpoint override — even on real AWS. Every one of the 116 tests passed and the full stack ran cleanly on the emulator, but on real AWS the Lambdas would override their execution-role credentials and be rejected, and the fog node would crash at startup on a missing endpoint.</a:t>
-            </a:r>
-            <a:endParaRPr lang="en-US" sz="1300" dirty="0"/>
-          </a:p>
-        </p:txBody>
-      </p:sp>
-      <p:sp>
-        <p:nvSpPr>
-          <p:cNvPr id="6" name="Shape 4"/>
-          <p:cNvSpPr/>
-          <p:nvPr/>
-        </p:nvSpPr>
-        <p:spPr>
-          <a:xfrm>
-            <a:off x="731520" y="4041648"/>
-            <a:ext cx="10698480" cy="1965960"/>
-          </a:xfrm>
-          <a:prstGeom prst="roundRect">
-            <a:avLst>
-              <a:gd name="adj" fmla="val 4651"/>
-            </a:avLst>
-          </a:prstGeom>
-          <a:solidFill>
-            <a:srgbClr val="2A3138"/>
-          </a:solidFill>
-          <a:ln w="15875">
+              <a:t>Solution</a:t>
+            </a:r>
+            <a:endParaRPr lang="en-US" sz="2200" dirty="0"/>
+          </a:p>
+        </p:txBody>
+      </p:sp>
+      <p:sp>
+        <p:nvSpPr>
+          <p:cNvPr id="7" name="Shape 5"/>
+          <p:cNvSpPr/>
+          <p:nvPr/>
+        </p:nvSpPr>
+        <p:spPr>
+          <a:xfrm>
+            <a:off x="3200400" y="4069080"/>
+            <a:ext cx="0" cy="1737360"/>
+          </a:xfrm>
+          <a:prstGeom prst="line">
+            <a:avLst/>
+          </a:prstGeom>
+          <a:noFill/>
+          <a:ln w="25400">
             <a:solidFill>
               <a:srgbClr val="74889A"/>
             </a:solidFill>
@@ -3325,53 +3275,14 @@
       </p:sp>
       <p:sp>
         <p:nvSpPr>
-          <p:cNvPr id="7" name="Text 5"/>
-          <p:cNvSpPr/>
-          <p:nvPr/>
-        </p:nvSpPr>
-        <p:spPr>
-          <a:xfrm>
-            <a:off x="1005840" y="4224528"/>
-            <a:ext cx="3657600" cy="457200"/>
-          </a:xfrm>
-          <a:prstGeom prst="rect">
-            <a:avLst/>
-          </a:prstGeom>
-          <a:noFill/>
-          <a:ln/>
-        </p:spPr>
-        <p:txBody>
-          <a:bodyPr wrap="square" lIns="0" tIns="0" rIns="0" bIns="0" rtlCol="0" anchor="ctr"/>
-          <a:lstStyle/>
-          <a:p>
-            <a:pPr indent="0" marL="0">
-              <a:buNone/>
-            </a:pPr>
-            <a:r>
-              <a:rPr lang="en-US" sz="1900" b="1" dirty="0">
-                <a:solidFill>
-                  <a:srgbClr val="74889A"/>
-                </a:solidFill>
-                <a:latin typeface="Times New Roman" pitchFamily="34" charset="0"/>
-                <a:ea typeface="Times New Roman" pitchFamily="34" charset="-122"/>
-                <a:cs typeface="Times New Roman" pitchFamily="34" charset="-120"/>
-              </a:rPr>
-              <a:t>Solution</a:t>
-            </a:r>
-            <a:endParaRPr lang="en-US" sz="1900" dirty="0"/>
-          </a:p>
-        </p:txBody>
-      </p:sp>
-      <p:sp>
-        <p:nvSpPr>
           <p:cNvPr id="8" name="Text 6"/>
           <p:cNvSpPr/>
           <p:nvPr/>
         </p:nvSpPr>
         <p:spPr>
           <a:xfrm>
-            <a:off x="1005840" y="4700016"/>
-            <a:ext cx="9966960" cy="1188720"/>
+            <a:off x="3474720" y="4069080"/>
+            <a:ext cx="7955280" cy="1874520"/>
           </a:xfrm>
           <a:prstGeom prst="rect">
             <a:avLst/>
@@ -3385,12 +3296,12 @@
           <a:p>
             <a:pPr indent="0" marL="0">
               <a:lnSpc>
-                <a:spcPct val="105000"/>
+                <a:spcPct val="110000"/>
               </a:lnSpc>
               <a:buNone/>
             </a:pPr>
             <a:r>
-              <a:rPr lang="en-US" sz="1300" dirty="0">
+              <a:rPr lang="en-US" sz="1450" dirty="0">
                 <a:solidFill>
                   <a:srgbClr val="D2DBE2"/>
                 </a:solidFill>
@@ -3400,7 +3311,7 @@
               </a:rPr>
               <a:t>Gate on the endpoint setting itself: present means emulator credentials, absent means the real AWS role — exactly as one class already did correctly. Deployed with this fix, every health check came up green on the first attempt. One of four defects a pre-deployment audit caught, none visible to a green 116-test suite.</a:t>
             </a:r>
-            <a:endParaRPr lang="en-US" sz="1300" dirty="0"/>
+            <a:endParaRPr lang="en-US" sz="1450" dirty="0"/>
           </a:p>
         </p:txBody>
       </p:sp>

--- a/ppt/GouthamUppu_X25167936_warehouse-robotics-fleet.pptx
+++ b/ppt/GouthamUppu_X25167936_warehouse-robotics-fleet.pptx
@@ -3050,7 +3050,7 @@
     <p:bg>
       <p:bgPr>
         <a:solidFill>
-          <a:srgbClr val="20242B"/>
+          <a:srgbClr val="FFFFFF"/>
         </a:solidFill>
       </p:bgPr>
     </p:bg>
@@ -3076,7 +3076,7 @@
         </p:nvSpPr>
         <p:spPr>
           <a:xfrm>
-            <a:off x="640080" y="594360"/>
+            <a:off x="640080" y="502920"/>
             <a:ext cx="10972800" cy="822960"/>
           </a:xfrm>
           <a:prstGeom prst="rect">
@@ -3095,7 +3095,7 @@
             <a:r>
               <a:rPr lang="en-US" sz="2800" b="1" dirty="0">
                 <a:solidFill>
-                  <a:srgbClr val="FFFFFF"/>
+                  <a:srgbClr val="20262D"/>
                 </a:solidFill>
                 <a:latin typeface="Times New Roman" pitchFamily="34" charset="0"/>
                 <a:ea typeface="Times New Roman" pitchFamily="34" charset="-122"/>
@@ -3132,7 +3132,7 @@
               <a:buNone/>
             </a:pPr>
             <a:r>
-              <a:rPr lang="en-US" sz="2200" b="1" dirty="0">
+              <a:rPr lang="en-US" sz="2300" b="1" dirty="0">
                 <a:solidFill>
                   <a:srgbClr val="EC7A2E"/>
                 </a:solidFill>
@@ -3142,7 +3142,7 @@
               </a:rPr>
               <a:t>Problem</a:t>
             </a:r>
-            <a:endParaRPr lang="en-US" sz="2200" dirty="0"/>
+            <a:endParaRPr lang="en-US" sz="2300" dirty="0"/>
           </a:p>
         </p:txBody>
       </p:sp>
@@ -3155,13 +3155,13 @@
         <p:spPr>
           <a:xfrm>
             <a:off x="3200400" y="1920240"/>
-            <a:ext cx="0" cy="1737360"/>
+            <a:ext cx="0" cy="1783080"/>
           </a:xfrm>
           <a:prstGeom prst="line">
             <a:avLst/>
           </a:prstGeom>
           <a:noFill/>
-          <a:ln w="25400">
+          <a:ln w="31750">
             <a:solidFill>
               <a:srgbClr val="EC7A2E"/>
             </a:solidFill>
@@ -3178,7 +3178,7 @@
         <p:spPr>
           <a:xfrm>
             <a:off x="3474720" y="1920240"/>
-            <a:ext cx="7955280" cy="1874520"/>
+            <a:ext cx="7955280" cy="1920240"/>
           </a:xfrm>
           <a:prstGeom prst="rect">
             <a:avLst/>
@@ -3192,14 +3192,14 @@
           <a:p>
             <a:pPr indent="0" marL="0">
               <a:lnSpc>
-                <a:spcPct val="110000"/>
+                <a:spcPct val="112000"/>
               </a:lnSpc>
               <a:buNone/>
             </a:pPr>
             <a:r>
               <a:rPr lang="en-US" sz="1450" dirty="0">
                 <a:solidFill>
-                  <a:srgbClr val="D2DBE2"/>
+                  <a:srgbClr val="20262D"/>
                 </a:solidFill>
                 <a:latin typeface="Calibri" pitchFamily="34" charset="0"/>
                 <a:ea typeface="Calibri" pitchFamily="34" charset="-122"/>
@@ -3236,9 +3236,9 @@
               <a:buNone/>
             </a:pPr>
             <a:r>
-              <a:rPr lang="en-US" sz="2200" b="1" dirty="0">
-                <a:solidFill>
-                  <a:srgbClr val="74889A"/>
+              <a:rPr lang="en-US" sz="2300" b="1" dirty="0">
+                <a:solidFill>
+                  <a:srgbClr val="4C6579"/>
                 </a:solidFill>
                 <a:latin typeface="Times New Roman" pitchFamily="34" charset="0"/>
                 <a:ea typeface="Times New Roman" pitchFamily="34" charset="-122"/>
@@ -3246,7 +3246,7 @@
               </a:rPr>
               <a:t>Solution</a:t>
             </a:r>
-            <a:endParaRPr lang="en-US" sz="2200" dirty="0"/>
+            <a:endParaRPr lang="en-US" sz="2300" dirty="0"/>
           </a:p>
         </p:txBody>
       </p:sp>
@@ -3259,15 +3259,15 @@
         <p:spPr>
           <a:xfrm>
             <a:off x="3200400" y="4069080"/>
-            <a:ext cx="0" cy="1737360"/>
+            <a:ext cx="0" cy="1783080"/>
           </a:xfrm>
           <a:prstGeom prst="line">
             <a:avLst/>
           </a:prstGeom>
           <a:noFill/>
-          <a:ln w="25400">
+          <a:ln w="31750">
             <a:solidFill>
-              <a:srgbClr val="74889A"/>
+              <a:srgbClr val="4C6579"/>
             </a:solidFill>
             <a:prstDash val="solid"/>
           </a:ln>
@@ -3282,7 +3282,7 @@
         <p:spPr>
           <a:xfrm>
             <a:off x="3474720" y="4069080"/>
-            <a:ext cx="7955280" cy="1874520"/>
+            <a:ext cx="7955280" cy="1920240"/>
           </a:xfrm>
           <a:prstGeom prst="rect">
             <a:avLst/>
@@ -3296,14 +3296,14 @@
           <a:p>
             <a:pPr indent="0" marL="0">
               <a:lnSpc>
-                <a:spcPct val="110000"/>
+                <a:spcPct val="112000"/>
               </a:lnSpc>
               <a:buNone/>
             </a:pPr>
             <a:r>
               <a:rPr lang="en-US" sz="1450" dirty="0">
                 <a:solidFill>
-                  <a:srgbClr val="D2DBE2"/>
+                  <a:srgbClr val="20262D"/>
                 </a:solidFill>
                 <a:latin typeface="Calibri" pitchFamily="34" charset="0"/>
                 <a:ea typeface="Calibri" pitchFamily="34" charset="-122"/>

--- a/ppt/GouthamUppu_X25167936_warehouse-robotics-fleet.pptx
+++ b/ppt/GouthamUppu_X25167936_warehouse-robotics-fleet.pptx
@@ -1144,30 +1144,50 @@
       </p:grpSpPr>
       <p:sp>
         <p:nvSpPr>
-          <p:cNvPr id="2" name="Text 0"/>
-          <p:cNvSpPr/>
-          <p:nvPr/>
-        </p:nvSpPr>
-        <p:spPr>
-          <a:xfrm>
-            <a:off x="548640" y="1051560"/>
-            <a:ext cx="11064240" cy="1188720"/>
-          </a:xfrm>
-          <a:prstGeom prst="rect">
-            <a:avLst/>
-          </a:prstGeom>
-          <a:noFill/>
-          <a:ln/>
-        </p:spPr>
-        <p:txBody>
-          <a:bodyPr wrap="square" rtlCol="0" anchor="ctr"/>
-          <a:lstStyle/>
-          <a:p>
-            <a:pPr algn="ctr" indent="0" marL="0">
-              <a:buNone/>
-            </a:pPr>
-            <a:r>
-              <a:rPr lang="en-US" sz="3800" b="1" dirty="0">
+          <p:cNvPr id="2" name="Shape 0"/>
+          <p:cNvSpPr/>
+          <p:nvPr/>
+        </p:nvSpPr>
+        <p:spPr>
+          <a:xfrm>
+            <a:off x="7528255" y="0"/>
+            <a:ext cx="4663440" cy="6858000"/>
+          </a:xfrm>
+          <a:prstGeom prst="rect">
+            <a:avLst/>
+          </a:prstGeom>
+          <a:solidFill>
+            <a:srgbClr val="33414F"/>
+          </a:solidFill>
+          <a:ln/>
+        </p:spPr>
+      </p:sp>
+      <p:sp>
+        <p:nvSpPr>
+          <p:cNvPr id="3" name="Text 1"/>
+          <p:cNvSpPr/>
+          <p:nvPr/>
+        </p:nvSpPr>
+        <p:spPr>
+          <a:xfrm>
+            <a:off x="7939735" y="1280160"/>
+            <a:ext cx="3749040" cy="2377440"/>
+          </a:xfrm>
+          <a:prstGeom prst="rect">
+            <a:avLst/>
+          </a:prstGeom>
+          <a:noFill/>
+          <a:ln/>
+        </p:spPr>
+        <p:txBody>
+          <a:bodyPr wrap="square" rtlCol="0" anchor="t"/>
+          <a:lstStyle/>
+          <a:p>
+            <a:pPr indent="0" marL="0">
+              <a:buNone/>
+            </a:pPr>
+            <a:r>
+              <a:rPr lang="en-US" sz="3400" b="1" dirty="0">
                 <a:solidFill>
                   <a:srgbClr val="FFFFFF"/>
                 </a:solidFill>
@@ -1177,20 +1197,20 @@
               </a:rPr>
               <a:t>Warehouse Robotics Fleet Monitoring</a:t>
             </a:r>
-            <a:endParaRPr lang="en-US" sz="3800" dirty="0"/>
-          </a:p>
-        </p:txBody>
-      </p:sp>
-      <p:sp>
-        <p:nvSpPr>
-          <p:cNvPr id="3" name="Text 1"/>
-          <p:cNvSpPr/>
-          <p:nvPr/>
-        </p:nvSpPr>
-        <p:spPr>
-          <a:xfrm>
-            <a:off x="548640" y="2286000"/>
-            <a:ext cx="11064240" cy="365760"/>
+            <a:endParaRPr lang="en-US" sz="3400" dirty="0"/>
+          </a:p>
+        </p:txBody>
+      </p:sp>
+      <p:sp>
+        <p:nvSpPr>
+          <p:cNvPr id="4" name="Text 2"/>
+          <p:cNvSpPr/>
+          <p:nvPr/>
+        </p:nvSpPr>
+        <p:spPr>
+          <a:xfrm>
+            <a:off x="7958023" y="5394960"/>
+            <a:ext cx="3840480" cy="731520"/>
           </a:xfrm>
           <a:prstGeom prst="rect">
             <a:avLst/>
@@ -1202,13 +1222,13 @@
           <a:bodyPr wrap="square" rtlCol="0" anchor="ctr"/>
           <a:lstStyle/>
           <a:p>
-            <a:pPr algn="ctr" indent="0" marL="0">
-              <a:buNone/>
-            </a:pPr>
-            <a:r>
-              <a:rPr lang="en-US" sz="1600" dirty="0">
-                <a:solidFill>
-                  <a:srgbClr val="74889A"/>
+            <a:pPr indent="0" marL="0">
+              <a:buNone/>
+            </a:pPr>
+            <a:r>
+              <a:rPr lang="en-US" sz="1500" dirty="0">
+                <a:solidFill>
+                  <a:srgbClr val="D2DBE2"/>
                 </a:solidFill>
                 <a:latin typeface="Calibri" pitchFamily="34" charset="0"/>
                 <a:ea typeface="Calibri" pitchFamily="34" charset="-122"/>
@@ -1216,20 +1236,20 @@
               </a:rPr>
               <a:t>Goutham Uppu   ·   X25167936</a:t>
             </a:r>
-            <a:endParaRPr lang="en-US" sz="1600" dirty="0"/>
-          </a:p>
-        </p:txBody>
-      </p:sp>
-      <p:sp>
-        <p:nvSpPr>
-          <p:cNvPr id="4" name="Text 2"/>
-          <p:cNvSpPr/>
-          <p:nvPr/>
-        </p:nvSpPr>
-        <p:spPr>
-          <a:xfrm>
-            <a:off x="1463040" y="2926080"/>
-            <a:ext cx="9235440" cy="1371600"/>
+            <a:endParaRPr lang="en-US" sz="1500" dirty="0"/>
+          </a:p>
+        </p:txBody>
+      </p:sp>
+      <p:sp>
+        <p:nvSpPr>
+          <p:cNvPr id="5" name="Text 3"/>
+          <p:cNvSpPr/>
+          <p:nvPr/>
+        </p:nvSpPr>
+        <p:spPr>
+          <a:xfrm>
+            <a:off x="548640" y="1371600"/>
+            <a:ext cx="6492240" cy="2011680"/>
           </a:xfrm>
           <a:prstGeom prst="rect">
             <a:avLst/>
@@ -1241,9 +1261,9 @@
           <a:bodyPr wrap="square" rtlCol="0" anchor="ctr"/>
           <a:lstStyle/>
           <a:p>
-            <a:pPr algn="ctr" indent="0" marL="0">
+            <a:pPr indent="0" marL="0">
               <a:lnSpc>
-                <a:spcPct val="110000"/>
+                <a:spcPct val="112000"/>
               </a:lnSpc>
               <a:buNone/>
             </a:pPr>
@@ -1264,14 +1284,14 @@
       </p:sp>
       <p:sp>
         <p:nvSpPr>
-          <p:cNvPr id="5" name="Shape 3"/>
-          <p:cNvSpPr/>
-          <p:nvPr/>
-        </p:nvSpPr>
-        <p:spPr>
-          <a:xfrm>
-            <a:off x="1889608" y="4526280"/>
-            <a:ext cx="2651760" cy="566928"/>
+          <p:cNvPr id="6" name="Shape 4"/>
+          <p:cNvSpPr/>
+          <p:nvPr/>
+        </p:nvSpPr>
+        <p:spPr>
+          <a:xfrm>
+            <a:off x="548640" y="4023360"/>
+            <a:ext cx="2926080" cy="566928"/>
           </a:xfrm>
           <a:prstGeom prst="roundRect">
             <a:avLst>
@@ -1291,14 +1311,14 @@
       </p:sp>
       <p:sp>
         <p:nvSpPr>
-          <p:cNvPr id="6" name="Text 4"/>
-          <p:cNvSpPr/>
-          <p:nvPr/>
-        </p:nvSpPr>
-        <p:spPr>
-          <a:xfrm>
-            <a:off x="1889608" y="4526280"/>
-            <a:ext cx="2651760" cy="566928"/>
+          <p:cNvPr id="7" name="Text 5"/>
+          <p:cNvSpPr/>
+          <p:nvPr/>
+        </p:nvSpPr>
+        <p:spPr>
+          <a:xfrm>
+            <a:off x="548640" y="4023360"/>
+            <a:ext cx="2926080" cy="566928"/>
           </a:xfrm>
           <a:prstGeom prst="rect">
             <a:avLst/>
@@ -1330,14 +1350,14 @@
       </p:sp>
       <p:sp>
         <p:nvSpPr>
-          <p:cNvPr id="7" name="Shape 5"/>
-          <p:cNvSpPr/>
-          <p:nvPr/>
-        </p:nvSpPr>
-        <p:spPr>
-          <a:xfrm>
-            <a:off x="4769968" y="4526280"/>
-            <a:ext cx="2651760" cy="566928"/>
+          <p:cNvPr id="8" name="Shape 6"/>
+          <p:cNvSpPr/>
+          <p:nvPr/>
+        </p:nvSpPr>
+        <p:spPr>
+          <a:xfrm>
+            <a:off x="548640" y="4709160"/>
+            <a:ext cx="2926080" cy="566928"/>
           </a:xfrm>
           <a:prstGeom prst="roundRect">
             <a:avLst>
@@ -1357,14 +1377,14 @@
       </p:sp>
       <p:sp>
         <p:nvSpPr>
-          <p:cNvPr id="8" name="Text 6"/>
-          <p:cNvSpPr/>
-          <p:nvPr/>
-        </p:nvSpPr>
-        <p:spPr>
-          <a:xfrm>
-            <a:off x="4769968" y="4526280"/>
-            <a:ext cx="2651760" cy="566928"/>
+          <p:cNvPr id="9" name="Text 7"/>
+          <p:cNvSpPr/>
+          <p:nvPr/>
+        </p:nvSpPr>
+        <p:spPr>
+          <a:xfrm>
+            <a:off x="548640" y="4709160"/>
+            <a:ext cx="2926080" cy="566928"/>
           </a:xfrm>
           <a:prstGeom prst="rect">
             <a:avLst/>
@@ -1396,14 +1416,14 @@
       </p:sp>
       <p:sp>
         <p:nvSpPr>
-          <p:cNvPr id="9" name="Shape 7"/>
-          <p:cNvSpPr/>
-          <p:nvPr/>
-        </p:nvSpPr>
-        <p:spPr>
-          <a:xfrm>
-            <a:off x="7650328" y="4526280"/>
-            <a:ext cx="2651760" cy="566928"/>
+          <p:cNvPr id="10" name="Shape 8"/>
+          <p:cNvSpPr/>
+          <p:nvPr/>
+        </p:nvSpPr>
+        <p:spPr>
+          <a:xfrm>
+            <a:off x="548640" y="5394960"/>
+            <a:ext cx="2926080" cy="566928"/>
           </a:xfrm>
           <a:prstGeom prst="roundRect">
             <a:avLst>
@@ -1423,14 +1443,14 @@
       </p:sp>
       <p:sp>
         <p:nvSpPr>
-          <p:cNvPr id="10" name="Text 8"/>
-          <p:cNvSpPr/>
-          <p:nvPr/>
-        </p:nvSpPr>
-        <p:spPr>
-          <a:xfrm>
-            <a:off x="7650328" y="4526280"/>
-            <a:ext cx="2651760" cy="566928"/>
+          <p:cNvPr id="11" name="Text 9"/>
+          <p:cNvSpPr/>
+          <p:nvPr/>
+        </p:nvSpPr>
+        <p:spPr>
+          <a:xfrm>
+            <a:off x="548640" y="5394960"/>
+            <a:ext cx="2926080" cy="566928"/>
           </a:xfrm>
           <a:prstGeom prst="rect">
             <a:avLst/>
@@ -1462,14 +1482,14 @@
       </p:sp>
       <p:sp>
         <p:nvSpPr>
-          <p:cNvPr id="11" name="Text 9"/>
-          <p:cNvSpPr/>
-          <p:nvPr/>
-        </p:nvSpPr>
-        <p:spPr>
-          <a:xfrm>
-            <a:off x="548640" y="6126480"/>
-            <a:ext cx="11064240" cy="365760"/>
+          <p:cNvPr id="12" name="Text 10"/>
+          <p:cNvSpPr/>
+          <p:nvPr/>
+        </p:nvSpPr>
+        <p:spPr>
+          <a:xfrm>
+            <a:off x="548640" y="6172200"/>
+            <a:ext cx="6217920" cy="365760"/>
           </a:xfrm>
           <a:prstGeom prst="rect">
             <a:avLst/>
@@ -1481,11 +1501,11 @@
           <a:bodyPr wrap="square" rtlCol="0" anchor="ctr"/>
           <a:lstStyle/>
           <a:p>
-            <a:pPr algn="ctr" indent="0" marL="0">
-              <a:buNone/>
-            </a:pPr>
-            <a:r>
-              <a:rPr lang="en-US" sz="1300" dirty="0">
+            <a:pPr indent="0" marL="0">
+              <a:buNone/>
+            </a:pPr>
+            <a:r>
+              <a:rPr lang="en-US" sz="1250" dirty="0">
                 <a:solidFill>
                   <a:srgbClr val="626E78"/>
                 </a:solidFill>
@@ -1495,7 +1515,7 @@
               </a:rPr>
               <a:t>Fog &amp; Edge Computing (H9FECC)   ·   deployed live on AWS</a:t>
             </a:r>
-            <a:endParaRPr lang="en-US" sz="1300" dirty="0"/>
+            <a:endParaRPr lang="en-US" sz="1250" dirty="0"/>
           </a:p>
         </p:txBody>
       </p:sp>
@@ -1578,18 +1598,18 @@
         </p:nvSpPr>
         <p:spPr>
           <a:xfrm>
-            <a:off x="640080" y="1554480"/>
-            <a:ext cx="3200400" cy="3383280"/>
+            <a:off x="3992728" y="1234440"/>
+            <a:ext cx="4206240" cy="658368"/>
           </a:xfrm>
           <a:prstGeom prst="roundRect">
             <a:avLst>
-              <a:gd name="adj" fmla="val 2857"/>
+              <a:gd name="adj" fmla="val 11111"/>
             </a:avLst>
           </a:prstGeom>
           <a:solidFill>
             <a:srgbClr val="EEF1F4"/>
           </a:solidFill>
-          <a:ln w="19050">
+          <a:ln w="17780">
             <a:solidFill>
               <a:srgbClr val="74889A"/>
             </a:solidFill>
@@ -1599,69 +1619,62 @@
       </p:sp>
       <p:sp>
         <p:nvSpPr>
-          <p:cNvPr id="4" name="Text 2"/>
-          <p:cNvSpPr/>
-          <p:nvPr/>
-        </p:nvSpPr>
-        <p:spPr>
-          <a:xfrm>
-            <a:off x="640080" y="1691640"/>
-            <a:ext cx="3200400" cy="365760"/>
-          </a:xfrm>
-          <a:prstGeom prst="rect">
-            <a:avLst/>
-          </a:prstGeom>
-          <a:noFill/>
-          <a:ln/>
-        </p:spPr>
-        <p:txBody>
-          <a:bodyPr wrap="square" rtlCol="0" anchor="ctr"/>
-          <a:lstStyle/>
-          <a:p>
-            <a:pPr algn="ctr" indent="0" marL="0">
-              <a:buNone/>
-            </a:pPr>
-            <a:r>
-              <a:rPr lang="en-US" sz="1200" b="1" spc="300" kern="0" dirty="0">
-                <a:solidFill>
-                  <a:srgbClr val="74889A"/>
+          <p:cNvPr id="4" name="Shape 2"/>
+          <p:cNvSpPr/>
+          <p:nvPr/>
+        </p:nvSpPr>
+        <p:spPr>
+          <a:xfrm>
+            <a:off x="4193896" y="1481328"/>
+            <a:ext cx="164592" cy="164592"/>
+          </a:xfrm>
+          <a:prstGeom prst="ellipse">
+            <a:avLst/>
+          </a:prstGeom>
+          <a:solidFill>
+            <a:srgbClr val="74889A"/>
+          </a:solidFill>
+          <a:ln/>
+        </p:spPr>
+      </p:sp>
+      <p:sp>
+        <p:nvSpPr>
+          <p:cNvPr id="5" name="Text 3"/>
+          <p:cNvSpPr/>
+          <p:nvPr/>
+        </p:nvSpPr>
+        <p:spPr>
+          <a:xfrm>
+            <a:off x="4495648" y="1234440"/>
+            <a:ext cx="2194560" cy="658368"/>
+          </a:xfrm>
+          <a:prstGeom prst="rect">
+            <a:avLst/>
+          </a:prstGeom>
+          <a:noFill/>
+          <a:ln/>
+        </p:spPr>
+        <p:txBody>
+          <a:bodyPr wrap="square" lIns="0" tIns="0" rIns="0" bIns="0" rtlCol="0" anchor="ctr"/>
+          <a:lstStyle/>
+          <a:p>
+            <a:pPr indent="0" marL="0">
+              <a:buNone/>
+            </a:pPr>
+            <a:r>
+              <a:rPr lang="en-US" sz="1350" b="1" dirty="0">
+                <a:solidFill>
+                  <a:srgbClr val="20262D"/>
                 </a:solidFill>
                 <a:latin typeface="Calibri" pitchFamily="34" charset="0"/>
                 <a:ea typeface="Calibri" pitchFamily="34" charset="-122"/>
                 <a:cs typeface="Calibri" pitchFamily="34" charset="-120"/>
               </a:rPr>
-              <a:t>EDGE</a:t>
-            </a:r>
-            <a:endParaRPr lang="en-US" sz="1200" dirty="0"/>
-          </a:p>
-        </p:txBody>
-      </p:sp>
-      <p:sp>
-        <p:nvSpPr>
-          <p:cNvPr id="5" name="Shape 3"/>
-          <p:cNvSpPr/>
-          <p:nvPr/>
-        </p:nvSpPr>
-        <p:spPr>
-          <a:xfrm>
-            <a:off x="914400" y="2286000"/>
-            <a:ext cx="2651760" cy="1005840"/>
-          </a:xfrm>
-          <a:prstGeom prst="roundRect">
-            <a:avLst>
-              <a:gd name="adj" fmla="val 7273"/>
-            </a:avLst>
-          </a:prstGeom>
-          <a:solidFill>
-            <a:srgbClr val="FFFFFF"/>
-          </a:solidFill>
-          <a:ln w="15240">
-            <a:solidFill>
-              <a:srgbClr val="74889A"/>
-            </a:solidFill>
-            <a:prstDash val="solid"/>
-          </a:ln>
-        </p:spPr>
+              <a:t>Robot sensors</a:t>
+            </a:r>
+            <a:endParaRPr lang="en-US" sz="1350" dirty="0"/>
+          </a:p>
+        </p:txBody>
       </p:sp>
       <p:sp>
         <p:nvSpPr>
@@ -1671,8 +1684,8 @@
         </p:nvSpPr>
         <p:spPr>
           <a:xfrm>
-            <a:off x="914400" y="2432304"/>
-            <a:ext cx="2651760" cy="365760"/>
+            <a:off x="6644488" y="1234440"/>
+            <a:ext cx="1463040" cy="658368"/>
           </a:xfrm>
           <a:prstGeom prst="rect">
             <a:avLst/>
@@ -1684,379 +1697,40 @@
           <a:bodyPr wrap="square" lIns="0" tIns="0" rIns="0" bIns="0" rtlCol="0" anchor="ctr"/>
           <a:lstStyle/>
           <a:p>
-            <a:pPr algn="ctr" indent="0" marL="0">
-              <a:buNone/>
-            </a:pPr>
-            <a:r>
-              <a:rPr lang="en-US" sz="1400" b="1" dirty="0">
-                <a:solidFill>
-                  <a:srgbClr val="20262D"/>
+            <a:pPr algn="r" indent="0" marL="0">
+              <a:buNone/>
+            </a:pPr>
+            <a:r>
+              <a:rPr lang="en-US" sz="950" dirty="0">
+                <a:solidFill>
+                  <a:srgbClr val="626E78"/>
                 </a:solidFill>
                 <a:latin typeface="Calibri" pitchFamily="34" charset="0"/>
                 <a:ea typeface="Calibri" pitchFamily="34" charset="-122"/>
                 <a:cs typeface="Calibri" pitchFamily="34" charset="-120"/>
               </a:rPr>
-              <a:t>Robot sensors</a:t>
-            </a:r>
-            <a:endParaRPr lang="en-US" sz="1400" dirty="0"/>
-          </a:p>
-        </p:txBody>
-      </p:sp>
-      <p:sp>
-        <p:nvSpPr>
-          <p:cNvPr id="7" name="Text 5"/>
-          <p:cNvSpPr/>
-          <p:nvPr/>
-        </p:nvSpPr>
-        <p:spPr>
-          <a:xfrm>
-            <a:off x="914400" y="2816352"/>
-            <a:ext cx="2651760" cy="365760"/>
-          </a:xfrm>
-          <a:prstGeom prst="rect">
-            <a:avLst/>
-          </a:prstGeom>
-          <a:noFill/>
-          <a:ln/>
-        </p:spPr>
-        <p:txBody>
-          <a:bodyPr wrap="square" lIns="0" tIns="0" rIns="0" bIns="0" rtlCol="0" anchor="ctr"/>
-          <a:lstStyle/>
-          <a:p>
-            <a:pPr algn="ctr" indent="0" marL="0">
-              <a:buNone/>
-            </a:pPr>
-            <a:r>
-              <a:rPr lang="en-US" sz="1000" dirty="0">
-                <a:solidFill>
-                  <a:srgbClr val="626E78"/>
-                </a:solidFill>
-                <a:latin typeface="Calibri" pitchFamily="34" charset="0"/>
-                <a:ea typeface="Calibri" pitchFamily="34" charset="-122"/>
-                <a:cs typeface="Calibri" pitchFamily="34" charset="-120"/>
-              </a:rPr>
               <a:t>10 on EC2 · 5 metrics</a:t>
             </a:r>
-            <a:endParaRPr lang="en-US" sz="1000" dirty="0"/>
-          </a:p>
-        </p:txBody>
-      </p:sp>
-      <p:sp>
-        <p:nvSpPr>
-          <p:cNvPr id="8" name="Shape 6"/>
-          <p:cNvSpPr/>
-          <p:nvPr/>
-        </p:nvSpPr>
-        <p:spPr>
-          <a:xfrm>
-            <a:off x="914400" y="3520440"/>
-            <a:ext cx="2651760" cy="1005840"/>
-          </a:xfrm>
-          <a:prstGeom prst="roundRect">
-            <a:avLst>
-              <a:gd name="adj" fmla="val 7273"/>
-            </a:avLst>
-          </a:prstGeom>
-          <a:solidFill>
-            <a:srgbClr val="FFFFFF"/>
-          </a:solidFill>
-          <a:ln w="15240">
-            <a:solidFill>
-              <a:srgbClr val="74889A"/>
-            </a:solidFill>
-            <a:prstDash val="solid"/>
-          </a:ln>
-        </p:spPr>
-      </p:sp>
-      <p:sp>
-        <p:nvSpPr>
-          <p:cNvPr id="9" name="Text 7"/>
-          <p:cNvSpPr/>
-          <p:nvPr/>
-        </p:nvSpPr>
-        <p:spPr>
-          <a:xfrm>
-            <a:off x="914400" y="3666744"/>
-            <a:ext cx="2651760" cy="365760"/>
-          </a:xfrm>
-          <a:prstGeom prst="rect">
-            <a:avLst/>
-          </a:prstGeom>
-          <a:noFill/>
-          <a:ln/>
-        </p:spPr>
-        <p:txBody>
-          <a:bodyPr wrap="square" lIns="0" tIns="0" rIns="0" bIns="0" rtlCol="0" anchor="ctr"/>
-          <a:lstStyle/>
-          <a:p>
-            <a:pPr algn="ctr" indent="0" marL="0">
-              <a:buNone/>
-            </a:pPr>
-            <a:r>
-              <a:rPr lang="en-US" sz="1400" b="1" dirty="0">
-                <a:solidFill>
-                  <a:srgbClr val="20262D"/>
-                </a:solidFill>
-                <a:latin typeface="Calibri" pitchFamily="34" charset="0"/>
-                <a:ea typeface="Calibri" pitchFamily="34" charset="-122"/>
-                <a:cs typeface="Calibri" pitchFamily="34" charset="-120"/>
-              </a:rPr>
-              <a:t>Fog gateway</a:t>
-            </a:r>
-            <a:endParaRPr lang="en-US" sz="1400" dirty="0"/>
-          </a:p>
-        </p:txBody>
-      </p:sp>
-      <p:sp>
-        <p:nvSpPr>
-          <p:cNvPr id="10" name="Text 8"/>
-          <p:cNvSpPr/>
-          <p:nvPr/>
-        </p:nvSpPr>
-        <p:spPr>
-          <a:xfrm>
-            <a:off x="914400" y="4050792"/>
-            <a:ext cx="2651760" cy="365760"/>
-          </a:xfrm>
-          <a:prstGeom prst="rect">
-            <a:avLst/>
-          </a:prstGeom>
-          <a:noFill/>
-          <a:ln/>
-        </p:spPr>
-        <p:txBody>
-          <a:bodyPr wrap="square" lIns="0" tIns="0" rIns="0" bIns="0" rtlCol="0" anchor="ctr"/>
-          <a:lstStyle/>
-          <a:p>
-            <a:pPr algn="ctr" indent="0" marL="0">
-              <a:buNone/>
-            </a:pPr>
-            <a:r>
-              <a:rPr lang="en-US" sz="1000" dirty="0">
-                <a:solidFill>
-                  <a:srgbClr val="626E78"/>
-                </a:solidFill>
-                <a:latin typeface="Calibri" pitchFamily="34" charset="0"/>
-                <a:ea typeface="Calibri" pitchFamily="34" charset="-122"/>
-                <a:cs typeface="Calibri" pitchFamily="34" charset="-120"/>
-              </a:rPr>
-              <a:t>windows · thresholds</a:t>
-            </a:r>
-            <a:endParaRPr lang="en-US" sz="1000" dirty="0"/>
-          </a:p>
-        </p:txBody>
-      </p:sp>
-      <p:sp>
-        <p:nvSpPr>
-          <p:cNvPr id="11" name="Shape 9"/>
-          <p:cNvSpPr/>
-          <p:nvPr/>
-        </p:nvSpPr>
-        <p:spPr>
-          <a:xfrm>
-            <a:off x="3886200" y="3246120"/>
-            <a:ext cx="502920" cy="0"/>
+            <a:endParaRPr lang="en-US" sz="950" dirty="0"/>
+          </a:p>
+        </p:txBody>
+      </p:sp>
+      <p:sp>
+        <p:nvSpPr>
+          <p:cNvPr id="7" name="Shape 5"/>
+          <p:cNvSpPr/>
+          <p:nvPr/>
+        </p:nvSpPr>
+        <p:spPr>
+          <a:xfrm>
+            <a:off x="6095848" y="1892808"/>
+            <a:ext cx="0" cy="219456"/>
           </a:xfrm>
           <a:prstGeom prst="line">
             <a:avLst/>
           </a:prstGeom>
           <a:noFill/>
-          <a:ln w="31750">
-            <a:solidFill>
-              <a:srgbClr val="33414F"/>
-            </a:solidFill>
-            <a:prstDash val="solid"/>
-            <a:tailEnd type="triangle"/>
-          </a:ln>
-        </p:spPr>
-      </p:sp>
-      <p:sp>
-        <p:nvSpPr>
-          <p:cNvPr id="12" name="Shape 10"/>
-          <p:cNvSpPr/>
-          <p:nvPr/>
-        </p:nvSpPr>
-        <p:spPr>
-          <a:xfrm>
-            <a:off x="4572000" y="1554480"/>
-            <a:ext cx="6949440" cy="3383280"/>
-          </a:xfrm>
-          <a:prstGeom prst="roundRect">
-            <a:avLst>
-              <a:gd name="adj" fmla="val 2703"/>
-            </a:avLst>
-          </a:prstGeom>
-          <a:solidFill>
-            <a:srgbClr val="EEF1F4"/>
-          </a:solidFill>
-          <a:ln w="19050">
-            <a:solidFill>
-              <a:srgbClr val="33414F"/>
-            </a:solidFill>
-            <a:prstDash val="solid"/>
-          </a:ln>
-        </p:spPr>
-      </p:sp>
-      <p:sp>
-        <p:nvSpPr>
-          <p:cNvPr id="13" name="Text 11"/>
-          <p:cNvSpPr/>
-          <p:nvPr/>
-        </p:nvSpPr>
-        <p:spPr>
-          <a:xfrm>
-            <a:off x="4572000" y="1691640"/>
-            <a:ext cx="6949440" cy="365760"/>
-          </a:xfrm>
-          <a:prstGeom prst="rect">
-            <a:avLst/>
-          </a:prstGeom>
-          <a:noFill/>
-          <a:ln/>
-        </p:spPr>
-        <p:txBody>
-          <a:bodyPr wrap="square" rtlCol="0" anchor="ctr"/>
-          <a:lstStyle/>
-          <a:p>
-            <a:pPr algn="ctr" indent="0" marL="0">
-              <a:buNone/>
-            </a:pPr>
-            <a:r>
-              <a:rPr lang="en-US" sz="1200" b="1" spc="200" kern="0" dirty="0">
-                <a:solidFill>
-                  <a:srgbClr val="33414F"/>
-                </a:solidFill>
-                <a:latin typeface="Calibri" pitchFamily="34" charset="0"/>
-                <a:ea typeface="Calibri" pitchFamily="34" charset="-122"/>
-                <a:cs typeface="Calibri" pitchFamily="34" charset="-120"/>
-              </a:rPr>
-              <a:t>CLOUD (serverless)</a:t>
-            </a:r>
-            <a:endParaRPr lang="en-US" sz="1200" dirty="0"/>
-          </a:p>
-        </p:txBody>
-      </p:sp>
-      <p:sp>
-        <p:nvSpPr>
-          <p:cNvPr id="14" name="Shape 12"/>
-          <p:cNvSpPr/>
-          <p:nvPr/>
-        </p:nvSpPr>
-        <p:spPr>
-          <a:xfrm>
-            <a:off x="4846320" y="2651760"/>
-            <a:ext cx="1463040" cy="1371600"/>
-          </a:xfrm>
-          <a:prstGeom prst="roundRect">
-            <a:avLst>
-              <a:gd name="adj" fmla="val 5333"/>
-            </a:avLst>
-          </a:prstGeom>
-          <a:solidFill>
-            <a:srgbClr val="FFFFFF"/>
-          </a:solidFill>
-          <a:ln w="15240">
-            <a:solidFill>
-              <a:srgbClr val="33414F"/>
-            </a:solidFill>
-            <a:prstDash val="solid"/>
-          </a:ln>
-        </p:spPr>
-      </p:sp>
-      <p:sp>
-        <p:nvSpPr>
-          <p:cNvPr id="15" name="Text 13"/>
-          <p:cNvSpPr/>
-          <p:nvPr/>
-        </p:nvSpPr>
-        <p:spPr>
-          <a:xfrm>
-            <a:off x="4800600" y="2907792"/>
-            <a:ext cx="1554480" cy="457200"/>
-          </a:xfrm>
-          <a:prstGeom prst="rect">
-            <a:avLst/>
-          </a:prstGeom>
-          <a:noFill/>
-          <a:ln/>
-        </p:spPr>
-        <p:txBody>
-          <a:bodyPr wrap="square" lIns="0" tIns="0" rIns="0" bIns="0" rtlCol="0" anchor="ctr"/>
-          <a:lstStyle/>
-          <a:p>
-            <a:pPr algn="ctr" indent="0" marL="0">
-              <a:buNone/>
-            </a:pPr>
-            <a:r>
-              <a:rPr lang="en-US" sz="1250" b="1" dirty="0">
-                <a:solidFill>
-                  <a:srgbClr val="20262D"/>
-                </a:solidFill>
-                <a:latin typeface="Calibri" pitchFamily="34" charset="0"/>
-                <a:ea typeface="Calibri" pitchFamily="34" charset="-122"/>
-                <a:cs typeface="Calibri" pitchFamily="34" charset="-120"/>
-              </a:rPr>
-              <a:t>Amazon SQS</a:t>
-            </a:r>
-            <a:endParaRPr lang="en-US" sz="1250" dirty="0"/>
-          </a:p>
-        </p:txBody>
-      </p:sp>
-      <p:sp>
-        <p:nvSpPr>
-          <p:cNvPr id="16" name="Text 14"/>
-          <p:cNvSpPr/>
-          <p:nvPr/>
-        </p:nvSpPr>
-        <p:spPr>
-          <a:xfrm>
-            <a:off x="4828032" y="3401568"/>
-            <a:ext cx="1499616" cy="457200"/>
-          </a:xfrm>
-          <a:prstGeom prst="rect">
-            <a:avLst/>
-          </a:prstGeom>
-          <a:noFill/>
-          <a:ln/>
-        </p:spPr>
-        <p:txBody>
-          <a:bodyPr wrap="square" lIns="0" tIns="0" rIns="0" bIns="0" rtlCol="0" anchor="ctr"/>
-          <a:lstStyle/>
-          <a:p>
-            <a:pPr algn="ctr" indent="0" marL="0">
-              <a:buNone/>
-            </a:pPr>
-            <a:r>
-              <a:rPr lang="en-US" sz="900" dirty="0">
-                <a:solidFill>
-                  <a:srgbClr val="626E78"/>
-                </a:solidFill>
-                <a:latin typeface="Calibri" pitchFamily="34" charset="0"/>
-                <a:ea typeface="Calibri" pitchFamily="34" charset="-122"/>
-                <a:cs typeface="Calibri" pitchFamily="34" charset="-120"/>
-              </a:rPr>
-              <a:t>batches ≤10</a:t>
-            </a:r>
-            <a:endParaRPr lang="en-US" sz="900" dirty="0"/>
-          </a:p>
-        </p:txBody>
-      </p:sp>
-      <p:sp>
-        <p:nvSpPr>
-          <p:cNvPr id="17" name="Shape 15"/>
-          <p:cNvSpPr/>
-          <p:nvPr/>
-        </p:nvSpPr>
-        <p:spPr>
-          <a:xfrm>
-            <a:off x="6318504" y="3337560"/>
-            <a:ext cx="164592" cy="0"/>
-          </a:xfrm>
-          <a:prstGeom prst="line">
-            <a:avLst/>
-          </a:prstGeom>
-          <a:noFill/>
-          <a:ln w="20320">
+          <a:ln w="25400">
             <a:solidFill>
               <a:srgbClr val="74889A"/>
             </a:solidFill>
@@ -2067,26 +1741,26 @@
       </p:sp>
       <p:sp>
         <p:nvSpPr>
-          <p:cNvPr id="18" name="Shape 16"/>
-          <p:cNvSpPr/>
-          <p:nvPr/>
-        </p:nvSpPr>
-        <p:spPr>
-          <a:xfrm>
-            <a:off x="6492240" y="2651760"/>
-            <a:ext cx="1463040" cy="1371600"/>
+          <p:cNvPr id="8" name="Shape 6"/>
+          <p:cNvSpPr/>
+          <p:nvPr/>
+        </p:nvSpPr>
+        <p:spPr>
+          <a:xfrm>
+            <a:off x="3992728" y="2112264"/>
+            <a:ext cx="4206240" cy="658368"/>
           </a:xfrm>
           <a:prstGeom prst="roundRect">
             <a:avLst>
-              <a:gd name="adj" fmla="val 5333"/>
+              <a:gd name="adj" fmla="val 11111"/>
             </a:avLst>
           </a:prstGeom>
           <a:solidFill>
-            <a:srgbClr val="FFFFFF"/>
-          </a:solidFill>
-          <a:ln w="15240">
+            <a:srgbClr val="EEF1F4"/>
+          </a:solidFill>
+          <a:ln w="17780">
             <a:solidFill>
-              <a:srgbClr val="33414F"/>
+              <a:srgbClr val="74889A"/>
             </a:solidFill>
             <a:prstDash val="solid"/>
           </a:ln>
@@ -2094,14 +1768,34 @@
       </p:sp>
       <p:sp>
         <p:nvSpPr>
-          <p:cNvPr id="19" name="Text 17"/>
-          <p:cNvSpPr/>
-          <p:nvPr/>
-        </p:nvSpPr>
-        <p:spPr>
-          <a:xfrm>
-            <a:off x="6446520" y="2907792"/>
-            <a:ext cx="1554480" cy="457200"/>
+          <p:cNvPr id="9" name="Shape 7"/>
+          <p:cNvSpPr/>
+          <p:nvPr/>
+        </p:nvSpPr>
+        <p:spPr>
+          <a:xfrm>
+            <a:off x="4193896" y="2359152"/>
+            <a:ext cx="164592" cy="164592"/>
+          </a:xfrm>
+          <a:prstGeom prst="ellipse">
+            <a:avLst/>
+          </a:prstGeom>
+          <a:solidFill>
+            <a:srgbClr val="74889A"/>
+          </a:solidFill>
+          <a:ln/>
+        </p:spPr>
+      </p:sp>
+      <p:sp>
+        <p:nvSpPr>
+          <p:cNvPr id="10" name="Text 8"/>
+          <p:cNvSpPr/>
+          <p:nvPr/>
+        </p:nvSpPr>
+        <p:spPr>
+          <a:xfrm>
+            <a:off x="4495648" y="2112264"/>
+            <a:ext cx="2194560" cy="658368"/>
           </a:xfrm>
           <a:prstGeom prst="rect">
             <a:avLst/>
@@ -2113,11 +1807,11 @@
           <a:bodyPr wrap="square" lIns="0" tIns="0" rIns="0" bIns="0" rtlCol="0" anchor="ctr"/>
           <a:lstStyle/>
           <a:p>
-            <a:pPr algn="ctr" indent="0" marL="0">
-              <a:buNone/>
-            </a:pPr>
-            <a:r>
-              <a:rPr lang="en-US" sz="1250" b="1" dirty="0">
+            <a:pPr indent="0" marL="0">
+              <a:buNone/>
+            </a:pPr>
+            <a:r>
+              <a:rPr lang="en-US" sz="1350" b="1" dirty="0">
                 <a:solidFill>
                   <a:srgbClr val="20262D"/>
                 </a:solidFill>
@@ -2125,22 +1819,22 @@
                 <a:ea typeface="Calibri" pitchFamily="34" charset="-122"/>
                 <a:cs typeface="Calibri" pitchFamily="34" charset="-120"/>
               </a:rPr>
-              <a:t>AWS Lambda</a:t>
-            </a:r>
-            <a:endParaRPr lang="en-US" sz="1250" dirty="0"/>
-          </a:p>
-        </p:txBody>
-      </p:sp>
-      <p:sp>
-        <p:nvSpPr>
-          <p:cNvPr id="20" name="Text 18"/>
-          <p:cNvSpPr/>
-          <p:nvPr/>
-        </p:nvSpPr>
-        <p:spPr>
-          <a:xfrm>
-            <a:off x="6473952" y="3401568"/>
-            <a:ext cx="1499616" cy="457200"/>
+              <a:t>Fog gateway</a:t>
+            </a:r>
+            <a:endParaRPr lang="en-US" sz="1350" dirty="0"/>
+          </a:p>
+        </p:txBody>
+      </p:sp>
+      <p:sp>
+        <p:nvSpPr>
+          <p:cNvPr id="11" name="Text 9"/>
+          <p:cNvSpPr/>
+          <p:nvPr/>
+        </p:nvSpPr>
+        <p:spPr>
+          <a:xfrm>
+            <a:off x="6644488" y="2112264"/>
+            <a:ext cx="1463040" cy="658368"/>
           </a:xfrm>
           <a:prstGeom prst="rect">
             <a:avLst/>
@@ -2152,11 +1846,11 @@
           <a:bodyPr wrap="square" lIns="0" tIns="0" rIns="0" bIns="0" rtlCol="0" anchor="ctr"/>
           <a:lstStyle/>
           <a:p>
-            <a:pPr algn="ctr" indent="0" marL="0">
-              <a:buNone/>
-            </a:pPr>
-            <a:r>
-              <a:rPr lang="en-US" sz="900" dirty="0">
+            <a:pPr algn="r" indent="0" marL="0">
+              <a:buNone/>
+            </a:pPr>
+            <a:r>
+              <a:rPr lang="en-US" sz="950" dirty="0">
                 <a:solidFill>
                   <a:srgbClr val="626E78"/>
                 </a:solidFill>
@@ -2164,28 +1858,28 @@
                 <a:ea typeface="Calibri" pitchFamily="34" charset="-122"/>
                 <a:cs typeface="Calibri" pitchFamily="34" charset="-120"/>
               </a:rPr>
-              <a:t>java17 ingest</a:t>
-            </a:r>
-            <a:endParaRPr lang="en-US" sz="900" dirty="0"/>
-          </a:p>
-        </p:txBody>
-      </p:sp>
-      <p:sp>
-        <p:nvSpPr>
-          <p:cNvPr id="21" name="Shape 19"/>
-          <p:cNvSpPr/>
-          <p:nvPr/>
-        </p:nvSpPr>
-        <p:spPr>
-          <a:xfrm>
-            <a:off x="7964424" y="3337560"/>
-            <a:ext cx="164592" cy="0"/>
+              <a:t>windows · thresholds</a:t>
+            </a:r>
+            <a:endParaRPr lang="en-US" sz="950" dirty="0"/>
+          </a:p>
+        </p:txBody>
+      </p:sp>
+      <p:sp>
+        <p:nvSpPr>
+          <p:cNvPr id="12" name="Shape 10"/>
+          <p:cNvSpPr/>
+          <p:nvPr/>
+        </p:nvSpPr>
+        <p:spPr>
+          <a:xfrm>
+            <a:off x="6095848" y="2770632"/>
+            <a:ext cx="0" cy="219456"/>
           </a:xfrm>
           <a:prstGeom prst="line">
             <a:avLst/>
           </a:prstGeom>
           <a:noFill/>
-          <a:ln w="20320">
+          <a:ln w="25400">
             <a:solidFill>
               <a:srgbClr val="74889A"/>
             </a:solidFill>
@@ -2196,24 +1890,24 @@
       </p:sp>
       <p:sp>
         <p:nvSpPr>
-          <p:cNvPr id="22" name="Shape 20"/>
-          <p:cNvSpPr/>
-          <p:nvPr/>
-        </p:nvSpPr>
-        <p:spPr>
-          <a:xfrm>
-            <a:off x="8138160" y="2651760"/>
-            <a:ext cx="1463040" cy="1371600"/>
+          <p:cNvPr id="13" name="Shape 11"/>
+          <p:cNvSpPr/>
+          <p:nvPr/>
+        </p:nvSpPr>
+        <p:spPr>
+          <a:xfrm>
+            <a:off x="3992728" y="2990088"/>
+            <a:ext cx="4206240" cy="658368"/>
           </a:xfrm>
           <a:prstGeom prst="roundRect">
             <a:avLst>
-              <a:gd name="adj" fmla="val 5333"/>
+              <a:gd name="adj" fmla="val 11111"/>
             </a:avLst>
           </a:prstGeom>
           <a:solidFill>
-            <a:srgbClr val="FFFFFF"/>
-          </a:solidFill>
-          <a:ln w="15240">
+            <a:srgbClr val="EEF1F4"/>
+          </a:solidFill>
+          <a:ln w="17780">
             <a:solidFill>
               <a:srgbClr val="33414F"/>
             </a:solidFill>
@@ -2223,14 +1917,34 @@
       </p:sp>
       <p:sp>
         <p:nvSpPr>
-          <p:cNvPr id="23" name="Text 21"/>
-          <p:cNvSpPr/>
-          <p:nvPr/>
-        </p:nvSpPr>
-        <p:spPr>
-          <a:xfrm>
-            <a:off x="8092440" y="2907792"/>
-            <a:ext cx="1554480" cy="457200"/>
+          <p:cNvPr id="14" name="Shape 12"/>
+          <p:cNvSpPr/>
+          <p:nvPr/>
+        </p:nvSpPr>
+        <p:spPr>
+          <a:xfrm>
+            <a:off x="4193896" y="3236976"/>
+            <a:ext cx="164592" cy="164592"/>
+          </a:xfrm>
+          <a:prstGeom prst="ellipse">
+            <a:avLst/>
+          </a:prstGeom>
+          <a:solidFill>
+            <a:srgbClr val="33414F"/>
+          </a:solidFill>
+          <a:ln/>
+        </p:spPr>
+      </p:sp>
+      <p:sp>
+        <p:nvSpPr>
+          <p:cNvPr id="15" name="Text 13"/>
+          <p:cNvSpPr/>
+          <p:nvPr/>
+        </p:nvSpPr>
+        <p:spPr>
+          <a:xfrm>
+            <a:off x="4495648" y="2990088"/>
+            <a:ext cx="2194560" cy="658368"/>
           </a:xfrm>
           <a:prstGeom prst="rect">
             <a:avLst/>
@@ -2242,11 +1956,11 @@
           <a:bodyPr wrap="square" lIns="0" tIns="0" rIns="0" bIns="0" rtlCol="0" anchor="ctr"/>
           <a:lstStyle/>
           <a:p>
-            <a:pPr algn="ctr" indent="0" marL="0">
-              <a:buNone/>
-            </a:pPr>
-            <a:r>
-              <a:rPr lang="en-US" sz="1250" b="1" dirty="0">
+            <a:pPr indent="0" marL="0">
+              <a:buNone/>
+            </a:pPr>
+            <a:r>
+              <a:rPr lang="en-US" sz="1350" b="1" dirty="0">
                 <a:solidFill>
                   <a:srgbClr val="20262D"/>
                 </a:solidFill>
@@ -2254,22 +1968,22 @@
                 <a:ea typeface="Calibri" pitchFamily="34" charset="-122"/>
                 <a:cs typeface="Calibri" pitchFamily="34" charset="-120"/>
               </a:rPr>
-              <a:t>DynamoDB</a:t>
-            </a:r>
-            <a:endParaRPr lang="en-US" sz="1250" dirty="0"/>
-          </a:p>
-        </p:txBody>
-      </p:sp>
-      <p:sp>
-        <p:nvSpPr>
-          <p:cNvPr id="24" name="Text 22"/>
-          <p:cNvSpPr/>
-          <p:nvPr/>
-        </p:nvSpPr>
-        <p:spPr>
-          <a:xfrm>
-            <a:off x="8119872" y="3401568"/>
-            <a:ext cx="1499616" cy="457200"/>
+              <a:t>Amazon SQS</a:t>
+            </a:r>
+            <a:endParaRPr lang="en-US" sz="1350" dirty="0"/>
+          </a:p>
+        </p:txBody>
+      </p:sp>
+      <p:sp>
+        <p:nvSpPr>
+          <p:cNvPr id="16" name="Text 14"/>
+          <p:cNvSpPr/>
+          <p:nvPr/>
+        </p:nvSpPr>
+        <p:spPr>
+          <a:xfrm>
+            <a:off x="6644488" y="2990088"/>
+            <a:ext cx="1463040" cy="658368"/>
           </a:xfrm>
           <a:prstGeom prst="rect">
             <a:avLst/>
@@ -2281,11 +1995,11 @@
           <a:bodyPr wrap="square" lIns="0" tIns="0" rIns="0" bIns="0" rtlCol="0" anchor="ctr"/>
           <a:lstStyle/>
           <a:p>
-            <a:pPr algn="ctr" indent="0" marL="0">
-              <a:buNone/>
-            </a:pPr>
-            <a:r>
-              <a:rPr lang="en-US" sz="900" dirty="0">
+            <a:pPr algn="r" indent="0" marL="0">
+              <a:buNone/>
+            </a:pPr>
+            <a:r>
+              <a:rPr lang="en-US" sz="950" dirty="0">
                 <a:solidFill>
                   <a:srgbClr val="626E78"/>
                 </a:solidFill>
@@ -2293,28 +2007,28 @@
                 <a:ea typeface="Calibri" pitchFamily="34" charset="-122"/>
                 <a:cs typeface="Calibri" pitchFamily="34" charset="-120"/>
               </a:rPr>
-              <a:t>window aggregates</a:t>
-            </a:r>
-            <a:endParaRPr lang="en-US" sz="900" dirty="0"/>
-          </a:p>
-        </p:txBody>
-      </p:sp>
-      <p:sp>
-        <p:nvSpPr>
-          <p:cNvPr id="25" name="Shape 23"/>
-          <p:cNvSpPr/>
-          <p:nvPr/>
-        </p:nvSpPr>
-        <p:spPr>
-          <a:xfrm>
-            <a:off x="9610344" y="3337560"/>
-            <a:ext cx="164592" cy="0"/>
+              <a:t>batches ≤10</a:t>
+            </a:r>
+            <a:endParaRPr lang="en-US" sz="950" dirty="0"/>
+          </a:p>
+        </p:txBody>
+      </p:sp>
+      <p:sp>
+        <p:nvSpPr>
+          <p:cNvPr id="17" name="Shape 15"/>
+          <p:cNvSpPr/>
+          <p:nvPr/>
+        </p:nvSpPr>
+        <p:spPr>
+          <a:xfrm>
+            <a:off x="6095848" y="3648456"/>
+            <a:ext cx="0" cy="219456"/>
           </a:xfrm>
           <a:prstGeom prst="line">
             <a:avLst/>
           </a:prstGeom>
           <a:noFill/>
-          <a:ln w="20320">
+          <a:ln w="25400">
             <a:solidFill>
               <a:srgbClr val="74889A"/>
             </a:solidFill>
@@ -2325,24 +2039,322 @@
       </p:sp>
       <p:sp>
         <p:nvSpPr>
-          <p:cNvPr id="26" name="Shape 24"/>
-          <p:cNvSpPr/>
-          <p:nvPr/>
-        </p:nvSpPr>
-        <p:spPr>
-          <a:xfrm>
-            <a:off x="9784080" y="2651760"/>
-            <a:ext cx="1463040" cy="1371600"/>
+          <p:cNvPr id="18" name="Shape 16"/>
+          <p:cNvSpPr/>
+          <p:nvPr/>
+        </p:nvSpPr>
+        <p:spPr>
+          <a:xfrm>
+            <a:off x="3992728" y="3867912"/>
+            <a:ext cx="4206240" cy="658368"/>
           </a:xfrm>
           <a:prstGeom prst="roundRect">
             <a:avLst>
-              <a:gd name="adj" fmla="val 5333"/>
+              <a:gd name="adj" fmla="val 11111"/>
             </a:avLst>
           </a:prstGeom>
           <a:solidFill>
-            <a:srgbClr val="FFFFFF"/>
-          </a:solidFill>
-          <a:ln w="15240">
+            <a:srgbClr val="EEF1F4"/>
+          </a:solidFill>
+          <a:ln w="17780">
+            <a:solidFill>
+              <a:srgbClr val="33414F"/>
+            </a:solidFill>
+            <a:prstDash val="solid"/>
+          </a:ln>
+        </p:spPr>
+      </p:sp>
+      <p:sp>
+        <p:nvSpPr>
+          <p:cNvPr id="19" name="Shape 17"/>
+          <p:cNvSpPr/>
+          <p:nvPr/>
+        </p:nvSpPr>
+        <p:spPr>
+          <a:xfrm>
+            <a:off x="4193896" y="4114800"/>
+            <a:ext cx="164592" cy="164592"/>
+          </a:xfrm>
+          <a:prstGeom prst="ellipse">
+            <a:avLst/>
+          </a:prstGeom>
+          <a:solidFill>
+            <a:srgbClr val="33414F"/>
+          </a:solidFill>
+          <a:ln/>
+        </p:spPr>
+      </p:sp>
+      <p:sp>
+        <p:nvSpPr>
+          <p:cNvPr id="20" name="Text 18"/>
+          <p:cNvSpPr/>
+          <p:nvPr/>
+        </p:nvSpPr>
+        <p:spPr>
+          <a:xfrm>
+            <a:off x="4495648" y="3867912"/>
+            <a:ext cx="2194560" cy="658368"/>
+          </a:xfrm>
+          <a:prstGeom prst="rect">
+            <a:avLst/>
+          </a:prstGeom>
+          <a:noFill/>
+          <a:ln/>
+        </p:spPr>
+        <p:txBody>
+          <a:bodyPr wrap="square" lIns="0" tIns="0" rIns="0" bIns="0" rtlCol="0" anchor="ctr"/>
+          <a:lstStyle/>
+          <a:p>
+            <a:pPr indent="0" marL="0">
+              <a:buNone/>
+            </a:pPr>
+            <a:r>
+              <a:rPr lang="en-US" sz="1350" b="1" dirty="0">
+                <a:solidFill>
+                  <a:srgbClr val="20262D"/>
+                </a:solidFill>
+                <a:latin typeface="Calibri" pitchFamily="34" charset="0"/>
+                <a:ea typeface="Calibri" pitchFamily="34" charset="-122"/>
+                <a:cs typeface="Calibri" pitchFamily="34" charset="-120"/>
+              </a:rPr>
+              <a:t>AWS Lambda</a:t>
+            </a:r>
+            <a:endParaRPr lang="en-US" sz="1350" dirty="0"/>
+          </a:p>
+        </p:txBody>
+      </p:sp>
+      <p:sp>
+        <p:nvSpPr>
+          <p:cNvPr id="21" name="Text 19"/>
+          <p:cNvSpPr/>
+          <p:nvPr/>
+        </p:nvSpPr>
+        <p:spPr>
+          <a:xfrm>
+            <a:off x="6644488" y="3867912"/>
+            <a:ext cx="1463040" cy="658368"/>
+          </a:xfrm>
+          <a:prstGeom prst="rect">
+            <a:avLst/>
+          </a:prstGeom>
+          <a:noFill/>
+          <a:ln/>
+        </p:spPr>
+        <p:txBody>
+          <a:bodyPr wrap="square" lIns="0" tIns="0" rIns="0" bIns="0" rtlCol="0" anchor="ctr"/>
+          <a:lstStyle/>
+          <a:p>
+            <a:pPr algn="r" indent="0" marL="0">
+              <a:buNone/>
+            </a:pPr>
+            <a:r>
+              <a:rPr lang="en-US" sz="950" dirty="0">
+                <a:solidFill>
+                  <a:srgbClr val="626E78"/>
+                </a:solidFill>
+                <a:latin typeface="Calibri" pitchFamily="34" charset="0"/>
+                <a:ea typeface="Calibri" pitchFamily="34" charset="-122"/>
+                <a:cs typeface="Calibri" pitchFamily="34" charset="-120"/>
+              </a:rPr>
+              <a:t>java17 ingest</a:t>
+            </a:r>
+            <a:endParaRPr lang="en-US" sz="950" dirty="0"/>
+          </a:p>
+        </p:txBody>
+      </p:sp>
+      <p:sp>
+        <p:nvSpPr>
+          <p:cNvPr id="22" name="Shape 20"/>
+          <p:cNvSpPr/>
+          <p:nvPr/>
+        </p:nvSpPr>
+        <p:spPr>
+          <a:xfrm>
+            <a:off x="6095848" y="4526280"/>
+            <a:ext cx="0" cy="219456"/>
+          </a:xfrm>
+          <a:prstGeom prst="line">
+            <a:avLst/>
+          </a:prstGeom>
+          <a:noFill/>
+          <a:ln w="25400">
+            <a:solidFill>
+              <a:srgbClr val="74889A"/>
+            </a:solidFill>
+            <a:prstDash val="solid"/>
+            <a:tailEnd type="triangle"/>
+          </a:ln>
+        </p:spPr>
+      </p:sp>
+      <p:sp>
+        <p:nvSpPr>
+          <p:cNvPr id="23" name="Shape 21"/>
+          <p:cNvSpPr/>
+          <p:nvPr/>
+        </p:nvSpPr>
+        <p:spPr>
+          <a:xfrm>
+            <a:off x="3992728" y="4745736"/>
+            <a:ext cx="4206240" cy="658368"/>
+          </a:xfrm>
+          <a:prstGeom prst="roundRect">
+            <a:avLst>
+              <a:gd name="adj" fmla="val 11111"/>
+            </a:avLst>
+          </a:prstGeom>
+          <a:solidFill>
+            <a:srgbClr val="EEF1F4"/>
+          </a:solidFill>
+          <a:ln w="17780">
+            <a:solidFill>
+              <a:srgbClr val="33414F"/>
+            </a:solidFill>
+            <a:prstDash val="solid"/>
+          </a:ln>
+        </p:spPr>
+      </p:sp>
+      <p:sp>
+        <p:nvSpPr>
+          <p:cNvPr id="24" name="Shape 22"/>
+          <p:cNvSpPr/>
+          <p:nvPr/>
+        </p:nvSpPr>
+        <p:spPr>
+          <a:xfrm>
+            <a:off x="4193896" y="4992624"/>
+            <a:ext cx="164592" cy="164592"/>
+          </a:xfrm>
+          <a:prstGeom prst="ellipse">
+            <a:avLst/>
+          </a:prstGeom>
+          <a:solidFill>
+            <a:srgbClr val="33414F"/>
+          </a:solidFill>
+          <a:ln/>
+        </p:spPr>
+      </p:sp>
+      <p:sp>
+        <p:nvSpPr>
+          <p:cNvPr id="25" name="Text 23"/>
+          <p:cNvSpPr/>
+          <p:nvPr/>
+        </p:nvSpPr>
+        <p:spPr>
+          <a:xfrm>
+            <a:off x="4495648" y="4745736"/>
+            <a:ext cx="2194560" cy="658368"/>
+          </a:xfrm>
+          <a:prstGeom prst="rect">
+            <a:avLst/>
+          </a:prstGeom>
+          <a:noFill/>
+          <a:ln/>
+        </p:spPr>
+        <p:txBody>
+          <a:bodyPr wrap="square" lIns="0" tIns="0" rIns="0" bIns="0" rtlCol="0" anchor="ctr"/>
+          <a:lstStyle/>
+          <a:p>
+            <a:pPr indent="0" marL="0">
+              <a:buNone/>
+            </a:pPr>
+            <a:r>
+              <a:rPr lang="en-US" sz="1350" b="1" dirty="0">
+                <a:solidFill>
+                  <a:srgbClr val="20262D"/>
+                </a:solidFill>
+                <a:latin typeface="Calibri" pitchFamily="34" charset="0"/>
+                <a:ea typeface="Calibri" pitchFamily="34" charset="-122"/>
+                <a:cs typeface="Calibri" pitchFamily="34" charset="-120"/>
+              </a:rPr>
+              <a:t>DynamoDB</a:t>
+            </a:r>
+            <a:endParaRPr lang="en-US" sz="1350" dirty="0"/>
+          </a:p>
+        </p:txBody>
+      </p:sp>
+      <p:sp>
+        <p:nvSpPr>
+          <p:cNvPr id="26" name="Text 24"/>
+          <p:cNvSpPr/>
+          <p:nvPr/>
+        </p:nvSpPr>
+        <p:spPr>
+          <a:xfrm>
+            <a:off x="6644488" y="4745736"/>
+            <a:ext cx="1463040" cy="658368"/>
+          </a:xfrm>
+          <a:prstGeom prst="rect">
+            <a:avLst/>
+          </a:prstGeom>
+          <a:noFill/>
+          <a:ln/>
+        </p:spPr>
+        <p:txBody>
+          <a:bodyPr wrap="square" lIns="0" tIns="0" rIns="0" bIns="0" rtlCol="0" anchor="ctr"/>
+          <a:lstStyle/>
+          <a:p>
+            <a:pPr algn="r" indent="0" marL="0">
+              <a:buNone/>
+            </a:pPr>
+            <a:r>
+              <a:rPr lang="en-US" sz="950" dirty="0">
+                <a:solidFill>
+                  <a:srgbClr val="626E78"/>
+                </a:solidFill>
+                <a:latin typeface="Calibri" pitchFamily="34" charset="0"/>
+                <a:ea typeface="Calibri" pitchFamily="34" charset="-122"/>
+                <a:cs typeface="Calibri" pitchFamily="34" charset="-120"/>
+              </a:rPr>
+              <a:t>window aggregates</a:t>
+            </a:r>
+            <a:endParaRPr lang="en-US" sz="950" dirty="0"/>
+          </a:p>
+        </p:txBody>
+      </p:sp>
+      <p:sp>
+        <p:nvSpPr>
+          <p:cNvPr id="27" name="Shape 25"/>
+          <p:cNvSpPr/>
+          <p:nvPr/>
+        </p:nvSpPr>
+        <p:spPr>
+          <a:xfrm>
+            <a:off x="6095848" y="5404104"/>
+            <a:ext cx="0" cy="219456"/>
+          </a:xfrm>
+          <a:prstGeom prst="line">
+            <a:avLst/>
+          </a:prstGeom>
+          <a:noFill/>
+          <a:ln w="25400">
+            <a:solidFill>
+              <a:srgbClr val="74889A"/>
+            </a:solidFill>
+            <a:prstDash val="solid"/>
+            <a:tailEnd type="triangle"/>
+          </a:ln>
+        </p:spPr>
+      </p:sp>
+      <p:sp>
+        <p:nvSpPr>
+          <p:cNvPr id="28" name="Shape 26"/>
+          <p:cNvSpPr/>
+          <p:nvPr/>
+        </p:nvSpPr>
+        <p:spPr>
+          <a:xfrm>
+            <a:off x="3992728" y="5623560"/>
+            <a:ext cx="4206240" cy="658368"/>
+          </a:xfrm>
+          <a:prstGeom prst="roundRect">
+            <a:avLst>
+              <a:gd name="adj" fmla="val 11111"/>
+            </a:avLst>
+          </a:prstGeom>
+          <a:solidFill>
+            <a:srgbClr val="EEF1F4"/>
+          </a:solidFill>
+          <a:ln w="17780">
             <a:solidFill>
               <a:srgbClr val="4C6579"/>
             </a:solidFill>
@@ -2352,14 +2364,34 @@
       </p:sp>
       <p:sp>
         <p:nvSpPr>
-          <p:cNvPr id="27" name="Text 25"/>
-          <p:cNvSpPr/>
-          <p:nvPr/>
-        </p:nvSpPr>
-        <p:spPr>
-          <a:xfrm>
-            <a:off x="9738360" y="2907792"/>
-            <a:ext cx="1554480" cy="457200"/>
+          <p:cNvPr id="29" name="Shape 27"/>
+          <p:cNvSpPr/>
+          <p:nvPr/>
+        </p:nvSpPr>
+        <p:spPr>
+          <a:xfrm>
+            <a:off x="4193896" y="5870448"/>
+            <a:ext cx="164592" cy="164592"/>
+          </a:xfrm>
+          <a:prstGeom prst="ellipse">
+            <a:avLst/>
+          </a:prstGeom>
+          <a:solidFill>
+            <a:srgbClr val="4C6579"/>
+          </a:solidFill>
+          <a:ln/>
+        </p:spPr>
+      </p:sp>
+      <p:sp>
+        <p:nvSpPr>
+          <p:cNvPr id="30" name="Text 28"/>
+          <p:cNvSpPr/>
+          <p:nvPr/>
+        </p:nvSpPr>
+        <p:spPr>
+          <a:xfrm>
+            <a:off x="4495648" y="5623560"/>
+            <a:ext cx="2194560" cy="658368"/>
           </a:xfrm>
           <a:prstGeom prst="rect">
             <a:avLst/>
@@ -2371,11 +2403,11 @@
           <a:bodyPr wrap="square" lIns="0" tIns="0" rIns="0" bIns="0" rtlCol="0" anchor="ctr"/>
           <a:lstStyle/>
           <a:p>
-            <a:pPr algn="ctr" indent="0" marL="0">
-              <a:buNone/>
-            </a:pPr>
-            <a:r>
-              <a:rPr lang="en-US" sz="1250" b="1" dirty="0">
+            <a:pPr indent="0" marL="0">
+              <a:buNone/>
+            </a:pPr>
+            <a:r>
+              <a:rPr lang="en-US" sz="1350" b="1" dirty="0">
                 <a:solidFill>
                   <a:srgbClr val="20262D"/>
                 </a:solidFill>
@@ -2385,20 +2417,20 @@
               </a:rPr>
               <a:t>API GW + S3</a:t>
             </a:r>
-            <a:endParaRPr lang="en-US" sz="1250" dirty="0"/>
-          </a:p>
-        </p:txBody>
-      </p:sp>
-      <p:sp>
-        <p:nvSpPr>
-          <p:cNvPr id="28" name="Text 26"/>
-          <p:cNvSpPr/>
-          <p:nvPr/>
-        </p:nvSpPr>
-        <p:spPr>
-          <a:xfrm>
-            <a:off x="9765792" y="3401568"/>
-            <a:ext cx="1499616" cy="457200"/>
+            <a:endParaRPr lang="en-US" sz="1350" dirty="0"/>
+          </a:p>
+        </p:txBody>
+      </p:sp>
+      <p:sp>
+        <p:nvSpPr>
+          <p:cNvPr id="31" name="Text 29"/>
+          <p:cNvSpPr/>
+          <p:nvPr/>
+        </p:nvSpPr>
+        <p:spPr>
+          <a:xfrm>
+            <a:off x="6644488" y="5623560"/>
+            <a:ext cx="1463040" cy="658368"/>
           </a:xfrm>
           <a:prstGeom prst="rect">
             <a:avLst/>
@@ -2410,11 +2442,11 @@
           <a:bodyPr wrap="square" lIns="0" tIns="0" rIns="0" bIns="0" rtlCol="0" anchor="ctr"/>
           <a:lstStyle/>
           <a:p>
-            <a:pPr algn="ctr" indent="0" marL="0">
-              <a:buNone/>
-            </a:pPr>
-            <a:r>
-              <a:rPr lang="en-US" sz="900" dirty="0">
+            <a:pPr algn="r" indent="0" marL="0">
+              <a:buNone/>
+            </a:pPr>
+            <a:r>
+              <a:rPr lang="en-US" sz="950" dirty="0">
                 <a:solidFill>
                   <a:srgbClr val="626E78"/>
                 </a:solidFill>
@@ -2424,20 +2456,20 @@
               </a:rPr>
               <a:t>fleet dashboard</a:t>
             </a:r>
-            <a:endParaRPr lang="en-US" sz="900" dirty="0"/>
-          </a:p>
-        </p:txBody>
-      </p:sp>
-      <p:sp>
-        <p:nvSpPr>
-          <p:cNvPr id="29" name="Text 27"/>
-          <p:cNvSpPr/>
-          <p:nvPr/>
-        </p:nvSpPr>
-        <p:spPr>
-          <a:xfrm>
-            <a:off x="640080" y="5257800"/>
-            <a:ext cx="10972800" cy="731520"/>
+            <a:endParaRPr lang="en-US" sz="950" dirty="0"/>
+          </a:p>
+        </p:txBody>
+      </p:sp>
+      <p:sp>
+        <p:nvSpPr>
+          <p:cNvPr id="32" name="Text 30"/>
+          <p:cNvSpPr/>
+          <p:nvPr/>
+        </p:nvSpPr>
+        <p:spPr>
+          <a:xfrm>
+            <a:off x="2438248" y="1234440"/>
+            <a:ext cx="1371600" cy="365760"/>
           </a:xfrm>
           <a:prstGeom prst="rect">
             <a:avLst/>
@@ -2449,7 +2481,85 @@
           <a:bodyPr wrap="square" rtlCol="0" anchor="ctr"/>
           <a:lstStyle/>
           <a:p>
-            <a:pPr algn="ctr" indent="0" marL="0">
+            <a:pPr algn="r" indent="0" marL="0">
+              <a:buNone/>
+            </a:pPr>
+            <a:r>
+              <a:rPr lang="en-US" sz="1100" b="1" spc="200" kern="0" dirty="0">
+                <a:solidFill>
+                  <a:srgbClr val="74889A"/>
+                </a:solidFill>
+                <a:latin typeface="Calibri" pitchFamily="34" charset="0"/>
+                <a:ea typeface="Calibri" pitchFamily="34" charset="-122"/>
+                <a:cs typeface="Calibri" pitchFamily="34" charset="-120"/>
+              </a:rPr>
+              <a:t>EDGE</a:t>
+            </a:r>
+            <a:endParaRPr lang="en-US" sz="1100" dirty="0"/>
+          </a:p>
+        </p:txBody>
+      </p:sp>
+      <p:sp>
+        <p:nvSpPr>
+          <p:cNvPr id="33" name="Text 31"/>
+          <p:cNvSpPr/>
+          <p:nvPr/>
+        </p:nvSpPr>
+        <p:spPr>
+          <a:xfrm>
+            <a:off x="2438248" y="2990088"/>
+            <a:ext cx="1371600" cy="365760"/>
+          </a:xfrm>
+          <a:prstGeom prst="rect">
+            <a:avLst/>
+          </a:prstGeom>
+          <a:noFill/>
+          <a:ln/>
+        </p:spPr>
+        <p:txBody>
+          <a:bodyPr wrap="square" rtlCol="0" anchor="ctr"/>
+          <a:lstStyle/>
+          <a:p>
+            <a:pPr algn="r" indent="0" marL="0">
+              <a:buNone/>
+            </a:pPr>
+            <a:r>
+              <a:rPr lang="en-US" sz="1100" b="1" spc="200" kern="0" dirty="0">
+                <a:solidFill>
+                  <a:srgbClr val="33414F"/>
+                </a:solidFill>
+                <a:latin typeface="Calibri" pitchFamily="34" charset="0"/>
+                <a:ea typeface="Calibri" pitchFamily="34" charset="-122"/>
+                <a:cs typeface="Calibri" pitchFamily="34" charset="-120"/>
+              </a:rPr>
+              <a:t>CLOUD</a:t>
+            </a:r>
+            <a:endParaRPr lang="en-US" sz="1100" dirty="0"/>
+          </a:p>
+        </p:txBody>
+      </p:sp>
+      <p:sp>
+        <p:nvSpPr>
+          <p:cNvPr id="34" name="Text 32"/>
+          <p:cNvSpPr/>
+          <p:nvPr/>
+        </p:nvSpPr>
+        <p:spPr>
+          <a:xfrm>
+            <a:off x="8656168" y="2743200"/>
+            <a:ext cx="3291840" cy="2194560"/>
+          </a:xfrm>
+          <a:prstGeom prst="rect">
+            <a:avLst/>
+          </a:prstGeom>
+          <a:noFill/>
+          <a:ln/>
+        </p:spPr>
+        <p:txBody>
+          <a:bodyPr wrap="square" rtlCol="0" anchor="ctr"/>
+          <a:lstStyle/>
+          <a:p>
+            <a:pPr indent="0" marL="0">
               <a:buNone/>
             </a:pPr>
             <a:r>
@@ -3109,59 +3219,24 @@
       </p:sp>
       <p:sp>
         <p:nvSpPr>
-          <p:cNvPr id="3" name="Text 1"/>
-          <p:cNvSpPr/>
-          <p:nvPr/>
-        </p:nvSpPr>
-        <p:spPr>
-          <a:xfrm>
-            <a:off x="731520" y="1965960"/>
-            <a:ext cx="2377440" cy="548640"/>
-          </a:xfrm>
-          <a:prstGeom prst="rect">
-            <a:avLst/>
-          </a:prstGeom>
-          <a:noFill/>
-          <a:ln/>
-        </p:spPr>
-        <p:txBody>
-          <a:bodyPr wrap="square" lIns="0" tIns="0" rIns="0" bIns="0" rtlCol="0" anchor="ctr"/>
-          <a:lstStyle/>
-          <a:p>
-            <a:pPr indent="0" marL="0">
-              <a:buNone/>
-            </a:pPr>
-            <a:r>
-              <a:rPr lang="en-US" sz="2300" b="1" dirty="0">
-                <a:solidFill>
-                  <a:srgbClr val="EC7A2E"/>
-                </a:solidFill>
-                <a:latin typeface="Times New Roman" pitchFamily="34" charset="0"/>
-                <a:ea typeface="Times New Roman" pitchFamily="34" charset="-122"/>
-                <a:cs typeface="Times New Roman" pitchFamily="34" charset="-120"/>
-              </a:rPr>
-              <a:t>Problem</a:t>
-            </a:r>
-            <a:endParaRPr lang="en-US" sz="2300" dirty="0"/>
-          </a:p>
-        </p:txBody>
-      </p:sp>
-      <p:sp>
-        <p:nvSpPr>
-          <p:cNvPr id="4" name="Shape 2"/>
-          <p:cNvSpPr/>
-          <p:nvPr/>
-        </p:nvSpPr>
-        <p:spPr>
-          <a:xfrm>
-            <a:off x="3200400" y="1920240"/>
-            <a:ext cx="0" cy="1783080"/>
-          </a:xfrm>
-          <a:prstGeom prst="line">
-            <a:avLst/>
-          </a:prstGeom>
-          <a:noFill/>
-          <a:ln w="31750">
+          <p:cNvPr id="3" name="Shape 1"/>
+          <p:cNvSpPr/>
+          <p:nvPr/>
+        </p:nvSpPr>
+        <p:spPr>
+          <a:xfrm>
+            <a:off x="640080" y="1874520"/>
+            <a:ext cx="4937760" cy="4160520"/>
+          </a:xfrm>
+          <a:prstGeom prst="roundRect">
+            <a:avLst>
+              <a:gd name="adj" fmla="val 2198"/>
+            </a:avLst>
+          </a:prstGeom>
+          <a:solidFill>
+            <a:srgbClr val="EEF1F4"/>
+          </a:solidFill>
+          <a:ln w="19050">
             <a:solidFill>
               <a:srgbClr val="EC7A2E"/>
             </a:solidFill>
@@ -3171,14 +3246,53 @@
       </p:sp>
       <p:sp>
         <p:nvSpPr>
+          <p:cNvPr id="4" name="Text 2"/>
+          <p:cNvSpPr/>
+          <p:nvPr/>
+        </p:nvSpPr>
+        <p:spPr>
+          <a:xfrm>
+            <a:off x="960120" y="2103120"/>
+            <a:ext cx="3657600" cy="457200"/>
+          </a:xfrm>
+          <a:prstGeom prst="rect">
+            <a:avLst/>
+          </a:prstGeom>
+          <a:noFill/>
+          <a:ln/>
+        </p:spPr>
+        <p:txBody>
+          <a:bodyPr wrap="square" lIns="0" tIns="0" rIns="0" bIns="0" rtlCol="0" anchor="ctr"/>
+          <a:lstStyle/>
+          <a:p>
+            <a:pPr indent="0" marL="0">
+              <a:buNone/>
+            </a:pPr>
+            <a:r>
+              <a:rPr lang="en-US" sz="1900" b="1" dirty="0">
+                <a:solidFill>
+                  <a:srgbClr val="EC7A2E"/>
+                </a:solidFill>
+                <a:latin typeface="Times New Roman" pitchFamily="34" charset="0"/>
+                <a:ea typeface="Times New Roman" pitchFamily="34" charset="-122"/>
+                <a:cs typeface="Times New Roman" pitchFamily="34" charset="-120"/>
+              </a:rPr>
+              <a:t>Problem</a:t>
+            </a:r>
+            <a:endParaRPr lang="en-US" sz="1900" dirty="0"/>
+          </a:p>
+        </p:txBody>
+      </p:sp>
+      <p:sp>
+        <p:nvSpPr>
           <p:cNvPr id="5" name="Text 3"/>
           <p:cNvSpPr/>
           <p:nvPr/>
         </p:nvSpPr>
         <p:spPr>
           <a:xfrm>
-            <a:off x="3474720" y="1920240"/>
-            <a:ext cx="7955280" cy="1920240"/>
+            <a:off x="960120" y="2651760"/>
+            <a:ext cx="4343400" cy="3200400"/>
           </a:xfrm>
           <a:prstGeom prst="rect">
             <a:avLst/>
@@ -3197,7 +3311,7 @@
               <a:buNone/>
             </a:pPr>
             <a:r>
-              <a:rPr lang="en-US" sz="1450" dirty="0">
+              <a:rPr lang="en-US" sz="1350" dirty="0">
                 <a:solidFill>
                   <a:srgbClr val="20262D"/>
                 </a:solidFill>
@@ -3207,65 +3321,30 @@
               </a:rPr>
               <a:t>All three AWS-facing components always built static test credentials for the local emulator, and the fog publisher always applied its endpoint override — even on real AWS. Every one of the 116 tests passed and the full stack ran cleanly on the emulator, but on real AWS the Lambdas would override their execution-role credentials and be rejected, and the fog node would crash at startup on a missing endpoint.</a:t>
             </a:r>
-            <a:endParaRPr lang="en-US" sz="1450" dirty="0"/>
-          </a:p>
-        </p:txBody>
-      </p:sp>
-      <p:sp>
-        <p:nvSpPr>
-          <p:cNvPr id="6" name="Text 4"/>
-          <p:cNvSpPr/>
-          <p:nvPr/>
-        </p:nvSpPr>
-        <p:spPr>
-          <a:xfrm>
-            <a:off x="731520" y="4114800"/>
-            <a:ext cx="2377440" cy="548640"/>
-          </a:xfrm>
-          <a:prstGeom prst="rect">
-            <a:avLst/>
-          </a:prstGeom>
-          <a:noFill/>
-          <a:ln/>
-        </p:spPr>
-        <p:txBody>
-          <a:bodyPr wrap="square" lIns="0" tIns="0" rIns="0" bIns="0" rtlCol="0" anchor="ctr"/>
-          <a:lstStyle/>
-          <a:p>
-            <a:pPr indent="0" marL="0">
-              <a:buNone/>
-            </a:pPr>
-            <a:r>
-              <a:rPr lang="en-US" sz="2300" b="1" dirty="0">
-                <a:solidFill>
-                  <a:srgbClr val="4C6579"/>
-                </a:solidFill>
-                <a:latin typeface="Times New Roman" pitchFamily="34" charset="0"/>
-                <a:ea typeface="Times New Roman" pitchFamily="34" charset="-122"/>
-                <a:cs typeface="Times New Roman" pitchFamily="34" charset="-120"/>
-              </a:rPr>
-              <a:t>Solution</a:t>
-            </a:r>
-            <a:endParaRPr lang="en-US" sz="2300" dirty="0"/>
-          </a:p>
-        </p:txBody>
-      </p:sp>
-      <p:sp>
-        <p:nvSpPr>
-          <p:cNvPr id="7" name="Shape 5"/>
-          <p:cNvSpPr/>
-          <p:nvPr/>
-        </p:nvSpPr>
-        <p:spPr>
-          <a:xfrm>
-            <a:off x="3200400" y="4069080"/>
-            <a:ext cx="0" cy="1783080"/>
-          </a:xfrm>
-          <a:prstGeom prst="line">
-            <a:avLst/>
-          </a:prstGeom>
-          <a:noFill/>
-          <a:ln w="31750">
+            <a:endParaRPr lang="en-US" sz="1350" dirty="0"/>
+          </a:p>
+        </p:txBody>
+      </p:sp>
+      <p:sp>
+        <p:nvSpPr>
+          <p:cNvPr id="6" name="Shape 4"/>
+          <p:cNvSpPr/>
+          <p:nvPr/>
+        </p:nvSpPr>
+        <p:spPr>
+          <a:xfrm>
+            <a:off x="6611112" y="1874520"/>
+            <a:ext cx="4937760" cy="4160520"/>
+          </a:xfrm>
+          <a:prstGeom prst="roundRect">
+            <a:avLst>
+              <a:gd name="adj" fmla="val 2198"/>
+            </a:avLst>
+          </a:prstGeom>
+          <a:solidFill>
+            <a:srgbClr val="EEF1F4"/>
+          </a:solidFill>
+          <a:ln w="19050">
             <a:solidFill>
               <a:srgbClr val="4C6579"/>
             </a:solidFill>
@@ -3275,14 +3354,53 @@
       </p:sp>
       <p:sp>
         <p:nvSpPr>
+          <p:cNvPr id="7" name="Text 5"/>
+          <p:cNvSpPr/>
+          <p:nvPr/>
+        </p:nvSpPr>
+        <p:spPr>
+          <a:xfrm>
+            <a:off x="6931152" y="2103120"/>
+            <a:ext cx="3657600" cy="457200"/>
+          </a:xfrm>
+          <a:prstGeom prst="rect">
+            <a:avLst/>
+          </a:prstGeom>
+          <a:noFill/>
+          <a:ln/>
+        </p:spPr>
+        <p:txBody>
+          <a:bodyPr wrap="square" lIns="0" tIns="0" rIns="0" bIns="0" rtlCol="0" anchor="ctr"/>
+          <a:lstStyle/>
+          <a:p>
+            <a:pPr indent="0" marL="0">
+              <a:buNone/>
+            </a:pPr>
+            <a:r>
+              <a:rPr lang="en-US" sz="1900" b="1" dirty="0">
+                <a:solidFill>
+                  <a:srgbClr val="4C6579"/>
+                </a:solidFill>
+                <a:latin typeface="Times New Roman" pitchFamily="34" charset="0"/>
+                <a:ea typeface="Times New Roman" pitchFamily="34" charset="-122"/>
+                <a:cs typeface="Times New Roman" pitchFamily="34" charset="-120"/>
+              </a:rPr>
+              <a:t>Solution</a:t>
+            </a:r>
+            <a:endParaRPr lang="en-US" sz="1900" dirty="0"/>
+          </a:p>
+        </p:txBody>
+      </p:sp>
+      <p:sp>
+        <p:nvSpPr>
           <p:cNvPr id="8" name="Text 6"/>
           <p:cNvSpPr/>
           <p:nvPr/>
         </p:nvSpPr>
         <p:spPr>
           <a:xfrm>
-            <a:off x="3474720" y="4069080"/>
-            <a:ext cx="7955280" cy="1920240"/>
+            <a:off x="6931152" y="2651760"/>
+            <a:ext cx="4343400" cy="3200400"/>
           </a:xfrm>
           <a:prstGeom prst="rect">
             <a:avLst/>
@@ -3301,7 +3419,7 @@
               <a:buNone/>
             </a:pPr>
             <a:r>
-              <a:rPr lang="en-US" sz="1450" dirty="0">
+              <a:rPr lang="en-US" sz="1350" dirty="0">
                 <a:solidFill>
                   <a:srgbClr val="20262D"/>
                 </a:solidFill>
@@ -3311,9 +3429,29 @@
               </a:rPr>
               <a:t>Gate on the endpoint setting itself: present means emulator credentials, absent means the real AWS role — exactly as one class already did correctly. Deployed with this fix, every health check came up green on the first attempt. One of four defects a pre-deployment audit caught, none visible to a green 116-test suite.</a:t>
             </a:r>
-            <a:endParaRPr lang="en-US" sz="1450" dirty="0"/>
-          </a:p>
-        </p:txBody>
+            <a:endParaRPr lang="en-US" sz="1350" dirty="0"/>
+          </a:p>
+        </p:txBody>
+      </p:sp>
+      <p:sp>
+        <p:nvSpPr>
+          <p:cNvPr id="9" name="Shape 7"/>
+          <p:cNvSpPr/>
+          <p:nvPr/>
+        </p:nvSpPr>
+        <p:spPr>
+          <a:xfrm>
+            <a:off x="5669280" y="3703320"/>
+            <a:ext cx="841248" cy="512064"/>
+          </a:xfrm>
+          <a:prstGeom prst="rightArrow">
+            <a:avLst/>
+          </a:prstGeom>
+          <a:solidFill>
+            <a:srgbClr val="33414F"/>
+          </a:solidFill>
+          <a:ln/>
+        </p:spPr>
       </p:sp>
     </p:spTree>
   </p:cSld>

--- a/ppt/GouthamUppu_X25167936_warehouse-robotics-fleet.pptx
+++ b/ppt/GouthamUppu_X25167936_warehouse-robotics-fleet.pptx
@@ -2689,59 +2689,24 @@
       </p:sp>
       <p:sp>
         <p:nvSpPr>
-          <p:cNvPr id="4" name="Text 2"/>
-          <p:cNvSpPr/>
-          <p:nvPr/>
-        </p:nvSpPr>
-        <p:spPr>
-          <a:xfrm>
-            <a:off x="640080" y="1737360"/>
-            <a:ext cx="1097280" cy="1097280"/>
-          </a:xfrm>
-          <a:prstGeom prst="rect">
-            <a:avLst/>
-          </a:prstGeom>
-          <a:noFill/>
-          <a:ln/>
-        </p:spPr>
-        <p:txBody>
-          <a:bodyPr wrap="square" lIns="0" tIns="0" rIns="0" bIns="0" rtlCol="0" anchor="ctr"/>
-          <a:lstStyle/>
-          <a:p>
-            <a:pPr indent="0" marL="0">
-              <a:buNone/>
-            </a:pPr>
-            <a:r>
-              <a:rPr lang="en-US" sz="5400" b="1" dirty="0">
-                <a:solidFill>
-                  <a:srgbClr val="EEF1F4"/>
-                </a:solidFill>
-                <a:latin typeface="Times New Roman" pitchFamily="34" charset="0"/>
-                <a:ea typeface="Times New Roman" pitchFamily="34" charset="-122"/>
-                <a:cs typeface="Times New Roman" pitchFamily="34" charset="-120"/>
-              </a:rPr>
-              <a:t>1</a:t>
-            </a:r>
-            <a:endParaRPr lang="en-US" sz="5400" dirty="0"/>
-          </a:p>
-        </p:txBody>
-      </p:sp>
-      <p:sp>
-        <p:nvSpPr>
-          <p:cNvPr id="5" name="Shape 3"/>
-          <p:cNvSpPr/>
-          <p:nvPr/>
-        </p:nvSpPr>
-        <p:spPr>
-          <a:xfrm>
-            <a:off x="1828800" y="1920240"/>
-            <a:ext cx="0" cy="1051560"/>
-          </a:xfrm>
-          <a:prstGeom prst="line">
-            <a:avLst/>
-          </a:prstGeom>
-          <a:noFill/>
-          <a:ln w="25400">
+          <p:cNvPr id="4" name="Shape 2"/>
+          <p:cNvSpPr/>
+          <p:nvPr/>
+        </p:nvSpPr>
+        <p:spPr>
+          <a:xfrm>
+            <a:off x="640080" y="1828800"/>
+            <a:ext cx="10881360" cy="1371600"/>
+          </a:xfrm>
+          <a:prstGeom prst="roundRect">
+            <a:avLst>
+              <a:gd name="adj" fmla="val 6667"/>
+            </a:avLst>
+          </a:prstGeom>
+          <a:solidFill>
+            <a:srgbClr val="EEF1F4"/>
+          </a:solidFill>
+          <a:ln w="15240">
             <a:solidFill>
               <a:srgbClr val="4C6579"/>
             </a:solidFill>
@@ -2751,14 +2716,34 @@
       </p:sp>
       <p:sp>
         <p:nvSpPr>
+          <p:cNvPr id="5" name="Shape 3"/>
+          <p:cNvSpPr/>
+          <p:nvPr/>
+        </p:nvSpPr>
+        <p:spPr>
+          <a:xfrm>
+            <a:off x="960120" y="2203704"/>
+            <a:ext cx="621792" cy="621792"/>
+          </a:xfrm>
+          <a:prstGeom prst="ellipse">
+            <a:avLst/>
+          </a:prstGeom>
+          <a:solidFill>
+            <a:srgbClr val="33414F"/>
+          </a:solidFill>
+          <a:ln/>
+        </p:spPr>
+      </p:sp>
+      <p:sp>
+        <p:nvSpPr>
           <p:cNvPr id="6" name="Text 4"/>
           <p:cNvSpPr/>
           <p:nvPr/>
         </p:nvSpPr>
         <p:spPr>
           <a:xfrm>
-            <a:off x="2057400" y="1874520"/>
-            <a:ext cx="9509760" cy="411480"/>
+            <a:off x="960120" y="2203704"/>
+            <a:ext cx="621792" cy="621792"/>
           </a:xfrm>
           <a:prstGeom prst="rect">
             <a:avLst/>
@@ -2770,11 +2755,50 @@
           <a:bodyPr wrap="square" lIns="0" tIns="0" rIns="0" bIns="0" rtlCol="0" anchor="ctr"/>
           <a:lstStyle/>
           <a:p>
+            <a:pPr algn="ctr" indent="0" marL="0">
+              <a:buNone/>
+            </a:pPr>
+            <a:r>
+              <a:rPr lang="en-US" sz="2200" b="1" dirty="0">
+                <a:solidFill>
+                  <a:srgbClr val="FFFFFF"/>
+                </a:solidFill>
+                <a:latin typeface="Times New Roman" pitchFamily="34" charset="0"/>
+                <a:ea typeface="Times New Roman" pitchFamily="34" charset="-122"/>
+                <a:cs typeface="Times New Roman" pitchFamily="34" charset="-120"/>
+              </a:rPr>
+              <a:t>1</a:t>
+            </a:r>
+            <a:endParaRPr lang="en-US" sz="2200" dirty="0"/>
+          </a:p>
+        </p:txBody>
+      </p:sp>
+      <p:sp>
+        <p:nvSpPr>
+          <p:cNvPr id="7" name="Text 5"/>
+          <p:cNvSpPr/>
+          <p:nvPr/>
+        </p:nvSpPr>
+        <p:spPr>
+          <a:xfrm>
+            <a:off x="1828800" y="2029968"/>
+            <a:ext cx="9418320" cy="411480"/>
+          </a:xfrm>
+          <a:prstGeom prst="rect">
+            <a:avLst/>
+          </a:prstGeom>
+          <a:noFill/>
+          <a:ln/>
+        </p:spPr>
+        <p:txBody>
+          <a:bodyPr wrap="square" lIns="0" tIns="0" rIns="0" bIns="0" rtlCol="0" anchor="ctr"/>
+          <a:lstStyle/>
+          <a:p>
             <a:pPr indent="0" marL="0">
               <a:buNone/>
             </a:pPr>
             <a:r>
-              <a:rPr lang="en-US" sz="1800" b="1" dirty="0">
+              <a:rPr lang="en-US" sz="1700" b="1" dirty="0">
                 <a:solidFill>
                   <a:srgbClr val="20262D"/>
                 </a:solidFill>
@@ -2784,20 +2808,20 @@
               </a:rPr>
               <a:t>Ten robots across two zones</a:t>
             </a:r>
-            <a:endParaRPr lang="en-US" sz="1800" dirty="0"/>
-          </a:p>
-        </p:txBody>
-      </p:sp>
-      <p:sp>
-        <p:nvSpPr>
-          <p:cNvPr id="7" name="Text 5"/>
-          <p:cNvSpPr/>
-          <p:nvPr/>
-        </p:nvSpPr>
-        <p:spPr>
-          <a:xfrm>
-            <a:off x="2057400" y="2313432"/>
-            <a:ext cx="9509760" cy="822960"/>
+            <a:endParaRPr lang="en-US" sz="1700" dirty="0"/>
+          </a:p>
+        </p:txBody>
+      </p:sp>
+      <p:sp>
+        <p:nvSpPr>
+          <p:cNvPr id="8" name="Text 6"/>
+          <p:cNvSpPr/>
+          <p:nvPr/>
+        </p:nvSpPr>
+        <p:spPr>
+          <a:xfrm>
+            <a:off x="1828800" y="2450592"/>
+            <a:ext cx="9418320" cy="594360"/>
           </a:xfrm>
           <a:prstGeom prst="rect">
             <a:avLst/>
@@ -2810,10 +2834,13 @@
           <a:lstStyle/>
           <a:p>
             <a:pPr indent="0" marL="0">
-              <a:buNone/>
-            </a:pPr>
-            <a:r>
-              <a:rPr lang="en-US" sz="1350" dirty="0">
+              <a:lnSpc>
+                <a:spcPct val="105000"/>
+              </a:lnSpc>
+              <a:buNone/>
+            </a:pPr>
+            <a:r>
+              <a:rPr lang="en-US" sz="1300" dirty="0">
                 <a:solidFill>
                   <a:srgbClr val="626E78"/>
                 </a:solidFill>
@@ -2823,46 +2850,7 @@
               </a:rPr>
               <a:t>Battery, position, task load, motor and temperature for every robot, fifty live signals updating on the fleet board.</a:t>
             </a:r>
-            <a:endParaRPr lang="en-US" sz="1350" dirty="0"/>
-          </a:p>
-        </p:txBody>
-      </p:sp>
-      <p:sp>
-        <p:nvSpPr>
-          <p:cNvPr id="8" name="Text 6"/>
-          <p:cNvSpPr/>
-          <p:nvPr/>
-        </p:nvSpPr>
-        <p:spPr>
-          <a:xfrm>
-            <a:off x="640080" y="3200400"/>
-            <a:ext cx="1097280" cy="1097280"/>
-          </a:xfrm>
-          <a:prstGeom prst="rect">
-            <a:avLst/>
-          </a:prstGeom>
-          <a:noFill/>
-          <a:ln/>
-        </p:spPr>
-        <p:txBody>
-          <a:bodyPr wrap="square" lIns="0" tIns="0" rIns="0" bIns="0" rtlCol="0" anchor="ctr"/>
-          <a:lstStyle/>
-          <a:p>
-            <a:pPr indent="0" marL="0">
-              <a:buNone/>
-            </a:pPr>
-            <a:r>
-              <a:rPr lang="en-US" sz="5400" b="1" dirty="0">
-                <a:solidFill>
-                  <a:srgbClr val="EEF1F4"/>
-                </a:solidFill>
-                <a:latin typeface="Times New Roman" pitchFamily="34" charset="0"/>
-                <a:ea typeface="Times New Roman" pitchFamily="34" charset="-122"/>
-                <a:cs typeface="Times New Roman" pitchFamily="34" charset="-120"/>
-              </a:rPr>
-              <a:t>2</a:t>
-            </a:r>
-            <a:endParaRPr lang="en-US" sz="5400" dirty="0"/>
+            <a:endParaRPr lang="en-US" sz="1300" dirty="0"/>
           </a:p>
         </p:txBody>
       </p:sp>
@@ -2874,14 +2862,18 @@
         </p:nvSpPr>
         <p:spPr>
           <a:xfrm>
-            <a:off x="1828800" y="3383280"/>
-            <a:ext cx="0" cy="1051560"/>
-          </a:xfrm>
-          <a:prstGeom prst="line">
-            <a:avLst/>
-          </a:prstGeom>
-          <a:noFill/>
-          <a:ln w="25400">
+            <a:off x="640080" y="3401568"/>
+            <a:ext cx="5303520" cy="2606040"/>
+          </a:xfrm>
+          <a:prstGeom prst="roundRect">
+            <a:avLst>
+              <a:gd name="adj" fmla="val 3509"/>
+            </a:avLst>
+          </a:prstGeom>
+          <a:solidFill>
+            <a:srgbClr val="EEF1F4"/>
+          </a:solidFill>
+          <a:ln w="15240">
             <a:solidFill>
               <a:srgbClr val="4C6579"/>
             </a:solidFill>
@@ -2891,14 +2883,34 @@
       </p:sp>
       <p:sp>
         <p:nvSpPr>
-          <p:cNvPr id="10" name="Text 8"/>
-          <p:cNvSpPr/>
-          <p:nvPr/>
-        </p:nvSpPr>
-        <p:spPr>
-          <a:xfrm>
-            <a:off x="2057400" y="3337560"/>
-            <a:ext cx="9509760" cy="411480"/>
+          <p:cNvPr id="10" name="Shape 8"/>
+          <p:cNvSpPr/>
+          <p:nvPr/>
+        </p:nvSpPr>
+        <p:spPr>
+          <a:xfrm>
+            <a:off x="914400" y="3675888"/>
+            <a:ext cx="603504" cy="603504"/>
+          </a:xfrm>
+          <a:prstGeom prst="ellipse">
+            <a:avLst/>
+          </a:prstGeom>
+          <a:solidFill>
+            <a:srgbClr val="33414F"/>
+          </a:solidFill>
+          <a:ln/>
+        </p:spPr>
+      </p:sp>
+      <p:sp>
+        <p:nvSpPr>
+          <p:cNvPr id="11" name="Text 9"/>
+          <p:cNvSpPr/>
+          <p:nvPr/>
+        </p:nvSpPr>
+        <p:spPr>
+          <a:xfrm>
+            <a:off x="914400" y="3675888"/>
+            <a:ext cx="603504" cy="603504"/>
           </a:xfrm>
           <a:prstGeom prst="rect">
             <a:avLst/>
@@ -2910,11 +2922,50 @@
           <a:bodyPr wrap="square" lIns="0" tIns="0" rIns="0" bIns="0" rtlCol="0" anchor="ctr"/>
           <a:lstStyle/>
           <a:p>
+            <a:pPr algn="ctr" indent="0" marL="0">
+              <a:buNone/>
+            </a:pPr>
+            <a:r>
+              <a:rPr lang="en-US" sz="2200" b="1" dirty="0">
+                <a:solidFill>
+                  <a:srgbClr val="FFFFFF"/>
+                </a:solidFill>
+                <a:latin typeface="Times New Roman" pitchFamily="34" charset="0"/>
+                <a:ea typeface="Times New Roman" pitchFamily="34" charset="-122"/>
+                <a:cs typeface="Times New Roman" pitchFamily="34" charset="-120"/>
+              </a:rPr>
+              <a:t>2</a:t>
+            </a:r>
+            <a:endParaRPr lang="en-US" sz="2200" dirty="0"/>
+          </a:p>
+        </p:txBody>
+      </p:sp>
+      <p:sp>
+        <p:nvSpPr>
+          <p:cNvPr id="12" name="Text 10"/>
+          <p:cNvSpPr/>
+          <p:nvPr/>
+        </p:nvSpPr>
+        <p:spPr>
+          <a:xfrm>
+            <a:off x="914400" y="4425696"/>
+            <a:ext cx="4754880" cy="777240"/>
+          </a:xfrm>
+          <a:prstGeom prst="rect">
+            <a:avLst/>
+          </a:prstGeom>
+          <a:noFill/>
+          <a:ln/>
+        </p:spPr>
+        <p:txBody>
+          <a:bodyPr wrap="square" lIns="0" tIns="0" rIns="0" bIns="0" rtlCol="0" anchor="ctr"/>
+          <a:lstStyle/>
+          <a:p>
             <a:pPr indent="0" marL="0">
               <a:buNone/>
             </a:pPr>
             <a:r>
-              <a:rPr lang="en-US" sz="1800" b="1" dirty="0">
+              <a:rPr lang="en-US" sz="1600" b="1" dirty="0">
                 <a:solidFill>
                   <a:srgbClr val="20262D"/>
                 </a:solidFill>
@@ -2924,20 +2975,20 @@
               </a:rPr>
               <a:t>Battery degradation, visible early</a:t>
             </a:r>
-            <a:endParaRPr lang="en-US" sz="1800" dirty="0"/>
-          </a:p>
-        </p:txBody>
-      </p:sp>
-      <p:sp>
-        <p:nvSpPr>
-          <p:cNvPr id="11" name="Text 9"/>
-          <p:cNvSpPr/>
-          <p:nvPr/>
-        </p:nvSpPr>
-        <p:spPr>
-          <a:xfrm>
-            <a:off x="2057400" y="3776472"/>
-            <a:ext cx="9509760" cy="822960"/>
+            <a:endParaRPr lang="en-US" sz="1600" dirty="0"/>
+          </a:p>
+        </p:txBody>
+      </p:sp>
+      <p:sp>
+        <p:nvSpPr>
+          <p:cNvPr id="13" name="Text 11"/>
+          <p:cNvSpPr/>
+          <p:nvPr/>
+        </p:nvSpPr>
+        <p:spPr>
+          <a:xfrm>
+            <a:off x="914400" y="5184648"/>
+            <a:ext cx="4754880" cy="640080"/>
           </a:xfrm>
           <a:prstGeom prst="rect">
             <a:avLst/>
@@ -2950,10 +3001,13 @@
           <a:lstStyle/>
           <a:p>
             <a:pPr indent="0" marL="0">
-              <a:buNone/>
-            </a:pPr>
-            <a:r>
-              <a:rPr lang="en-US" sz="1350" dirty="0">
+              <a:lnSpc>
+                <a:spcPct val="106000"/>
+              </a:lnSpc>
+              <a:buNone/>
+            </a:pPr>
+            <a:r>
+              <a:rPr lang="en-US" sz="1250" dirty="0">
                 <a:solidFill>
                   <a:srgbClr val="626E78"/>
                 </a:solidFill>
@@ -2963,65 +3017,30 @@
               </a:rPr>
               <a:t>The battery telemetry shows the slow decline a periodic check misses, and an alert raises when a robot crosses its threshold.</a:t>
             </a:r>
-            <a:endParaRPr lang="en-US" sz="1350" dirty="0"/>
-          </a:p>
-        </p:txBody>
-      </p:sp>
-      <p:sp>
-        <p:nvSpPr>
-          <p:cNvPr id="12" name="Text 10"/>
-          <p:cNvSpPr/>
-          <p:nvPr/>
-        </p:nvSpPr>
-        <p:spPr>
-          <a:xfrm>
-            <a:off x="640080" y="4663440"/>
-            <a:ext cx="1097280" cy="1097280"/>
-          </a:xfrm>
-          <a:prstGeom prst="rect">
-            <a:avLst/>
-          </a:prstGeom>
-          <a:noFill/>
-          <a:ln/>
-        </p:spPr>
-        <p:txBody>
-          <a:bodyPr wrap="square" lIns="0" tIns="0" rIns="0" bIns="0" rtlCol="0" anchor="ctr"/>
-          <a:lstStyle/>
-          <a:p>
-            <a:pPr indent="0" marL="0">
-              <a:buNone/>
-            </a:pPr>
-            <a:r>
-              <a:rPr lang="en-US" sz="5400" b="1" dirty="0">
-                <a:solidFill>
-                  <a:srgbClr val="EEF1F4"/>
-                </a:solidFill>
-                <a:latin typeface="Times New Roman" pitchFamily="34" charset="0"/>
-                <a:ea typeface="Times New Roman" pitchFamily="34" charset="-122"/>
-                <a:cs typeface="Times New Roman" pitchFamily="34" charset="-120"/>
-              </a:rPr>
-              <a:t>3</a:t>
-            </a:r>
-            <a:endParaRPr lang="en-US" sz="5400" dirty="0"/>
-          </a:p>
-        </p:txBody>
-      </p:sp>
-      <p:sp>
-        <p:nvSpPr>
-          <p:cNvPr id="13" name="Shape 11"/>
-          <p:cNvSpPr/>
-          <p:nvPr/>
-        </p:nvSpPr>
-        <p:spPr>
-          <a:xfrm>
-            <a:off x="1828800" y="4846320"/>
-            <a:ext cx="0" cy="1051560"/>
-          </a:xfrm>
-          <a:prstGeom prst="line">
-            <a:avLst/>
-          </a:prstGeom>
-          <a:noFill/>
-          <a:ln w="25400">
+            <a:endParaRPr lang="en-US" sz="1250" dirty="0"/>
+          </a:p>
+        </p:txBody>
+      </p:sp>
+      <p:sp>
+        <p:nvSpPr>
+          <p:cNvPr id="14" name="Shape 12"/>
+          <p:cNvSpPr/>
+          <p:nvPr/>
+        </p:nvSpPr>
+        <p:spPr>
+          <a:xfrm>
+            <a:off x="6217920" y="3401568"/>
+            <a:ext cx="5303520" cy="2606040"/>
+          </a:xfrm>
+          <a:prstGeom prst="roundRect">
+            <a:avLst>
+              <a:gd name="adj" fmla="val 3509"/>
+            </a:avLst>
+          </a:prstGeom>
+          <a:solidFill>
+            <a:srgbClr val="EEF1F4"/>
+          </a:solidFill>
+          <a:ln w="15240">
             <a:solidFill>
               <a:srgbClr val="4C6579"/>
             </a:solidFill>
@@ -3031,14 +3050,34 @@
       </p:sp>
       <p:sp>
         <p:nvSpPr>
-          <p:cNvPr id="14" name="Text 12"/>
-          <p:cNvSpPr/>
-          <p:nvPr/>
-        </p:nvSpPr>
-        <p:spPr>
-          <a:xfrm>
-            <a:off x="2057400" y="4800600"/>
-            <a:ext cx="9509760" cy="411480"/>
+          <p:cNvPr id="15" name="Shape 13"/>
+          <p:cNvSpPr/>
+          <p:nvPr/>
+        </p:nvSpPr>
+        <p:spPr>
+          <a:xfrm>
+            <a:off x="6492240" y="3675888"/>
+            <a:ext cx="603504" cy="603504"/>
+          </a:xfrm>
+          <a:prstGeom prst="ellipse">
+            <a:avLst/>
+          </a:prstGeom>
+          <a:solidFill>
+            <a:srgbClr val="33414F"/>
+          </a:solidFill>
+          <a:ln/>
+        </p:spPr>
+      </p:sp>
+      <p:sp>
+        <p:nvSpPr>
+          <p:cNvPr id="16" name="Text 14"/>
+          <p:cNvSpPr/>
+          <p:nvPr/>
+        </p:nvSpPr>
+        <p:spPr>
+          <a:xfrm>
+            <a:off x="6492240" y="3675888"/>
+            <a:ext cx="603504" cy="603504"/>
           </a:xfrm>
           <a:prstGeom prst="rect">
             <a:avLst/>
@@ -3050,11 +3089,50 @@
           <a:bodyPr wrap="square" lIns="0" tIns="0" rIns="0" bIns="0" rtlCol="0" anchor="ctr"/>
           <a:lstStyle/>
           <a:p>
+            <a:pPr algn="ctr" indent="0" marL="0">
+              <a:buNone/>
+            </a:pPr>
+            <a:r>
+              <a:rPr lang="en-US" sz="2200" b="1" dirty="0">
+                <a:solidFill>
+                  <a:srgbClr val="FFFFFF"/>
+                </a:solidFill>
+                <a:latin typeface="Times New Roman" pitchFamily="34" charset="0"/>
+                <a:ea typeface="Times New Roman" pitchFamily="34" charset="-122"/>
+                <a:cs typeface="Times New Roman" pitchFamily="34" charset="-120"/>
+              </a:rPr>
+              <a:t>3</a:t>
+            </a:r>
+            <a:endParaRPr lang="en-US" sz="2200" dirty="0"/>
+          </a:p>
+        </p:txBody>
+      </p:sp>
+      <p:sp>
+        <p:nvSpPr>
+          <p:cNvPr id="17" name="Text 15"/>
+          <p:cNvSpPr/>
+          <p:nvPr/>
+        </p:nvSpPr>
+        <p:spPr>
+          <a:xfrm>
+            <a:off x="6492240" y="4425696"/>
+            <a:ext cx="4754880" cy="777240"/>
+          </a:xfrm>
+          <a:prstGeom prst="rect">
+            <a:avLst/>
+          </a:prstGeom>
+          <a:noFill/>
+          <a:ln/>
+        </p:spPr>
+        <p:txBody>
+          <a:bodyPr wrap="square" lIns="0" tIns="0" rIns="0" bIns="0" rtlCol="0" anchor="ctr"/>
+          <a:lstStyle/>
+          <a:p>
             <a:pPr indent="0" marL="0">
               <a:buNone/>
             </a:pPr>
             <a:r>
-              <a:rPr lang="en-US" sz="1800" b="1" dirty="0">
+              <a:rPr lang="en-US" sz="1600" b="1" dirty="0">
                 <a:solidFill>
                   <a:srgbClr val="20262D"/>
                 </a:solidFill>
@@ -3064,20 +3142,20 @@
               </a:rPr>
               <a:t>Provisioned by one command</a:t>
             </a:r>
-            <a:endParaRPr lang="en-US" sz="1800" dirty="0"/>
-          </a:p>
-        </p:txBody>
-      </p:sp>
-      <p:sp>
-        <p:nvSpPr>
-          <p:cNvPr id="15" name="Text 13"/>
-          <p:cNvSpPr/>
-          <p:nvPr/>
-        </p:nvSpPr>
-        <p:spPr>
-          <a:xfrm>
-            <a:off x="2057400" y="5239512"/>
-            <a:ext cx="9509760" cy="822960"/>
+            <a:endParaRPr lang="en-US" sz="1600" dirty="0"/>
+          </a:p>
+        </p:txBody>
+      </p:sp>
+      <p:sp>
+        <p:nvSpPr>
+          <p:cNvPr id="18" name="Text 16"/>
+          <p:cNvSpPr/>
+          <p:nvPr/>
+        </p:nvSpPr>
+        <p:spPr>
+          <a:xfrm>
+            <a:off x="6492240" y="5184648"/>
+            <a:ext cx="4754880" cy="640080"/>
           </a:xfrm>
           <a:prstGeom prst="rect">
             <a:avLst/>
@@ -3090,10 +3168,13 @@
           <a:lstStyle/>
           <a:p>
             <a:pPr indent="0" marL="0">
-              <a:buNone/>
-            </a:pPr>
-            <a:r>
-              <a:rPr lang="en-US" sz="1350" dirty="0">
+              <a:lnSpc>
+                <a:spcPct val="106000"/>
+              </a:lnSpc>
+              <a:buNone/>
+            </a:pPr>
+            <a:r>
+              <a:rPr lang="en-US" sz="1250" dirty="0">
                 <a:solidFill>
                   <a:srgbClr val="626E78"/>
                 </a:solidFill>
@@ -3103,46 +3184,7 @@
               </a:rPr>
               <a:t>Every resource behind this board came from a single Terraform apply — twenty-four resources, nothing clicked by hand.</a:t>
             </a:r>
-            <a:endParaRPr lang="en-US" sz="1350" dirty="0"/>
-          </a:p>
-        </p:txBody>
-      </p:sp>
-      <p:sp>
-        <p:nvSpPr>
-          <p:cNvPr id="16" name="Text 14"/>
-          <p:cNvSpPr/>
-          <p:nvPr/>
-        </p:nvSpPr>
-        <p:spPr>
-          <a:xfrm>
-            <a:off x="640080" y="6309360"/>
-            <a:ext cx="10972800" cy="365760"/>
-          </a:xfrm>
-          <a:prstGeom prst="rect">
-            <a:avLst/>
-          </a:prstGeom>
-          <a:noFill/>
-          <a:ln/>
-        </p:spPr>
-        <p:txBody>
-          <a:bodyPr wrap="square" rtlCol="0" anchor="ctr"/>
-          <a:lstStyle/>
-          <a:p>
-            <a:pPr indent="0" marL="0">
-              <a:buNone/>
-            </a:pPr>
-            <a:r>
-              <a:rPr lang="en-US" sz="1300" i="1" dirty="0">
-                <a:solidFill>
-                  <a:srgbClr val="74889A"/>
-                </a:solidFill>
-                <a:latin typeface="Calibri" pitchFamily="34" charset="0"/>
-                <a:ea typeface="Calibri" pitchFamily="34" charset="-122"/>
-                <a:cs typeface="Calibri" pitchFamily="34" charset="-120"/>
-              </a:rPr>
-              <a:t>Switch to the live dashboard here — backup video ready.</a:t>
-            </a:r>
-            <a:endParaRPr lang="en-US" sz="1300" dirty="0"/>
+            <a:endParaRPr lang="en-US" sz="1250" dirty="0"/>
           </a:p>
         </p:txBody>
       </p:sp>

--- a/ppt/GouthamUppu_X25167936_warehouse-robotics-fleet.pptx
+++ b/ppt/GouthamUppu_X25167936_warehouse-robotics-fleet.pptx
@@ -1124,7 +1124,7 @@
     <p:bg>
       <p:bgPr>
         <a:solidFill>
-          <a:srgbClr val="20242B"/>
+          <a:srgbClr val="FFFFFF"/>
         </a:solidFill>
       </p:bgPr>
     </p:bg>
@@ -1270,7 +1270,7 @@
             <a:r>
               <a:rPr lang="en-US" sz="2000" dirty="0">
                 <a:solidFill>
-                  <a:srgbClr val="D2DBE2"/>
+                  <a:srgbClr val="20262D"/>
                 </a:solidFill>
                 <a:latin typeface="Calibri" pitchFamily="34" charset="0"/>
                 <a:ea typeface="Calibri" pitchFamily="34" charset="-122"/>
@@ -1299,14 +1299,9 @@
             </a:avLst>
           </a:prstGeom>
           <a:solidFill>
-            <a:srgbClr val="262C34"/>
-          </a:solidFill>
-          <a:ln w="12700">
-            <a:solidFill>
-              <a:srgbClr val="EC7A2E"/>
-            </a:solidFill>
-            <a:prstDash val="solid"/>
-          </a:ln>
+            <a:srgbClr val="74889A"/>
+          </a:solidFill>
+          <a:ln/>
         </p:spPr>
       </p:sp>
       <p:sp>
@@ -1336,7 +1331,7 @@
             <a:r>
               <a:rPr lang="en-US" sz="1350" b="1" dirty="0">
                 <a:solidFill>
-                  <a:srgbClr val="EC7A2E"/>
+                  <a:srgbClr val="FFFFFF"/>
                 </a:solidFill>
                 <a:latin typeface="Calibri" pitchFamily="34" charset="0"/>
                 <a:ea typeface="Calibri" pitchFamily="34" charset="-122"/>
@@ -1356,7 +1351,7 @@
         </p:nvSpPr>
         <p:spPr>
           <a:xfrm>
-            <a:off x="548640" y="4709160"/>
+            <a:off x="548640" y="4681728"/>
             <a:ext cx="2926080" cy="566928"/>
           </a:xfrm>
           <a:prstGeom prst="roundRect">
@@ -1365,14 +1360,9 @@
             </a:avLst>
           </a:prstGeom>
           <a:solidFill>
-            <a:srgbClr val="262C34"/>
-          </a:solidFill>
-          <a:ln w="12700">
-            <a:solidFill>
-              <a:srgbClr val="EC7A2E"/>
-            </a:solidFill>
-            <a:prstDash val="solid"/>
-          </a:ln>
+            <a:srgbClr val="74889A"/>
+          </a:solidFill>
+          <a:ln/>
         </p:spPr>
       </p:sp>
       <p:sp>
@@ -1383,7 +1373,7 @@
         </p:nvSpPr>
         <p:spPr>
           <a:xfrm>
-            <a:off x="548640" y="4709160"/>
+            <a:off x="548640" y="4681728"/>
             <a:ext cx="2926080" cy="566928"/>
           </a:xfrm>
           <a:prstGeom prst="rect">
@@ -1402,7 +1392,7 @@
             <a:r>
               <a:rPr lang="en-US" sz="1350" b="1" dirty="0">
                 <a:solidFill>
-                  <a:srgbClr val="EC7A2E"/>
+                  <a:srgbClr val="FFFFFF"/>
                 </a:solidFill>
                 <a:latin typeface="Calibri" pitchFamily="34" charset="0"/>
                 <a:ea typeface="Calibri" pitchFamily="34" charset="-122"/>
@@ -1422,7 +1412,7 @@
         </p:nvSpPr>
         <p:spPr>
           <a:xfrm>
-            <a:off x="548640" y="5394960"/>
+            <a:off x="548640" y="5340096"/>
             <a:ext cx="2926080" cy="566928"/>
           </a:xfrm>
           <a:prstGeom prst="roundRect">
@@ -1431,14 +1421,9 @@
             </a:avLst>
           </a:prstGeom>
           <a:solidFill>
-            <a:srgbClr val="262C34"/>
-          </a:solidFill>
-          <a:ln w="12700">
-            <a:solidFill>
-              <a:srgbClr val="EC7A2E"/>
-            </a:solidFill>
-            <a:prstDash val="solid"/>
-          </a:ln>
+            <a:srgbClr val="74889A"/>
+          </a:solidFill>
+          <a:ln/>
         </p:spPr>
       </p:sp>
       <p:sp>
@@ -1449,7 +1434,7 @@
         </p:nvSpPr>
         <p:spPr>
           <a:xfrm>
-            <a:off x="548640" y="5394960"/>
+            <a:off x="548640" y="5340096"/>
             <a:ext cx="2926080" cy="566928"/>
           </a:xfrm>
           <a:prstGeom prst="rect">
@@ -1468,7 +1453,7 @@
             <a:r>
               <a:rPr lang="en-US" sz="1350" b="1" dirty="0">
                 <a:solidFill>
-                  <a:srgbClr val="EC7A2E"/>
+                  <a:srgbClr val="FFFFFF"/>
                 </a:solidFill>
                 <a:latin typeface="Calibri" pitchFamily="34" charset="0"/>
                 <a:ea typeface="Calibri" pitchFamily="34" charset="-122"/>
@@ -1504,17 +1489,6 @@
             <a:pPr indent="0" marL="0">
               <a:buNone/>
             </a:pPr>
-            <a:r>
-              <a:rPr lang="en-US" sz="1250" dirty="0">
-                <a:solidFill>
-                  <a:srgbClr val="626E78"/>
-                </a:solidFill>
-                <a:latin typeface="Calibri" pitchFamily="34" charset="0"/>
-                <a:ea typeface="Calibri" pitchFamily="34" charset="-122"/>
-                <a:cs typeface="Calibri" pitchFamily="34" charset="-120"/>
-              </a:rPr>
-              <a:t>Fog &amp; Edge Computing (H9FECC)   ·   deployed live on AWS</a:t>
-            </a:r>
             <a:endParaRPr lang="en-US" sz="1250" dirty="0"/>
           </a:p>
         </p:txBody>

--- a/ppt/GouthamUppu_X25167936_warehouse-robotics-fleet.pptx
+++ b/ppt/GouthamUppu_X25167936_warehouse-robotics-fleet.pptx
@@ -1124,7 +1124,7 @@
     <p:bg>
       <p:bgPr>
         <a:solidFill>
-          <a:srgbClr val="FFFFFF"/>
+          <a:srgbClr val="05070A"/>
         </a:solidFill>
       </p:bgPr>
     </p:bg>
@@ -1150,28 +1150,54 @@
         </p:nvSpPr>
         <p:spPr>
           <a:xfrm>
-            <a:off x="7528255" y="0"/>
-            <a:ext cx="4663440" cy="6858000"/>
-          </a:xfrm>
-          <a:prstGeom prst="rect">
-            <a:avLst/>
-          </a:prstGeom>
-          <a:solidFill>
-            <a:srgbClr val="33414F"/>
-          </a:solidFill>
-          <a:ln/>
-        </p:spPr>
-      </p:sp>
-      <p:sp>
-        <p:nvSpPr>
-          <p:cNvPr id="3" name="Text 1"/>
-          <p:cNvSpPr/>
-          <p:nvPr/>
-        </p:nvSpPr>
-        <p:spPr>
-          <a:xfrm>
-            <a:off x="7939735" y="1280160"/>
-            <a:ext cx="3749040" cy="2377440"/>
+            <a:off x="457200" y="548640"/>
+            <a:ext cx="0" cy="5760720"/>
+          </a:xfrm>
+          <a:prstGeom prst="line">
+            <a:avLst/>
+          </a:prstGeom>
+          <a:noFill/>
+          <a:ln w="31750">
+            <a:solidFill>
+              <a:srgbClr val="FF8A1E"/>
+            </a:solidFill>
+            <a:prstDash val="solid"/>
+          </a:ln>
+        </p:spPr>
+      </p:sp>
+      <p:sp>
+        <p:nvSpPr>
+          <p:cNvPr id="3" name="Shape 1"/>
+          <p:cNvSpPr/>
+          <p:nvPr/>
+        </p:nvSpPr>
+        <p:spPr>
+          <a:xfrm>
+            <a:off x="11734495" y="548640"/>
+            <a:ext cx="0" cy="5760720"/>
+          </a:xfrm>
+          <a:prstGeom prst="line">
+            <a:avLst/>
+          </a:prstGeom>
+          <a:noFill/>
+          <a:ln w="31750">
+            <a:solidFill>
+              <a:srgbClr val="FF8A1E"/>
+            </a:solidFill>
+            <a:prstDash val="solid"/>
+          </a:ln>
+        </p:spPr>
+      </p:sp>
+      <p:sp>
+        <p:nvSpPr>
+          <p:cNvPr id="4" name="Text 2"/>
+          <p:cNvSpPr/>
+          <p:nvPr/>
+        </p:nvSpPr>
+        <p:spPr>
+          <a:xfrm>
+            <a:off x="896112" y="1645920"/>
+            <a:ext cx="10362895" cy="1645920"/>
           </a:xfrm>
           <a:prstGeom prst="rect">
             <a:avLst/>
@@ -1184,33 +1210,36 @@
           <a:lstStyle/>
           <a:p>
             <a:pPr indent="0" marL="0">
-              <a:buNone/>
-            </a:pPr>
-            <a:r>
-              <a:rPr lang="en-US" sz="3400" b="1" dirty="0">
-                <a:solidFill>
-                  <a:srgbClr val="FFFFFF"/>
-                </a:solidFill>
-                <a:latin typeface="Times New Roman" pitchFamily="34" charset="0"/>
-                <a:ea typeface="Times New Roman" pitchFamily="34" charset="-122"/>
-                <a:cs typeface="Times New Roman" pitchFamily="34" charset="-120"/>
+              <a:lnSpc>
+                <a:spcPct val="98000"/>
+              </a:lnSpc>
+              <a:buNone/>
+            </a:pPr>
+            <a:r>
+              <a:rPr lang="en-US" sz="3800" b="1" dirty="0">
+                <a:solidFill>
+                  <a:srgbClr val="E6EDF3"/>
+                </a:solidFill>
+                <a:latin typeface="Century Gothic" pitchFamily="34" charset="0"/>
+                <a:ea typeface="Century Gothic" pitchFamily="34" charset="-122"/>
+                <a:cs typeface="Century Gothic" pitchFamily="34" charset="-120"/>
               </a:rPr>
               <a:t>Warehouse Robotics Fleet Monitoring</a:t>
             </a:r>
-            <a:endParaRPr lang="en-US" sz="3400" dirty="0"/>
-          </a:p>
-        </p:txBody>
-      </p:sp>
-      <p:sp>
-        <p:nvSpPr>
-          <p:cNvPr id="4" name="Text 2"/>
-          <p:cNvSpPr/>
-          <p:nvPr/>
-        </p:nvSpPr>
-        <p:spPr>
-          <a:xfrm>
-            <a:off x="7958023" y="5394960"/>
-            <a:ext cx="3840480" cy="731520"/>
+            <a:endParaRPr lang="en-US" sz="3800" dirty="0"/>
+          </a:p>
+        </p:txBody>
+      </p:sp>
+      <p:sp>
+        <p:nvSpPr>
+          <p:cNvPr id="5" name="Text 3"/>
+          <p:cNvSpPr/>
+          <p:nvPr/>
+        </p:nvSpPr>
+        <p:spPr>
+          <a:xfrm>
+            <a:off x="914400" y="3337560"/>
+            <a:ext cx="10362895" cy="365760"/>
           </a:xfrm>
           <a:prstGeom prst="rect">
             <a:avLst/>
@@ -1226,9 +1255,9 @@
               <a:buNone/>
             </a:pPr>
             <a:r>
-              <a:rPr lang="en-US" sz="1500" dirty="0">
-                <a:solidFill>
-                  <a:srgbClr val="D2DBE2"/>
+              <a:rPr lang="en-US" sz="1450" dirty="0">
+                <a:solidFill>
+                  <a:srgbClr val="8B98A6"/>
                 </a:solidFill>
                 <a:latin typeface="Calibri" pitchFamily="34" charset="0"/>
                 <a:ea typeface="Calibri" pitchFamily="34" charset="-122"/>
@@ -1236,41 +1265,41 @@
               </a:rPr>
               <a:t>Goutham Uppu   ·   X25167936</a:t>
             </a:r>
-            <a:endParaRPr lang="en-US" sz="1500" dirty="0"/>
-          </a:p>
-        </p:txBody>
-      </p:sp>
-      <p:sp>
-        <p:nvSpPr>
-          <p:cNvPr id="5" name="Text 3"/>
-          <p:cNvSpPr/>
-          <p:nvPr/>
-        </p:nvSpPr>
-        <p:spPr>
-          <a:xfrm>
-            <a:off x="548640" y="1371600"/>
-            <a:ext cx="6492240" cy="2011680"/>
-          </a:xfrm>
-          <a:prstGeom prst="rect">
-            <a:avLst/>
-          </a:prstGeom>
-          <a:noFill/>
-          <a:ln/>
-        </p:spPr>
-        <p:txBody>
-          <a:bodyPr wrap="square" rtlCol="0" anchor="ctr"/>
+            <a:endParaRPr lang="en-US" sz="1450" dirty="0"/>
+          </a:p>
+        </p:txBody>
+      </p:sp>
+      <p:sp>
+        <p:nvSpPr>
+          <p:cNvPr id="6" name="Text 4"/>
+          <p:cNvSpPr/>
+          <p:nvPr/>
+        </p:nvSpPr>
+        <p:spPr>
+          <a:xfrm>
+            <a:off x="914400" y="3931920"/>
+            <a:ext cx="8138160" cy="1325880"/>
+          </a:xfrm>
+          <a:prstGeom prst="rect">
+            <a:avLst/>
+          </a:prstGeom>
+          <a:noFill/>
+          <a:ln/>
+        </p:spPr>
+        <p:txBody>
+          <a:bodyPr wrap="square" rtlCol="0" anchor="t"/>
           <a:lstStyle/>
           <a:p>
             <a:pPr indent="0" marL="0">
               <a:lnSpc>
-                <a:spcPct val="112000"/>
+                <a:spcPct val="130000"/>
               </a:lnSpc>
               <a:buNone/>
             </a:pPr>
             <a:r>
-              <a:rPr lang="en-US" sz="2000" dirty="0">
-                <a:solidFill>
-                  <a:srgbClr val="20262D"/>
+              <a:rPr lang="en-US" sz="1400" dirty="0">
+                <a:solidFill>
+                  <a:srgbClr val="E6EDF3"/>
                 </a:solidFill>
                 <a:latin typeface="Calibri" pitchFamily="34" charset="0"/>
                 <a:ea typeface="Calibri" pitchFamily="34" charset="-122"/>
@@ -1278,218 +1307,7 @@
               </a:rPr>
               <a:t>Ten robots ferry totes across two zones, and their condition changes faster than any inspection round — battery degradation shows in continuous telemetry long before outright failure.</a:t>
             </a:r>
-            <a:endParaRPr lang="en-US" sz="2000" dirty="0"/>
-          </a:p>
-        </p:txBody>
-      </p:sp>
-      <p:sp>
-        <p:nvSpPr>
-          <p:cNvPr id="6" name="Shape 4"/>
-          <p:cNvSpPr/>
-          <p:nvPr/>
-        </p:nvSpPr>
-        <p:spPr>
-          <a:xfrm>
-            <a:off x="548640" y="4023360"/>
-            <a:ext cx="2926080" cy="566928"/>
-          </a:xfrm>
-          <a:prstGeom prst="roundRect">
-            <a:avLst>
-              <a:gd name="adj" fmla="val 50000"/>
-            </a:avLst>
-          </a:prstGeom>
-          <a:solidFill>
-            <a:srgbClr val="74889A"/>
-          </a:solidFill>
-          <a:ln/>
-        </p:spPr>
-      </p:sp>
-      <p:sp>
-        <p:nvSpPr>
-          <p:cNvPr id="7" name="Text 5"/>
-          <p:cNvSpPr/>
-          <p:nvPr/>
-        </p:nvSpPr>
-        <p:spPr>
-          <a:xfrm>
-            <a:off x="548640" y="4023360"/>
-            <a:ext cx="2926080" cy="566928"/>
-          </a:xfrm>
-          <a:prstGeom prst="rect">
-            <a:avLst/>
-          </a:prstGeom>
-          <a:noFill/>
-          <a:ln/>
-        </p:spPr>
-        <p:txBody>
-          <a:bodyPr wrap="square" lIns="0" tIns="0" rIns="0" bIns="0" rtlCol="0" anchor="ctr"/>
-          <a:lstStyle/>
-          <a:p>
-            <a:pPr algn="ctr" indent="0" marL="0">
-              <a:buNone/>
-            </a:pPr>
-            <a:r>
-              <a:rPr lang="en-US" sz="1350" b="1" dirty="0">
-                <a:solidFill>
-                  <a:srgbClr val="FFFFFF"/>
-                </a:solidFill>
-                <a:latin typeface="Calibri" pitchFamily="34" charset="0"/>
-                <a:ea typeface="Calibri" pitchFamily="34" charset="-122"/>
-                <a:cs typeface="Calibri" pitchFamily="34" charset="-120"/>
-              </a:rPr>
-              <a:t>50 live signals</a:t>
-            </a:r>
-            <a:endParaRPr lang="en-US" sz="1350" dirty="0"/>
-          </a:p>
-        </p:txBody>
-      </p:sp>
-      <p:sp>
-        <p:nvSpPr>
-          <p:cNvPr id="8" name="Shape 6"/>
-          <p:cNvSpPr/>
-          <p:nvPr/>
-        </p:nvSpPr>
-        <p:spPr>
-          <a:xfrm>
-            <a:off x="548640" y="4681728"/>
-            <a:ext cx="2926080" cy="566928"/>
-          </a:xfrm>
-          <a:prstGeom prst="roundRect">
-            <a:avLst>
-              <a:gd name="adj" fmla="val 50000"/>
-            </a:avLst>
-          </a:prstGeom>
-          <a:solidFill>
-            <a:srgbClr val="74889A"/>
-          </a:solidFill>
-          <a:ln/>
-        </p:spPr>
-      </p:sp>
-      <p:sp>
-        <p:nvSpPr>
-          <p:cNvPr id="9" name="Text 7"/>
-          <p:cNvSpPr/>
-          <p:nvPr/>
-        </p:nvSpPr>
-        <p:spPr>
-          <a:xfrm>
-            <a:off x="548640" y="4681728"/>
-            <a:ext cx="2926080" cy="566928"/>
-          </a:xfrm>
-          <a:prstGeom prst="rect">
-            <a:avLst/>
-          </a:prstGeom>
-          <a:noFill/>
-          <a:ln/>
-        </p:spPr>
-        <p:txBody>
-          <a:bodyPr wrap="square" lIns="0" tIns="0" rIns="0" bIns="0" rtlCol="0" anchor="ctr"/>
-          <a:lstStyle/>
-          <a:p>
-            <a:pPr algn="ctr" indent="0" marL="0">
-              <a:buNone/>
-            </a:pPr>
-            <a:r>
-              <a:rPr lang="en-US" sz="1350" b="1" dirty="0">
-                <a:solidFill>
-                  <a:srgbClr val="FFFFFF"/>
-                </a:solidFill>
-                <a:latin typeface="Calibri" pitchFamily="34" charset="0"/>
-                <a:ea typeface="Calibri" pitchFamily="34" charset="-122"/>
-                <a:cs typeface="Calibri" pitchFamily="34" charset="-120"/>
-              </a:rPr>
-              <a:t>10 robots · 2 zones</a:t>
-            </a:r>
-            <a:endParaRPr lang="en-US" sz="1350" dirty="0"/>
-          </a:p>
-        </p:txBody>
-      </p:sp>
-      <p:sp>
-        <p:nvSpPr>
-          <p:cNvPr id="10" name="Shape 8"/>
-          <p:cNvSpPr/>
-          <p:nvPr/>
-        </p:nvSpPr>
-        <p:spPr>
-          <a:xfrm>
-            <a:off x="548640" y="5340096"/>
-            <a:ext cx="2926080" cy="566928"/>
-          </a:xfrm>
-          <a:prstGeom prst="roundRect">
-            <a:avLst>
-              <a:gd name="adj" fmla="val 50000"/>
-            </a:avLst>
-          </a:prstGeom>
-          <a:solidFill>
-            <a:srgbClr val="74889A"/>
-          </a:solidFill>
-          <a:ln/>
-        </p:spPr>
-      </p:sp>
-      <p:sp>
-        <p:nvSpPr>
-          <p:cNvPr id="11" name="Text 9"/>
-          <p:cNvSpPr/>
-          <p:nvPr/>
-        </p:nvSpPr>
-        <p:spPr>
-          <a:xfrm>
-            <a:off x="548640" y="5340096"/>
-            <a:ext cx="2926080" cy="566928"/>
-          </a:xfrm>
-          <a:prstGeom prst="rect">
-            <a:avLst/>
-          </a:prstGeom>
-          <a:noFill/>
-          <a:ln/>
-        </p:spPr>
-        <p:txBody>
-          <a:bodyPr wrap="square" lIns="0" tIns="0" rIns="0" bIns="0" rtlCol="0" anchor="ctr"/>
-          <a:lstStyle/>
-          <a:p>
-            <a:pPr algn="ctr" indent="0" marL="0">
-              <a:buNone/>
-            </a:pPr>
-            <a:r>
-              <a:rPr lang="en-US" sz="1350" b="1" dirty="0">
-                <a:solidFill>
-                  <a:srgbClr val="FFFFFF"/>
-                </a:solidFill>
-                <a:latin typeface="Calibri" pitchFamily="34" charset="0"/>
-                <a:ea typeface="Calibri" pitchFamily="34" charset="-122"/>
-                <a:cs typeface="Calibri" pitchFamily="34" charset="-120"/>
-              </a:rPr>
-              <a:t>edge thresholds</a:t>
-            </a:r>
-            <a:endParaRPr lang="en-US" sz="1350" dirty="0"/>
-          </a:p>
-        </p:txBody>
-      </p:sp>
-      <p:sp>
-        <p:nvSpPr>
-          <p:cNvPr id="12" name="Text 10"/>
-          <p:cNvSpPr/>
-          <p:nvPr/>
-        </p:nvSpPr>
-        <p:spPr>
-          <a:xfrm>
-            <a:off x="548640" y="6172200"/>
-            <a:ext cx="6217920" cy="365760"/>
-          </a:xfrm>
-          <a:prstGeom prst="rect">
-            <a:avLst/>
-          </a:prstGeom>
-          <a:noFill/>
-          <a:ln/>
-        </p:spPr>
-        <p:txBody>
-          <a:bodyPr wrap="square" rtlCol="0" anchor="ctr"/>
-          <a:lstStyle/>
-          <a:p>
-            <a:pPr indent="0" marL="0">
-              <a:buNone/>
-            </a:pPr>
-            <a:endParaRPr lang="en-US" sz="1250" dirty="0"/>
+            <a:endParaRPr lang="en-US" sz="1400" dirty="0"/>
           </a:p>
         </p:txBody>
       </p:sp>
@@ -1507,7 +1325,7 @@
     <p:bg>
       <p:bgPr>
         <a:solidFill>
-          <a:srgbClr val="FFFFFF"/>
+          <a:srgbClr val="05070A"/>
         </a:solidFill>
       </p:bgPr>
     </p:bg>
@@ -1527,65 +1345,22 @@
       </p:grpSpPr>
       <p:sp>
         <p:nvSpPr>
-          <p:cNvPr id="2" name="Text 0"/>
-          <p:cNvSpPr/>
-          <p:nvPr/>
-        </p:nvSpPr>
-        <p:spPr>
-          <a:xfrm>
-            <a:off x="640080" y="457200"/>
-            <a:ext cx="10972800" cy="640080"/>
-          </a:xfrm>
-          <a:prstGeom prst="rect">
-            <a:avLst/>
-          </a:prstGeom>
-          <a:noFill/>
-          <a:ln/>
-        </p:spPr>
-        <p:txBody>
-          <a:bodyPr wrap="square" rtlCol="0" anchor="ctr"/>
-          <a:lstStyle/>
-          <a:p>
-            <a:pPr indent="0" marL="0">
-              <a:buNone/>
-            </a:pPr>
-            <a:r>
-              <a:rPr lang="en-US" sz="3000" b="1" dirty="0">
-                <a:solidFill>
-                  <a:srgbClr val="20262D"/>
-                </a:solidFill>
-                <a:latin typeface="Times New Roman" pitchFamily="34" charset="0"/>
-                <a:ea typeface="Times New Roman" pitchFamily="34" charset="-122"/>
-                <a:cs typeface="Times New Roman" pitchFamily="34" charset="-120"/>
-              </a:rPr>
-              <a:t>What I Built — Robot to Cloud</a:t>
-            </a:r>
-            <a:endParaRPr lang="en-US" sz="3000" dirty="0"/>
-          </a:p>
-        </p:txBody>
-      </p:sp>
-      <p:sp>
-        <p:nvSpPr>
-          <p:cNvPr id="3" name="Shape 1"/>
-          <p:cNvSpPr/>
-          <p:nvPr/>
-        </p:nvSpPr>
-        <p:spPr>
-          <a:xfrm>
-            <a:off x="3992728" y="1234440"/>
-            <a:ext cx="4206240" cy="658368"/>
-          </a:xfrm>
-          <a:prstGeom prst="roundRect">
-            <a:avLst>
-              <a:gd name="adj" fmla="val 11111"/>
-            </a:avLst>
-          </a:prstGeom>
-          <a:solidFill>
-            <a:srgbClr val="EEF1F4"/>
-          </a:solidFill>
-          <a:ln w="17780">
+          <p:cNvPr id="2" name="Shape 0"/>
+          <p:cNvSpPr/>
+          <p:nvPr/>
+        </p:nvSpPr>
+        <p:spPr>
+          <a:xfrm>
+            <a:off x="457200" y="548640"/>
+            <a:ext cx="0" cy="5760720"/>
+          </a:xfrm>
+          <a:prstGeom prst="line">
+            <a:avLst/>
+          </a:prstGeom>
+          <a:noFill/>
+          <a:ln w="31750">
             <a:solidFill>
-              <a:srgbClr val="74889A"/>
+              <a:srgbClr val="FF8A1E"/>
             </a:solidFill>
             <a:prstDash val="solid"/>
           </a:ln>
@@ -1593,23 +1368,65 @@
       </p:sp>
       <p:sp>
         <p:nvSpPr>
-          <p:cNvPr id="4" name="Shape 2"/>
-          <p:cNvSpPr/>
-          <p:nvPr/>
-        </p:nvSpPr>
-        <p:spPr>
-          <a:xfrm>
-            <a:off x="4193896" y="1481328"/>
-            <a:ext cx="164592" cy="164592"/>
-          </a:xfrm>
-          <a:prstGeom prst="ellipse">
-            <a:avLst/>
-          </a:prstGeom>
-          <a:solidFill>
-            <a:srgbClr val="74889A"/>
-          </a:solidFill>
-          <a:ln/>
-        </p:spPr>
+          <p:cNvPr id="3" name="Shape 1"/>
+          <p:cNvSpPr/>
+          <p:nvPr/>
+        </p:nvSpPr>
+        <p:spPr>
+          <a:xfrm>
+            <a:off x="11734495" y="548640"/>
+            <a:ext cx="0" cy="5760720"/>
+          </a:xfrm>
+          <a:prstGeom prst="line">
+            <a:avLst/>
+          </a:prstGeom>
+          <a:noFill/>
+          <a:ln w="31750">
+            <a:solidFill>
+              <a:srgbClr val="FF8A1E"/>
+            </a:solidFill>
+            <a:prstDash val="solid"/>
+          </a:ln>
+        </p:spPr>
+      </p:sp>
+      <p:sp>
+        <p:nvSpPr>
+          <p:cNvPr id="4" name="Text 2"/>
+          <p:cNvSpPr/>
+          <p:nvPr/>
+        </p:nvSpPr>
+        <p:spPr>
+          <a:xfrm>
+            <a:off x="914400" y="731520"/>
+            <a:ext cx="914400" cy="640080"/>
+          </a:xfrm>
+          <a:prstGeom prst="rect">
+            <a:avLst/>
+          </a:prstGeom>
+          <a:noFill/>
+          <a:ln/>
+        </p:spPr>
+        <p:txBody>
+          <a:bodyPr wrap="square" lIns="0" tIns="0" rIns="0" bIns="0" rtlCol="0" anchor="ctr"/>
+          <a:lstStyle/>
+          <a:p>
+            <a:pPr indent="0" marL="0">
+              <a:buNone/>
+            </a:pPr>
+            <a:r>
+              <a:rPr lang="en-US" sz="3000" b="1" dirty="0">
+                <a:solidFill>
+                  <a:srgbClr val="FF8A1E"/>
+                </a:solidFill>
+                <a:latin typeface="Century Gothic" pitchFamily="34" charset="0"/>
+                <a:ea typeface="Century Gothic" pitchFamily="34" charset="-122"/>
+                <a:cs typeface="Century Gothic" pitchFamily="34" charset="-120"/>
+              </a:rPr>
+              <a:t>01</a:t>
+            </a:r>
+            <a:endParaRPr lang="en-US" sz="3000" dirty="0"/>
+          </a:p>
+        </p:txBody>
       </p:sp>
       <p:sp>
         <p:nvSpPr>
@@ -1619,8 +1436,8 @@
         </p:nvSpPr>
         <p:spPr>
           <a:xfrm>
-            <a:off x="4495648" y="1234440"/>
-            <a:ext cx="2194560" cy="658368"/>
+            <a:off x="1783080" y="905256"/>
+            <a:ext cx="9494215" cy="274320"/>
           </a:xfrm>
           <a:prstGeom prst="rect">
             <a:avLst/>
@@ -1636,30 +1453,175 @@
               <a:buNone/>
             </a:pPr>
             <a:r>
-              <a:rPr lang="en-US" sz="1350" b="1" dirty="0">
-                <a:solidFill>
-                  <a:srgbClr val="20262D"/>
+              <a:rPr lang="en-US" sz="1100" b="1" spc="200" kern="0" dirty="0">
+                <a:solidFill>
+                  <a:srgbClr val="8B98A6"/>
                 </a:solidFill>
                 <a:latin typeface="Calibri" pitchFamily="34" charset="0"/>
                 <a:ea typeface="Calibri" pitchFamily="34" charset="-122"/>
                 <a:cs typeface="Calibri" pitchFamily="34" charset="-120"/>
               </a:rPr>
+              <a:t>ARCHITECTURE</a:t>
+            </a:r>
+            <a:endParaRPr lang="en-US" sz="1100" dirty="0"/>
+          </a:p>
+        </p:txBody>
+      </p:sp>
+      <p:sp>
+        <p:nvSpPr>
+          <p:cNvPr id="6" name="Text 4"/>
+          <p:cNvSpPr/>
+          <p:nvPr/>
+        </p:nvSpPr>
+        <p:spPr>
+          <a:xfrm>
+            <a:off x="914400" y="1380744"/>
+            <a:ext cx="10362895" cy="640080"/>
+          </a:xfrm>
+          <a:prstGeom prst="rect">
+            <a:avLst/>
+          </a:prstGeom>
+          <a:noFill/>
+          <a:ln/>
+        </p:spPr>
+        <p:txBody>
+          <a:bodyPr wrap="square" lIns="0" tIns="0" rIns="0" bIns="0" rtlCol="0" anchor="ctr"/>
+          <a:lstStyle/>
+          <a:p>
+            <a:pPr indent="0" marL="0">
+              <a:buNone/>
+            </a:pPr>
+            <a:r>
+              <a:rPr lang="en-US" sz="2300" b="1" dirty="0">
+                <a:solidFill>
+                  <a:srgbClr val="E6EDF3"/>
+                </a:solidFill>
+                <a:latin typeface="Century Gothic" pitchFamily="34" charset="0"/>
+                <a:ea typeface="Century Gothic" pitchFamily="34" charset="-122"/>
+                <a:cs typeface="Century Gothic" pitchFamily="34" charset="-120"/>
+              </a:rPr>
+              <a:t>What I Built — Robot to Cloud</a:t>
+            </a:r>
+            <a:endParaRPr lang="en-US" sz="2300" dirty="0"/>
+          </a:p>
+        </p:txBody>
+      </p:sp>
+      <p:sp>
+        <p:nvSpPr>
+          <p:cNvPr id="7" name="Shape 5"/>
+          <p:cNvSpPr/>
+          <p:nvPr/>
+        </p:nvSpPr>
+        <p:spPr>
+          <a:xfrm>
+            <a:off x="914400" y="2971800"/>
+            <a:ext cx="1346149" cy="1965960"/>
+          </a:xfrm>
+          <a:prstGeom prst="roundRect">
+            <a:avLst/>
+          </a:prstGeom>
+          <a:solidFill>
+            <a:srgbClr val="FF8A1E"/>
+          </a:solidFill>
+          <a:ln w="12700">
+            <a:solidFill>
+              <a:srgbClr val="FF8A1E"/>
+            </a:solidFill>
+            <a:prstDash val="solid"/>
+          </a:ln>
+        </p:spPr>
+      </p:sp>
+      <p:sp>
+        <p:nvSpPr>
+          <p:cNvPr id="8" name="Text 6"/>
+          <p:cNvSpPr/>
+          <p:nvPr/>
+        </p:nvSpPr>
+        <p:spPr>
+          <a:xfrm>
+            <a:off x="1060704" y="3154680"/>
+            <a:ext cx="1053541" cy="320040"/>
+          </a:xfrm>
+          <a:prstGeom prst="rect">
+            <a:avLst/>
+          </a:prstGeom>
+          <a:noFill/>
+          <a:ln/>
+        </p:spPr>
+        <p:txBody>
+          <a:bodyPr wrap="square" lIns="0" tIns="0" rIns="0" bIns="0" rtlCol="0" anchor="ctr"/>
+          <a:lstStyle/>
+          <a:p>
+            <a:pPr indent="0" marL="0">
+              <a:buNone/>
+            </a:pPr>
+            <a:r>
+              <a:rPr lang="en-US" sz="1100" dirty="0">
+                <a:solidFill>
+                  <a:srgbClr val="111111"/>
+                </a:solidFill>
+                <a:latin typeface="Consolas" pitchFamily="34" charset="0"/>
+                <a:ea typeface="Consolas" pitchFamily="34" charset="-122"/>
+                <a:cs typeface="Consolas" pitchFamily="34" charset="-120"/>
+              </a:rPr>
+              <a:t>01</a:t>
+            </a:r>
+            <a:endParaRPr lang="en-US" sz="1100" dirty="0"/>
+          </a:p>
+        </p:txBody>
+      </p:sp>
+      <p:sp>
+        <p:nvSpPr>
+          <p:cNvPr id="9" name="Text 7"/>
+          <p:cNvSpPr/>
+          <p:nvPr/>
+        </p:nvSpPr>
+        <p:spPr>
+          <a:xfrm>
+            <a:off x="1060704" y="3593592"/>
+            <a:ext cx="1053541" cy="868680"/>
+          </a:xfrm>
+          <a:prstGeom prst="rect">
+            <a:avLst/>
+          </a:prstGeom>
+          <a:noFill/>
+          <a:ln/>
+        </p:spPr>
+        <p:txBody>
+          <a:bodyPr wrap="square" lIns="0" tIns="0" rIns="0" bIns="0" rtlCol="0" anchor="t"/>
+          <a:lstStyle/>
+          <a:p>
+            <a:pPr indent="0" marL="0">
+              <a:lnSpc>
+                <a:spcPct val="96000"/>
+              </a:lnSpc>
+              <a:buNone/>
+            </a:pPr>
+            <a:r>
+              <a:rPr lang="en-US" sz="1300" b="1" dirty="0">
+                <a:solidFill>
+                  <a:srgbClr val="111111"/>
+                </a:solidFill>
+                <a:latin typeface="Century Gothic" pitchFamily="34" charset="0"/>
+                <a:ea typeface="Century Gothic" pitchFamily="34" charset="-122"/>
+                <a:cs typeface="Century Gothic" pitchFamily="34" charset="-120"/>
+              </a:rPr>
               <a:t>Robot sensors</a:t>
             </a:r>
-            <a:endParaRPr lang="en-US" sz="1350" dirty="0"/>
-          </a:p>
-        </p:txBody>
-      </p:sp>
-      <p:sp>
-        <p:nvSpPr>
-          <p:cNvPr id="6" name="Text 4"/>
-          <p:cNvSpPr/>
-          <p:nvPr/>
-        </p:nvSpPr>
-        <p:spPr>
-          <a:xfrm>
-            <a:off x="6644488" y="1234440"/>
-            <a:ext cx="1463040" cy="658368"/>
+            <a:endParaRPr lang="en-US" sz="1300" dirty="0"/>
+          </a:p>
+        </p:txBody>
+      </p:sp>
+      <p:sp>
+        <p:nvSpPr>
+          <p:cNvPr id="10" name="Text 8"/>
+          <p:cNvSpPr/>
+          <p:nvPr/>
+        </p:nvSpPr>
+        <p:spPr>
+          <a:xfrm>
+            <a:off x="1060704" y="4453128"/>
+            <a:ext cx="1053541" cy="365760"/>
           </a:xfrm>
           <a:prstGeom prst="rect">
             <a:avLst/>
@@ -1671,13 +1633,13 @@
           <a:bodyPr wrap="square" lIns="0" tIns="0" rIns="0" bIns="0" rtlCol="0" anchor="ctr"/>
           <a:lstStyle/>
           <a:p>
-            <a:pPr algn="r" indent="0" marL="0">
-              <a:buNone/>
-            </a:pPr>
-            <a:r>
-              <a:rPr lang="en-US" sz="950" dirty="0">
-                <a:solidFill>
-                  <a:srgbClr val="626E78"/>
+            <a:pPr indent="0" marL="0">
+              <a:buNone/>
+            </a:pPr>
+            <a:r>
+              <a:rPr lang="en-US" sz="900" dirty="0">
+                <a:solidFill>
+                  <a:srgbClr val="111111"/>
                 </a:solidFill>
                 <a:latin typeface="Calibri" pitchFamily="34" charset="0"/>
                 <a:ea typeface="Calibri" pitchFamily="34" charset="-122"/>
@@ -1685,56 +1647,50 @@
               </a:rPr>
               <a:t>10 on EC2 · 5 metrics</a:t>
             </a:r>
-            <a:endParaRPr lang="en-US" sz="950" dirty="0"/>
-          </a:p>
-        </p:txBody>
-      </p:sp>
-      <p:sp>
-        <p:nvSpPr>
-          <p:cNvPr id="7" name="Shape 5"/>
-          <p:cNvSpPr/>
-          <p:nvPr/>
-        </p:nvSpPr>
-        <p:spPr>
-          <a:xfrm>
-            <a:off x="6095848" y="1892808"/>
-            <a:ext cx="0" cy="219456"/>
-          </a:xfrm>
-          <a:prstGeom prst="line">
-            <a:avLst/>
-          </a:prstGeom>
-          <a:noFill/>
-          <a:ln w="25400">
+            <a:endParaRPr lang="en-US" sz="900" dirty="0"/>
+          </a:p>
+        </p:txBody>
+      </p:sp>
+      <p:sp>
+        <p:nvSpPr>
+          <p:cNvPr id="11" name="Shape 9"/>
+          <p:cNvSpPr/>
+          <p:nvPr/>
+        </p:nvSpPr>
+        <p:spPr>
+          <a:xfrm>
+            <a:off x="2333701" y="3845052"/>
+            <a:ext cx="310896" cy="219456"/>
+          </a:xfrm>
+          <a:prstGeom prst="rightArrow">
+            <a:avLst/>
+          </a:prstGeom>
+          <a:solidFill>
+            <a:srgbClr val="8B98A6"/>
+          </a:solidFill>
+          <a:ln/>
+        </p:spPr>
+      </p:sp>
+      <p:sp>
+        <p:nvSpPr>
+          <p:cNvPr id="12" name="Shape 10"/>
+          <p:cNvSpPr/>
+          <p:nvPr/>
+        </p:nvSpPr>
+        <p:spPr>
+          <a:xfrm>
+            <a:off x="2717749" y="2971800"/>
+            <a:ext cx="1346149" cy="1965960"/>
+          </a:xfrm>
+          <a:prstGeom prst="roundRect">
+            <a:avLst/>
+          </a:prstGeom>
+          <a:solidFill>
+            <a:srgbClr val="FF8A1E"/>
+          </a:solidFill>
+          <a:ln w="12700">
             <a:solidFill>
-              <a:srgbClr val="74889A"/>
-            </a:solidFill>
-            <a:prstDash val="solid"/>
-            <a:tailEnd type="triangle"/>
-          </a:ln>
-        </p:spPr>
-      </p:sp>
-      <p:sp>
-        <p:nvSpPr>
-          <p:cNvPr id="8" name="Shape 6"/>
-          <p:cNvSpPr/>
-          <p:nvPr/>
-        </p:nvSpPr>
-        <p:spPr>
-          <a:xfrm>
-            <a:off x="3992728" y="2112264"/>
-            <a:ext cx="4206240" cy="658368"/>
-          </a:xfrm>
-          <a:prstGeom prst="roundRect">
-            <a:avLst>
-              <a:gd name="adj" fmla="val 11111"/>
-            </a:avLst>
-          </a:prstGeom>
-          <a:solidFill>
-            <a:srgbClr val="EEF1F4"/>
-          </a:solidFill>
-          <a:ln w="17780">
-            <a:solidFill>
-              <a:srgbClr val="74889A"/>
+              <a:srgbClr val="FF8A1E"/>
             </a:solidFill>
             <a:prstDash val="solid"/>
           </a:ln>
@@ -1742,34 +1698,14 @@
       </p:sp>
       <p:sp>
         <p:nvSpPr>
-          <p:cNvPr id="9" name="Shape 7"/>
-          <p:cNvSpPr/>
-          <p:nvPr/>
-        </p:nvSpPr>
-        <p:spPr>
-          <a:xfrm>
-            <a:off x="4193896" y="2359152"/>
-            <a:ext cx="164592" cy="164592"/>
-          </a:xfrm>
-          <a:prstGeom prst="ellipse">
-            <a:avLst/>
-          </a:prstGeom>
-          <a:solidFill>
-            <a:srgbClr val="74889A"/>
-          </a:solidFill>
-          <a:ln/>
-        </p:spPr>
-      </p:sp>
-      <p:sp>
-        <p:nvSpPr>
-          <p:cNvPr id="10" name="Text 8"/>
-          <p:cNvSpPr/>
-          <p:nvPr/>
-        </p:nvSpPr>
-        <p:spPr>
-          <a:xfrm>
-            <a:off x="4495648" y="2112264"/>
-            <a:ext cx="2194560" cy="658368"/>
+          <p:cNvPr id="13" name="Text 11"/>
+          <p:cNvSpPr/>
+          <p:nvPr/>
+        </p:nvSpPr>
+        <p:spPr>
+          <a:xfrm>
+            <a:off x="2864053" y="3154680"/>
+            <a:ext cx="1053541" cy="320040"/>
           </a:xfrm>
           <a:prstGeom prst="rect">
             <a:avLst/>
@@ -1785,30 +1721,156 @@
               <a:buNone/>
             </a:pPr>
             <a:r>
-              <a:rPr lang="en-US" sz="1350" b="1" dirty="0">
-                <a:solidFill>
-                  <a:srgbClr val="20262D"/>
+              <a:rPr lang="en-US" sz="1100" dirty="0">
+                <a:solidFill>
+                  <a:srgbClr val="111111"/>
+                </a:solidFill>
+                <a:latin typeface="Consolas" pitchFamily="34" charset="0"/>
+                <a:ea typeface="Consolas" pitchFamily="34" charset="-122"/>
+                <a:cs typeface="Consolas" pitchFamily="34" charset="-120"/>
+              </a:rPr>
+              <a:t>02</a:t>
+            </a:r>
+            <a:endParaRPr lang="en-US" sz="1100" dirty="0"/>
+          </a:p>
+        </p:txBody>
+      </p:sp>
+      <p:sp>
+        <p:nvSpPr>
+          <p:cNvPr id="14" name="Text 12"/>
+          <p:cNvSpPr/>
+          <p:nvPr/>
+        </p:nvSpPr>
+        <p:spPr>
+          <a:xfrm>
+            <a:off x="2864053" y="3593592"/>
+            <a:ext cx="1053541" cy="868680"/>
+          </a:xfrm>
+          <a:prstGeom prst="rect">
+            <a:avLst/>
+          </a:prstGeom>
+          <a:noFill/>
+          <a:ln/>
+        </p:spPr>
+        <p:txBody>
+          <a:bodyPr wrap="square" lIns="0" tIns="0" rIns="0" bIns="0" rtlCol="0" anchor="t"/>
+          <a:lstStyle/>
+          <a:p>
+            <a:pPr indent="0" marL="0">
+              <a:lnSpc>
+                <a:spcPct val="96000"/>
+              </a:lnSpc>
+              <a:buNone/>
+            </a:pPr>
+            <a:r>
+              <a:rPr lang="en-US" sz="1300" b="1" dirty="0">
+                <a:solidFill>
+                  <a:srgbClr val="111111"/>
+                </a:solidFill>
+                <a:latin typeface="Century Gothic" pitchFamily="34" charset="0"/>
+                <a:ea typeface="Century Gothic" pitchFamily="34" charset="-122"/>
+                <a:cs typeface="Century Gothic" pitchFamily="34" charset="-120"/>
+              </a:rPr>
+              <a:t>Fog gateway</a:t>
+            </a:r>
+            <a:endParaRPr lang="en-US" sz="1300" dirty="0"/>
+          </a:p>
+        </p:txBody>
+      </p:sp>
+      <p:sp>
+        <p:nvSpPr>
+          <p:cNvPr id="15" name="Text 13"/>
+          <p:cNvSpPr/>
+          <p:nvPr/>
+        </p:nvSpPr>
+        <p:spPr>
+          <a:xfrm>
+            <a:off x="2864053" y="4453128"/>
+            <a:ext cx="1053541" cy="365760"/>
+          </a:xfrm>
+          <a:prstGeom prst="rect">
+            <a:avLst/>
+          </a:prstGeom>
+          <a:noFill/>
+          <a:ln/>
+        </p:spPr>
+        <p:txBody>
+          <a:bodyPr wrap="square" lIns="0" tIns="0" rIns="0" bIns="0" rtlCol="0" anchor="ctr"/>
+          <a:lstStyle/>
+          <a:p>
+            <a:pPr indent="0" marL="0">
+              <a:buNone/>
+            </a:pPr>
+            <a:r>
+              <a:rPr lang="en-US" sz="900" dirty="0">
+                <a:solidFill>
+                  <a:srgbClr val="111111"/>
                 </a:solidFill>
                 <a:latin typeface="Calibri" pitchFamily="34" charset="0"/>
                 <a:ea typeface="Calibri" pitchFamily="34" charset="-122"/>
                 <a:cs typeface="Calibri" pitchFamily="34" charset="-120"/>
               </a:rPr>
-              <a:t>Fog gateway</a:t>
-            </a:r>
-            <a:endParaRPr lang="en-US" sz="1350" dirty="0"/>
-          </a:p>
-        </p:txBody>
-      </p:sp>
-      <p:sp>
-        <p:nvSpPr>
-          <p:cNvPr id="11" name="Text 9"/>
-          <p:cNvSpPr/>
-          <p:nvPr/>
-        </p:nvSpPr>
-        <p:spPr>
-          <a:xfrm>
-            <a:off x="6644488" y="2112264"/>
-            <a:ext cx="1463040" cy="658368"/>
+              <a:t>windows · thresholds</a:t>
+            </a:r>
+            <a:endParaRPr lang="en-US" sz="900" dirty="0"/>
+          </a:p>
+        </p:txBody>
+      </p:sp>
+      <p:sp>
+        <p:nvSpPr>
+          <p:cNvPr id="16" name="Shape 14"/>
+          <p:cNvSpPr/>
+          <p:nvPr/>
+        </p:nvSpPr>
+        <p:spPr>
+          <a:xfrm>
+            <a:off x="4137050" y="3845052"/>
+            <a:ext cx="310896" cy="219456"/>
+          </a:xfrm>
+          <a:prstGeom prst="rightArrow">
+            <a:avLst/>
+          </a:prstGeom>
+          <a:solidFill>
+            <a:srgbClr val="8B98A6"/>
+          </a:solidFill>
+          <a:ln/>
+        </p:spPr>
+      </p:sp>
+      <p:sp>
+        <p:nvSpPr>
+          <p:cNvPr id="17" name="Shape 15"/>
+          <p:cNvSpPr/>
+          <p:nvPr/>
+        </p:nvSpPr>
+        <p:spPr>
+          <a:xfrm>
+            <a:off x="4521098" y="2971800"/>
+            <a:ext cx="1346149" cy="1965960"/>
+          </a:xfrm>
+          <a:prstGeom prst="roundRect">
+            <a:avLst/>
+          </a:prstGeom>
+          <a:solidFill>
+            <a:srgbClr val="12151B"/>
+          </a:solidFill>
+          <a:ln w="12700">
+            <a:solidFill>
+              <a:srgbClr val="26292F"/>
+            </a:solidFill>
+            <a:prstDash val="solid"/>
+          </a:ln>
+        </p:spPr>
+      </p:sp>
+      <p:sp>
+        <p:nvSpPr>
+          <p:cNvPr id="18" name="Text 16"/>
+          <p:cNvSpPr/>
+          <p:nvPr/>
+        </p:nvSpPr>
+        <p:spPr>
+          <a:xfrm>
+            <a:off x="4667402" y="3154680"/>
+            <a:ext cx="1053541" cy="320040"/>
           </a:xfrm>
           <a:prstGeom prst="rect">
             <a:avLst/>
@@ -1820,70 +1882,145 @@
           <a:bodyPr wrap="square" lIns="0" tIns="0" rIns="0" bIns="0" rtlCol="0" anchor="ctr"/>
           <a:lstStyle/>
           <a:p>
-            <a:pPr algn="r" indent="0" marL="0">
-              <a:buNone/>
-            </a:pPr>
-            <a:r>
-              <a:rPr lang="en-US" sz="950" dirty="0">
-                <a:solidFill>
-                  <a:srgbClr val="626E78"/>
+            <a:pPr indent="0" marL="0">
+              <a:buNone/>
+            </a:pPr>
+            <a:r>
+              <a:rPr lang="en-US" sz="1100" dirty="0">
+                <a:solidFill>
+                  <a:srgbClr val="FF8A1E"/>
+                </a:solidFill>
+                <a:latin typeface="Consolas" pitchFamily="34" charset="0"/>
+                <a:ea typeface="Consolas" pitchFamily="34" charset="-122"/>
+                <a:cs typeface="Consolas" pitchFamily="34" charset="-120"/>
+              </a:rPr>
+              <a:t>03</a:t>
+            </a:r>
+            <a:endParaRPr lang="en-US" sz="1100" dirty="0"/>
+          </a:p>
+        </p:txBody>
+      </p:sp>
+      <p:sp>
+        <p:nvSpPr>
+          <p:cNvPr id="19" name="Text 17"/>
+          <p:cNvSpPr/>
+          <p:nvPr/>
+        </p:nvSpPr>
+        <p:spPr>
+          <a:xfrm>
+            <a:off x="4667402" y="3593592"/>
+            <a:ext cx="1053541" cy="868680"/>
+          </a:xfrm>
+          <a:prstGeom prst="rect">
+            <a:avLst/>
+          </a:prstGeom>
+          <a:noFill/>
+          <a:ln/>
+        </p:spPr>
+        <p:txBody>
+          <a:bodyPr wrap="square" lIns="0" tIns="0" rIns="0" bIns="0" rtlCol="0" anchor="t"/>
+          <a:lstStyle/>
+          <a:p>
+            <a:pPr indent="0" marL="0">
+              <a:lnSpc>
+                <a:spcPct val="96000"/>
+              </a:lnSpc>
+              <a:buNone/>
+            </a:pPr>
+            <a:r>
+              <a:rPr lang="en-US" sz="1300" b="1" dirty="0">
+                <a:solidFill>
+                  <a:srgbClr val="E6EDF3"/>
+                </a:solidFill>
+                <a:latin typeface="Century Gothic" pitchFamily="34" charset="0"/>
+                <a:ea typeface="Century Gothic" pitchFamily="34" charset="-122"/>
+                <a:cs typeface="Century Gothic" pitchFamily="34" charset="-120"/>
+              </a:rPr>
+              <a:t>Amazon SQS</a:t>
+            </a:r>
+            <a:endParaRPr lang="en-US" sz="1300" dirty="0"/>
+          </a:p>
+        </p:txBody>
+      </p:sp>
+      <p:sp>
+        <p:nvSpPr>
+          <p:cNvPr id="20" name="Text 18"/>
+          <p:cNvSpPr/>
+          <p:nvPr/>
+        </p:nvSpPr>
+        <p:spPr>
+          <a:xfrm>
+            <a:off x="4667402" y="4453128"/>
+            <a:ext cx="1053541" cy="365760"/>
+          </a:xfrm>
+          <a:prstGeom prst="rect">
+            <a:avLst/>
+          </a:prstGeom>
+          <a:noFill/>
+          <a:ln/>
+        </p:spPr>
+        <p:txBody>
+          <a:bodyPr wrap="square" lIns="0" tIns="0" rIns="0" bIns="0" rtlCol="0" anchor="ctr"/>
+          <a:lstStyle/>
+          <a:p>
+            <a:pPr indent="0" marL="0">
+              <a:buNone/>
+            </a:pPr>
+            <a:r>
+              <a:rPr lang="en-US" sz="900" dirty="0">
+                <a:solidFill>
+                  <a:srgbClr val="8B98A6"/>
                 </a:solidFill>
                 <a:latin typeface="Calibri" pitchFamily="34" charset="0"/>
                 <a:ea typeface="Calibri" pitchFamily="34" charset="-122"/>
                 <a:cs typeface="Calibri" pitchFamily="34" charset="-120"/>
               </a:rPr>
-              <a:t>windows · thresholds</a:t>
-            </a:r>
-            <a:endParaRPr lang="en-US" sz="950" dirty="0"/>
-          </a:p>
-        </p:txBody>
-      </p:sp>
-      <p:sp>
-        <p:nvSpPr>
-          <p:cNvPr id="12" name="Shape 10"/>
-          <p:cNvSpPr/>
-          <p:nvPr/>
-        </p:nvSpPr>
-        <p:spPr>
-          <a:xfrm>
-            <a:off x="6095848" y="2770632"/>
-            <a:ext cx="0" cy="219456"/>
-          </a:xfrm>
-          <a:prstGeom prst="line">
-            <a:avLst/>
-          </a:prstGeom>
-          <a:noFill/>
-          <a:ln w="25400">
+              <a:t>batches ≤10</a:t>
+            </a:r>
+            <a:endParaRPr lang="en-US" sz="900" dirty="0"/>
+          </a:p>
+        </p:txBody>
+      </p:sp>
+      <p:sp>
+        <p:nvSpPr>
+          <p:cNvPr id="21" name="Shape 19"/>
+          <p:cNvSpPr/>
+          <p:nvPr/>
+        </p:nvSpPr>
+        <p:spPr>
+          <a:xfrm>
+            <a:off x="5940400" y="3845052"/>
+            <a:ext cx="310896" cy="219456"/>
+          </a:xfrm>
+          <a:prstGeom prst="rightArrow">
+            <a:avLst/>
+          </a:prstGeom>
+          <a:solidFill>
+            <a:srgbClr val="8B98A6"/>
+          </a:solidFill>
+          <a:ln/>
+        </p:spPr>
+      </p:sp>
+      <p:sp>
+        <p:nvSpPr>
+          <p:cNvPr id="22" name="Shape 20"/>
+          <p:cNvSpPr/>
+          <p:nvPr/>
+        </p:nvSpPr>
+        <p:spPr>
+          <a:xfrm>
+            <a:off x="6324448" y="2971800"/>
+            <a:ext cx="1346149" cy="1965960"/>
+          </a:xfrm>
+          <a:prstGeom prst="roundRect">
+            <a:avLst/>
+          </a:prstGeom>
+          <a:solidFill>
+            <a:srgbClr val="12151B"/>
+          </a:solidFill>
+          <a:ln w="12700">
             <a:solidFill>
-              <a:srgbClr val="74889A"/>
-            </a:solidFill>
-            <a:prstDash val="solid"/>
-            <a:tailEnd type="triangle"/>
-          </a:ln>
-        </p:spPr>
-      </p:sp>
-      <p:sp>
-        <p:nvSpPr>
-          <p:cNvPr id="13" name="Shape 11"/>
-          <p:cNvSpPr/>
-          <p:nvPr/>
-        </p:nvSpPr>
-        <p:spPr>
-          <a:xfrm>
-            <a:off x="3992728" y="2990088"/>
-            <a:ext cx="4206240" cy="658368"/>
-          </a:xfrm>
-          <a:prstGeom prst="roundRect">
-            <a:avLst>
-              <a:gd name="adj" fmla="val 11111"/>
-            </a:avLst>
-          </a:prstGeom>
-          <a:solidFill>
-            <a:srgbClr val="EEF1F4"/>
-          </a:solidFill>
-          <a:ln w="17780">
-            <a:solidFill>
-              <a:srgbClr val="33414F"/>
+              <a:srgbClr val="26292F"/>
             </a:solidFill>
             <a:prstDash val="solid"/>
           </a:ln>
@@ -1891,34 +2028,14 @@
       </p:sp>
       <p:sp>
         <p:nvSpPr>
-          <p:cNvPr id="14" name="Shape 12"/>
-          <p:cNvSpPr/>
-          <p:nvPr/>
-        </p:nvSpPr>
-        <p:spPr>
-          <a:xfrm>
-            <a:off x="4193896" y="3236976"/>
-            <a:ext cx="164592" cy="164592"/>
-          </a:xfrm>
-          <a:prstGeom prst="ellipse">
-            <a:avLst/>
-          </a:prstGeom>
-          <a:solidFill>
-            <a:srgbClr val="33414F"/>
-          </a:solidFill>
-          <a:ln/>
-        </p:spPr>
-      </p:sp>
-      <p:sp>
-        <p:nvSpPr>
-          <p:cNvPr id="15" name="Text 13"/>
-          <p:cNvSpPr/>
-          <p:nvPr/>
-        </p:nvSpPr>
-        <p:spPr>
-          <a:xfrm>
-            <a:off x="4495648" y="2990088"/>
-            <a:ext cx="2194560" cy="658368"/>
+          <p:cNvPr id="23" name="Text 21"/>
+          <p:cNvSpPr/>
+          <p:nvPr/>
+        </p:nvSpPr>
+        <p:spPr>
+          <a:xfrm>
+            <a:off x="6470752" y="3154680"/>
+            <a:ext cx="1053541" cy="320040"/>
           </a:xfrm>
           <a:prstGeom prst="rect">
             <a:avLst/>
@@ -1934,30 +2051,156 @@
               <a:buNone/>
             </a:pPr>
             <a:r>
-              <a:rPr lang="en-US" sz="1350" b="1" dirty="0">
-                <a:solidFill>
-                  <a:srgbClr val="20262D"/>
+              <a:rPr lang="en-US" sz="1100" dirty="0">
+                <a:solidFill>
+                  <a:srgbClr val="FF8A1E"/>
+                </a:solidFill>
+                <a:latin typeface="Consolas" pitchFamily="34" charset="0"/>
+                <a:ea typeface="Consolas" pitchFamily="34" charset="-122"/>
+                <a:cs typeface="Consolas" pitchFamily="34" charset="-120"/>
+              </a:rPr>
+              <a:t>04</a:t>
+            </a:r>
+            <a:endParaRPr lang="en-US" sz="1100" dirty="0"/>
+          </a:p>
+        </p:txBody>
+      </p:sp>
+      <p:sp>
+        <p:nvSpPr>
+          <p:cNvPr id="24" name="Text 22"/>
+          <p:cNvSpPr/>
+          <p:nvPr/>
+        </p:nvSpPr>
+        <p:spPr>
+          <a:xfrm>
+            <a:off x="6470752" y="3593592"/>
+            <a:ext cx="1053541" cy="868680"/>
+          </a:xfrm>
+          <a:prstGeom prst="rect">
+            <a:avLst/>
+          </a:prstGeom>
+          <a:noFill/>
+          <a:ln/>
+        </p:spPr>
+        <p:txBody>
+          <a:bodyPr wrap="square" lIns="0" tIns="0" rIns="0" bIns="0" rtlCol="0" anchor="t"/>
+          <a:lstStyle/>
+          <a:p>
+            <a:pPr indent="0" marL="0">
+              <a:lnSpc>
+                <a:spcPct val="96000"/>
+              </a:lnSpc>
+              <a:buNone/>
+            </a:pPr>
+            <a:r>
+              <a:rPr lang="en-US" sz="1300" b="1" dirty="0">
+                <a:solidFill>
+                  <a:srgbClr val="E6EDF3"/>
+                </a:solidFill>
+                <a:latin typeface="Century Gothic" pitchFamily="34" charset="0"/>
+                <a:ea typeface="Century Gothic" pitchFamily="34" charset="-122"/>
+                <a:cs typeface="Century Gothic" pitchFamily="34" charset="-120"/>
+              </a:rPr>
+              <a:t>AWS Lambda</a:t>
+            </a:r>
+            <a:endParaRPr lang="en-US" sz="1300" dirty="0"/>
+          </a:p>
+        </p:txBody>
+      </p:sp>
+      <p:sp>
+        <p:nvSpPr>
+          <p:cNvPr id="25" name="Text 23"/>
+          <p:cNvSpPr/>
+          <p:nvPr/>
+        </p:nvSpPr>
+        <p:spPr>
+          <a:xfrm>
+            <a:off x="6470752" y="4453128"/>
+            <a:ext cx="1053541" cy="365760"/>
+          </a:xfrm>
+          <a:prstGeom prst="rect">
+            <a:avLst/>
+          </a:prstGeom>
+          <a:noFill/>
+          <a:ln/>
+        </p:spPr>
+        <p:txBody>
+          <a:bodyPr wrap="square" lIns="0" tIns="0" rIns="0" bIns="0" rtlCol="0" anchor="ctr"/>
+          <a:lstStyle/>
+          <a:p>
+            <a:pPr indent="0" marL="0">
+              <a:buNone/>
+            </a:pPr>
+            <a:r>
+              <a:rPr lang="en-US" sz="900" dirty="0">
+                <a:solidFill>
+                  <a:srgbClr val="8B98A6"/>
                 </a:solidFill>
                 <a:latin typeface="Calibri" pitchFamily="34" charset="0"/>
                 <a:ea typeface="Calibri" pitchFamily="34" charset="-122"/>
                 <a:cs typeface="Calibri" pitchFamily="34" charset="-120"/>
               </a:rPr>
-              <a:t>Amazon SQS</a:t>
-            </a:r>
-            <a:endParaRPr lang="en-US" sz="1350" dirty="0"/>
-          </a:p>
-        </p:txBody>
-      </p:sp>
-      <p:sp>
-        <p:nvSpPr>
-          <p:cNvPr id="16" name="Text 14"/>
-          <p:cNvSpPr/>
-          <p:nvPr/>
-        </p:nvSpPr>
-        <p:spPr>
-          <a:xfrm>
-            <a:off x="6644488" y="2990088"/>
-            <a:ext cx="1463040" cy="658368"/>
+              <a:t>java17 ingest</a:t>
+            </a:r>
+            <a:endParaRPr lang="en-US" sz="900" dirty="0"/>
+          </a:p>
+        </p:txBody>
+      </p:sp>
+      <p:sp>
+        <p:nvSpPr>
+          <p:cNvPr id="26" name="Shape 24"/>
+          <p:cNvSpPr/>
+          <p:nvPr/>
+        </p:nvSpPr>
+        <p:spPr>
+          <a:xfrm>
+            <a:off x="7743749" y="3845052"/>
+            <a:ext cx="310896" cy="219456"/>
+          </a:xfrm>
+          <a:prstGeom prst="rightArrow">
+            <a:avLst/>
+          </a:prstGeom>
+          <a:solidFill>
+            <a:srgbClr val="8B98A6"/>
+          </a:solidFill>
+          <a:ln/>
+        </p:spPr>
+      </p:sp>
+      <p:sp>
+        <p:nvSpPr>
+          <p:cNvPr id="27" name="Shape 25"/>
+          <p:cNvSpPr/>
+          <p:nvPr/>
+        </p:nvSpPr>
+        <p:spPr>
+          <a:xfrm>
+            <a:off x="8127797" y="2971800"/>
+            <a:ext cx="1346149" cy="1965960"/>
+          </a:xfrm>
+          <a:prstGeom prst="roundRect">
+            <a:avLst/>
+          </a:prstGeom>
+          <a:solidFill>
+            <a:srgbClr val="12151B"/>
+          </a:solidFill>
+          <a:ln w="12700">
+            <a:solidFill>
+              <a:srgbClr val="26292F"/>
+            </a:solidFill>
+            <a:prstDash val="solid"/>
+          </a:ln>
+        </p:spPr>
+      </p:sp>
+      <p:sp>
+        <p:nvSpPr>
+          <p:cNvPr id="28" name="Text 26"/>
+          <p:cNvSpPr/>
+          <p:nvPr/>
+        </p:nvSpPr>
+        <p:spPr>
+          <a:xfrm>
+            <a:off x="8274101" y="3154680"/>
+            <a:ext cx="1053541" cy="320040"/>
           </a:xfrm>
           <a:prstGeom prst="rect">
             <a:avLst/>
@@ -1969,70 +2212,145 @@
           <a:bodyPr wrap="square" lIns="0" tIns="0" rIns="0" bIns="0" rtlCol="0" anchor="ctr"/>
           <a:lstStyle/>
           <a:p>
-            <a:pPr algn="r" indent="0" marL="0">
-              <a:buNone/>
-            </a:pPr>
-            <a:r>
-              <a:rPr lang="en-US" sz="950" dirty="0">
-                <a:solidFill>
-                  <a:srgbClr val="626E78"/>
+            <a:pPr indent="0" marL="0">
+              <a:buNone/>
+            </a:pPr>
+            <a:r>
+              <a:rPr lang="en-US" sz="1100" dirty="0">
+                <a:solidFill>
+                  <a:srgbClr val="FF8A1E"/>
+                </a:solidFill>
+                <a:latin typeface="Consolas" pitchFamily="34" charset="0"/>
+                <a:ea typeface="Consolas" pitchFamily="34" charset="-122"/>
+                <a:cs typeface="Consolas" pitchFamily="34" charset="-120"/>
+              </a:rPr>
+              <a:t>05</a:t>
+            </a:r>
+            <a:endParaRPr lang="en-US" sz="1100" dirty="0"/>
+          </a:p>
+        </p:txBody>
+      </p:sp>
+      <p:sp>
+        <p:nvSpPr>
+          <p:cNvPr id="29" name="Text 27"/>
+          <p:cNvSpPr/>
+          <p:nvPr/>
+        </p:nvSpPr>
+        <p:spPr>
+          <a:xfrm>
+            <a:off x="8274101" y="3593592"/>
+            <a:ext cx="1053541" cy="868680"/>
+          </a:xfrm>
+          <a:prstGeom prst="rect">
+            <a:avLst/>
+          </a:prstGeom>
+          <a:noFill/>
+          <a:ln/>
+        </p:spPr>
+        <p:txBody>
+          <a:bodyPr wrap="square" lIns="0" tIns="0" rIns="0" bIns="0" rtlCol="0" anchor="t"/>
+          <a:lstStyle/>
+          <a:p>
+            <a:pPr indent="0" marL="0">
+              <a:lnSpc>
+                <a:spcPct val="96000"/>
+              </a:lnSpc>
+              <a:buNone/>
+            </a:pPr>
+            <a:r>
+              <a:rPr lang="en-US" sz="1300" b="1" dirty="0">
+                <a:solidFill>
+                  <a:srgbClr val="E6EDF3"/>
+                </a:solidFill>
+                <a:latin typeface="Century Gothic" pitchFamily="34" charset="0"/>
+                <a:ea typeface="Century Gothic" pitchFamily="34" charset="-122"/>
+                <a:cs typeface="Century Gothic" pitchFamily="34" charset="-120"/>
+              </a:rPr>
+              <a:t>DynamoDB</a:t>
+            </a:r>
+            <a:endParaRPr lang="en-US" sz="1300" dirty="0"/>
+          </a:p>
+        </p:txBody>
+      </p:sp>
+      <p:sp>
+        <p:nvSpPr>
+          <p:cNvPr id="30" name="Text 28"/>
+          <p:cNvSpPr/>
+          <p:nvPr/>
+        </p:nvSpPr>
+        <p:spPr>
+          <a:xfrm>
+            <a:off x="8274101" y="4453128"/>
+            <a:ext cx="1053541" cy="365760"/>
+          </a:xfrm>
+          <a:prstGeom prst="rect">
+            <a:avLst/>
+          </a:prstGeom>
+          <a:noFill/>
+          <a:ln/>
+        </p:spPr>
+        <p:txBody>
+          <a:bodyPr wrap="square" lIns="0" tIns="0" rIns="0" bIns="0" rtlCol="0" anchor="ctr"/>
+          <a:lstStyle/>
+          <a:p>
+            <a:pPr indent="0" marL="0">
+              <a:buNone/>
+            </a:pPr>
+            <a:r>
+              <a:rPr lang="en-US" sz="900" dirty="0">
+                <a:solidFill>
+                  <a:srgbClr val="8B98A6"/>
                 </a:solidFill>
                 <a:latin typeface="Calibri" pitchFamily="34" charset="0"/>
                 <a:ea typeface="Calibri" pitchFamily="34" charset="-122"/>
                 <a:cs typeface="Calibri" pitchFamily="34" charset="-120"/>
               </a:rPr>
-              <a:t>batches ≤10</a:t>
-            </a:r>
-            <a:endParaRPr lang="en-US" sz="950" dirty="0"/>
-          </a:p>
-        </p:txBody>
-      </p:sp>
-      <p:sp>
-        <p:nvSpPr>
-          <p:cNvPr id="17" name="Shape 15"/>
-          <p:cNvSpPr/>
-          <p:nvPr/>
-        </p:nvSpPr>
-        <p:spPr>
-          <a:xfrm>
-            <a:off x="6095848" y="3648456"/>
-            <a:ext cx="0" cy="219456"/>
-          </a:xfrm>
-          <a:prstGeom prst="line">
-            <a:avLst/>
-          </a:prstGeom>
-          <a:noFill/>
-          <a:ln w="25400">
+              <a:t>window aggregates</a:t>
+            </a:r>
+            <a:endParaRPr lang="en-US" sz="900" dirty="0"/>
+          </a:p>
+        </p:txBody>
+      </p:sp>
+      <p:sp>
+        <p:nvSpPr>
+          <p:cNvPr id="31" name="Shape 29"/>
+          <p:cNvSpPr/>
+          <p:nvPr/>
+        </p:nvSpPr>
+        <p:spPr>
+          <a:xfrm>
+            <a:off x="9547098" y="3845052"/>
+            <a:ext cx="310896" cy="219456"/>
+          </a:xfrm>
+          <a:prstGeom prst="rightArrow">
+            <a:avLst/>
+          </a:prstGeom>
+          <a:solidFill>
+            <a:srgbClr val="8B98A6"/>
+          </a:solidFill>
+          <a:ln/>
+        </p:spPr>
+      </p:sp>
+      <p:sp>
+        <p:nvSpPr>
+          <p:cNvPr id="32" name="Shape 30"/>
+          <p:cNvSpPr/>
+          <p:nvPr/>
+        </p:nvSpPr>
+        <p:spPr>
+          <a:xfrm>
+            <a:off x="9931146" y="2971800"/>
+            <a:ext cx="1346149" cy="1965960"/>
+          </a:xfrm>
+          <a:prstGeom prst="roundRect">
+            <a:avLst/>
+          </a:prstGeom>
+          <a:solidFill>
+            <a:srgbClr val="12151B"/>
+          </a:solidFill>
+          <a:ln w="12700">
             <a:solidFill>
-              <a:srgbClr val="74889A"/>
-            </a:solidFill>
-            <a:prstDash val="solid"/>
-            <a:tailEnd type="triangle"/>
-          </a:ln>
-        </p:spPr>
-      </p:sp>
-      <p:sp>
-        <p:nvSpPr>
-          <p:cNvPr id="18" name="Shape 16"/>
-          <p:cNvSpPr/>
-          <p:nvPr/>
-        </p:nvSpPr>
-        <p:spPr>
-          <a:xfrm>
-            <a:off x="3992728" y="3867912"/>
-            <a:ext cx="4206240" cy="658368"/>
-          </a:xfrm>
-          <a:prstGeom prst="roundRect">
-            <a:avLst>
-              <a:gd name="adj" fmla="val 11111"/>
-            </a:avLst>
-          </a:prstGeom>
-          <a:solidFill>
-            <a:srgbClr val="EEF1F4"/>
-          </a:solidFill>
-          <a:ln w="17780">
-            <a:solidFill>
-              <a:srgbClr val="33414F"/>
+              <a:srgbClr val="26292F"/>
             </a:solidFill>
             <a:prstDash val="solid"/>
           </a:ln>
@@ -2040,34 +2358,14 @@
       </p:sp>
       <p:sp>
         <p:nvSpPr>
-          <p:cNvPr id="19" name="Shape 17"/>
-          <p:cNvSpPr/>
-          <p:nvPr/>
-        </p:nvSpPr>
-        <p:spPr>
-          <a:xfrm>
-            <a:off x="4193896" y="4114800"/>
-            <a:ext cx="164592" cy="164592"/>
-          </a:xfrm>
-          <a:prstGeom prst="ellipse">
-            <a:avLst/>
-          </a:prstGeom>
-          <a:solidFill>
-            <a:srgbClr val="33414F"/>
-          </a:solidFill>
-          <a:ln/>
-        </p:spPr>
-      </p:sp>
-      <p:sp>
-        <p:nvSpPr>
-          <p:cNvPr id="20" name="Text 18"/>
-          <p:cNvSpPr/>
-          <p:nvPr/>
-        </p:nvSpPr>
-        <p:spPr>
-          <a:xfrm>
-            <a:off x="4495648" y="3867912"/>
-            <a:ext cx="2194560" cy="658368"/>
+          <p:cNvPr id="33" name="Text 31"/>
+          <p:cNvSpPr/>
+          <p:nvPr/>
+        </p:nvSpPr>
+        <p:spPr>
+          <a:xfrm>
+            <a:off x="10077450" y="3154680"/>
+            <a:ext cx="1053541" cy="320040"/>
           </a:xfrm>
           <a:prstGeom prst="rect">
             <a:avLst/>
@@ -2083,471 +2381,98 @@
               <a:buNone/>
             </a:pPr>
             <a:r>
-              <a:rPr lang="en-US" sz="1350" b="1" dirty="0">
-                <a:solidFill>
-                  <a:srgbClr val="20262D"/>
+              <a:rPr lang="en-US" sz="1100" dirty="0">
+                <a:solidFill>
+                  <a:srgbClr val="FF8A1E"/>
+                </a:solidFill>
+                <a:latin typeface="Consolas" pitchFamily="34" charset="0"/>
+                <a:ea typeface="Consolas" pitchFamily="34" charset="-122"/>
+                <a:cs typeface="Consolas" pitchFamily="34" charset="-120"/>
+              </a:rPr>
+              <a:t>06</a:t>
+            </a:r>
+            <a:endParaRPr lang="en-US" sz="1100" dirty="0"/>
+          </a:p>
+        </p:txBody>
+      </p:sp>
+      <p:sp>
+        <p:nvSpPr>
+          <p:cNvPr id="34" name="Text 32"/>
+          <p:cNvSpPr/>
+          <p:nvPr/>
+        </p:nvSpPr>
+        <p:spPr>
+          <a:xfrm>
+            <a:off x="10077450" y="3593592"/>
+            <a:ext cx="1053541" cy="868680"/>
+          </a:xfrm>
+          <a:prstGeom prst="rect">
+            <a:avLst/>
+          </a:prstGeom>
+          <a:noFill/>
+          <a:ln/>
+        </p:spPr>
+        <p:txBody>
+          <a:bodyPr wrap="square" lIns="0" tIns="0" rIns="0" bIns="0" rtlCol="0" anchor="t"/>
+          <a:lstStyle/>
+          <a:p>
+            <a:pPr indent="0" marL="0">
+              <a:lnSpc>
+                <a:spcPct val="96000"/>
+              </a:lnSpc>
+              <a:buNone/>
+            </a:pPr>
+            <a:r>
+              <a:rPr lang="en-US" sz="1300" b="1" dirty="0">
+                <a:solidFill>
+                  <a:srgbClr val="E6EDF3"/>
+                </a:solidFill>
+                <a:latin typeface="Century Gothic" pitchFamily="34" charset="0"/>
+                <a:ea typeface="Century Gothic" pitchFamily="34" charset="-122"/>
+                <a:cs typeface="Century Gothic" pitchFamily="34" charset="-120"/>
+              </a:rPr>
+              <a:t>API GW + S3</a:t>
+            </a:r>
+            <a:endParaRPr lang="en-US" sz="1300" dirty="0"/>
+          </a:p>
+        </p:txBody>
+      </p:sp>
+      <p:sp>
+        <p:nvSpPr>
+          <p:cNvPr id="35" name="Text 33"/>
+          <p:cNvSpPr/>
+          <p:nvPr/>
+        </p:nvSpPr>
+        <p:spPr>
+          <a:xfrm>
+            <a:off x="10077450" y="4453128"/>
+            <a:ext cx="1053541" cy="365760"/>
+          </a:xfrm>
+          <a:prstGeom prst="rect">
+            <a:avLst/>
+          </a:prstGeom>
+          <a:noFill/>
+          <a:ln/>
+        </p:spPr>
+        <p:txBody>
+          <a:bodyPr wrap="square" lIns="0" tIns="0" rIns="0" bIns="0" rtlCol="0" anchor="ctr"/>
+          <a:lstStyle/>
+          <a:p>
+            <a:pPr indent="0" marL="0">
+              <a:buNone/>
+            </a:pPr>
+            <a:r>
+              <a:rPr lang="en-US" sz="900" dirty="0">
+                <a:solidFill>
+                  <a:srgbClr val="8B98A6"/>
                 </a:solidFill>
                 <a:latin typeface="Calibri" pitchFamily="34" charset="0"/>
                 <a:ea typeface="Calibri" pitchFamily="34" charset="-122"/>
                 <a:cs typeface="Calibri" pitchFamily="34" charset="-120"/>
               </a:rPr>
-              <a:t>AWS Lambda</a:t>
-            </a:r>
-            <a:endParaRPr lang="en-US" sz="1350" dirty="0"/>
-          </a:p>
-        </p:txBody>
-      </p:sp>
-      <p:sp>
-        <p:nvSpPr>
-          <p:cNvPr id="21" name="Text 19"/>
-          <p:cNvSpPr/>
-          <p:nvPr/>
-        </p:nvSpPr>
-        <p:spPr>
-          <a:xfrm>
-            <a:off x="6644488" y="3867912"/>
-            <a:ext cx="1463040" cy="658368"/>
-          </a:xfrm>
-          <a:prstGeom prst="rect">
-            <a:avLst/>
-          </a:prstGeom>
-          <a:noFill/>
-          <a:ln/>
-        </p:spPr>
-        <p:txBody>
-          <a:bodyPr wrap="square" lIns="0" tIns="0" rIns="0" bIns="0" rtlCol="0" anchor="ctr"/>
-          <a:lstStyle/>
-          <a:p>
-            <a:pPr algn="r" indent="0" marL="0">
-              <a:buNone/>
-            </a:pPr>
-            <a:r>
-              <a:rPr lang="en-US" sz="950" dirty="0">
-                <a:solidFill>
-                  <a:srgbClr val="626E78"/>
-                </a:solidFill>
-                <a:latin typeface="Calibri" pitchFamily="34" charset="0"/>
-                <a:ea typeface="Calibri" pitchFamily="34" charset="-122"/>
-                <a:cs typeface="Calibri" pitchFamily="34" charset="-120"/>
-              </a:rPr>
-              <a:t>java17 ingest</a:t>
-            </a:r>
-            <a:endParaRPr lang="en-US" sz="950" dirty="0"/>
-          </a:p>
-        </p:txBody>
-      </p:sp>
-      <p:sp>
-        <p:nvSpPr>
-          <p:cNvPr id="22" name="Shape 20"/>
-          <p:cNvSpPr/>
-          <p:nvPr/>
-        </p:nvSpPr>
-        <p:spPr>
-          <a:xfrm>
-            <a:off x="6095848" y="4526280"/>
-            <a:ext cx="0" cy="219456"/>
-          </a:xfrm>
-          <a:prstGeom prst="line">
-            <a:avLst/>
-          </a:prstGeom>
-          <a:noFill/>
-          <a:ln w="25400">
-            <a:solidFill>
-              <a:srgbClr val="74889A"/>
-            </a:solidFill>
-            <a:prstDash val="solid"/>
-            <a:tailEnd type="triangle"/>
-          </a:ln>
-        </p:spPr>
-      </p:sp>
-      <p:sp>
-        <p:nvSpPr>
-          <p:cNvPr id="23" name="Shape 21"/>
-          <p:cNvSpPr/>
-          <p:nvPr/>
-        </p:nvSpPr>
-        <p:spPr>
-          <a:xfrm>
-            <a:off x="3992728" y="4745736"/>
-            <a:ext cx="4206240" cy="658368"/>
-          </a:xfrm>
-          <a:prstGeom prst="roundRect">
-            <a:avLst>
-              <a:gd name="adj" fmla="val 11111"/>
-            </a:avLst>
-          </a:prstGeom>
-          <a:solidFill>
-            <a:srgbClr val="EEF1F4"/>
-          </a:solidFill>
-          <a:ln w="17780">
-            <a:solidFill>
-              <a:srgbClr val="33414F"/>
-            </a:solidFill>
-            <a:prstDash val="solid"/>
-          </a:ln>
-        </p:spPr>
-      </p:sp>
-      <p:sp>
-        <p:nvSpPr>
-          <p:cNvPr id="24" name="Shape 22"/>
-          <p:cNvSpPr/>
-          <p:nvPr/>
-        </p:nvSpPr>
-        <p:spPr>
-          <a:xfrm>
-            <a:off x="4193896" y="4992624"/>
-            <a:ext cx="164592" cy="164592"/>
-          </a:xfrm>
-          <a:prstGeom prst="ellipse">
-            <a:avLst/>
-          </a:prstGeom>
-          <a:solidFill>
-            <a:srgbClr val="33414F"/>
-          </a:solidFill>
-          <a:ln/>
-        </p:spPr>
-      </p:sp>
-      <p:sp>
-        <p:nvSpPr>
-          <p:cNvPr id="25" name="Text 23"/>
-          <p:cNvSpPr/>
-          <p:nvPr/>
-        </p:nvSpPr>
-        <p:spPr>
-          <a:xfrm>
-            <a:off x="4495648" y="4745736"/>
-            <a:ext cx="2194560" cy="658368"/>
-          </a:xfrm>
-          <a:prstGeom prst="rect">
-            <a:avLst/>
-          </a:prstGeom>
-          <a:noFill/>
-          <a:ln/>
-        </p:spPr>
-        <p:txBody>
-          <a:bodyPr wrap="square" lIns="0" tIns="0" rIns="0" bIns="0" rtlCol="0" anchor="ctr"/>
-          <a:lstStyle/>
-          <a:p>
-            <a:pPr indent="0" marL="0">
-              <a:buNone/>
-            </a:pPr>
-            <a:r>
-              <a:rPr lang="en-US" sz="1350" b="1" dirty="0">
-                <a:solidFill>
-                  <a:srgbClr val="20262D"/>
-                </a:solidFill>
-                <a:latin typeface="Calibri" pitchFamily="34" charset="0"/>
-                <a:ea typeface="Calibri" pitchFamily="34" charset="-122"/>
-                <a:cs typeface="Calibri" pitchFamily="34" charset="-120"/>
-              </a:rPr>
-              <a:t>DynamoDB</a:t>
-            </a:r>
-            <a:endParaRPr lang="en-US" sz="1350" dirty="0"/>
-          </a:p>
-        </p:txBody>
-      </p:sp>
-      <p:sp>
-        <p:nvSpPr>
-          <p:cNvPr id="26" name="Text 24"/>
-          <p:cNvSpPr/>
-          <p:nvPr/>
-        </p:nvSpPr>
-        <p:spPr>
-          <a:xfrm>
-            <a:off x="6644488" y="4745736"/>
-            <a:ext cx="1463040" cy="658368"/>
-          </a:xfrm>
-          <a:prstGeom prst="rect">
-            <a:avLst/>
-          </a:prstGeom>
-          <a:noFill/>
-          <a:ln/>
-        </p:spPr>
-        <p:txBody>
-          <a:bodyPr wrap="square" lIns="0" tIns="0" rIns="0" bIns="0" rtlCol="0" anchor="ctr"/>
-          <a:lstStyle/>
-          <a:p>
-            <a:pPr algn="r" indent="0" marL="0">
-              <a:buNone/>
-            </a:pPr>
-            <a:r>
-              <a:rPr lang="en-US" sz="950" dirty="0">
-                <a:solidFill>
-                  <a:srgbClr val="626E78"/>
-                </a:solidFill>
-                <a:latin typeface="Calibri" pitchFamily="34" charset="0"/>
-                <a:ea typeface="Calibri" pitchFamily="34" charset="-122"/>
-                <a:cs typeface="Calibri" pitchFamily="34" charset="-120"/>
-              </a:rPr>
-              <a:t>window aggregates</a:t>
-            </a:r>
-            <a:endParaRPr lang="en-US" sz="950" dirty="0"/>
-          </a:p>
-        </p:txBody>
-      </p:sp>
-      <p:sp>
-        <p:nvSpPr>
-          <p:cNvPr id="27" name="Shape 25"/>
-          <p:cNvSpPr/>
-          <p:nvPr/>
-        </p:nvSpPr>
-        <p:spPr>
-          <a:xfrm>
-            <a:off x="6095848" y="5404104"/>
-            <a:ext cx="0" cy="219456"/>
-          </a:xfrm>
-          <a:prstGeom prst="line">
-            <a:avLst/>
-          </a:prstGeom>
-          <a:noFill/>
-          <a:ln w="25400">
-            <a:solidFill>
-              <a:srgbClr val="74889A"/>
-            </a:solidFill>
-            <a:prstDash val="solid"/>
-            <a:tailEnd type="triangle"/>
-          </a:ln>
-        </p:spPr>
-      </p:sp>
-      <p:sp>
-        <p:nvSpPr>
-          <p:cNvPr id="28" name="Shape 26"/>
-          <p:cNvSpPr/>
-          <p:nvPr/>
-        </p:nvSpPr>
-        <p:spPr>
-          <a:xfrm>
-            <a:off x="3992728" y="5623560"/>
-            <a:ext cx="4206240" cy="658368"/>
-          </a:xfrm>
-          <a:prstGeom prst="roundRect">
-            <a:avLst>
-              <a:gd name="adj" fmla="val 11111"/>
-            </a:avLst>
-          </a:prstGeom>
-          <a:solidFill>
-            <a:srgbClr val="EEF1F4"/>
-          </a:solidFill>
-          <a:ln w="17780">
-            <a:solidFill>
-              <a:srgbClr val="4C6579"/>
-            </a:solidFill>
-            <a:prstDash val="solid"/>
-          </a:ln>
-        </p:spPr>
-      </p:sp>
-      <p:sp>
-        <p:nvSpPr>
-          <p:cNvPr id="29" name="Shape 27"/>
-          <p:cNvSpPr/>
-          <p:nvPr/>
-        </p:nvSpPr>
-        <p:spPr>
-          <a:xfrm>
-            <a:off x="4193896" y="5870448"/>
-            <a:ext cx="164592" cy="164592"/>
-          </a:xfrm>
-          <a:prstGeom prst="ellipse">
-            <a:avLst/>
-          </a:prstGeom>
-          <a:solidFill>
-            <a:srgbClr val="4C6579"/>
-          </a:solidFill>
-          <a:ln/>
-        </p:spPr>
-      </p:sp>
-      <p:sp>
-        <p:nvSpPr>
-          <p:cNvPr id="30" name="Text 28"/>
-          <p:cNvSpPr/>
-          <p:nvPr/>
-        </p:nvSpPr>
-        <p:spPr>
-          <a:xfrm>
-            <a:off x="4495648" y="5623560"/>
-            <a:ext cx="2194560" cy="658368"/>
-          </a:xfrm>
-          <a:prstGeom prst="rect">
-            <a:avLst/>
-          </a:prstGeom>
-          <a:noFill/>
-          <a:ln/>
-        </p:spPr>
-        <p:txBody>
-          <a:bodyPr wrap="square" lIns="0" tIns="0" rIns="0" bIns="0" rtlCol="0" anchor="ctr"/>
-          <a:lstStyle/>
-          <a:p>
-            <a:pPr indent="0" marL="0">
-              <a:buNone/>
-            </a:pPr>
-            <a:r>
-              <a:rPr lang="en-US" sz="1350" b="1" dirty="0">
-                <a:solidFill>
-                  <a:srgbClr val="20262D"/>
-                </a:solidFill>
-                <a:latin typeface="Calibri" pitchFamily="34" charset="0"/>
-                <a:ea typeface="Calibri" pitchFamily="34" charset="-122"/>
-                <a:cs typeface="Calibri" pitchFamily="34" charset="-120"/>
-              </a:rPr>
-              <a:t>API GW + S3</a:t>
-            </a:r>
-            <a:endParaRPr lang="en-US" sz="1350" dirty="0"/>
-          </a:p>
-        </p:txBody>
-      </p:sp>
-      <p:sp>
-        <p:nvSpPr>
-          <p:cNvPr id="31" name="Text 29"/>
-          <p:cNvSpPr/>
-          <p:nvPr/>
-        </p:nvSpPr>
-        <p:spPr>
-          <a:xfrm>
-            <a:off x="6644488" y="5623560"/>
-            <a:ext cx="1463040" cy="658368"/>
-          </a:xfrm>
-          <a:prstGeom prst="rect">
-            <a:avLst/>
-          </a:prstGeom>
-          <a:noFill/>
-          <a:ln/>
-        </p:spPr>
-        <p:txBody>
-          <a:bodyPr wrap="square" lIns="0" tIns="0" rIns="0" bIns="0" rtlCol="0" anchor="ctr"/>
-          <a:lstStyle/>
-          <a:p>
-            <a:pPr algn="r" indent="0" marL="0">
-              <a:buNone/>
-            </a:pPr>
-            <a:r>
-              <a:rPr lang="en-US" sz="950" dirty="0">
-                <a:solidFill>
-                  <a:srgbClr val="626E78"/>
-                </a:solidFill>
-                <a:latin typeface="Calibri" pitchFamily="34" charset="0"/>
-                <a:ea typeface="Calibri" pitchFamily="34" charset="-122"/>
-                <a:cs typeface="Calibri" pitchFamily="34" charset="-120"/>
-              </a:rPr>
               <a:t>fleet dashboard</a:t>
             </a:r>
-            <a:endParaRPr lang="en-US" sz="950" dirty="0"/>
-          </a:p>
-        </p:txBody>
-      </p:sp>
-      <p:sp>
-        <p:nvSpPr>
-          <p:cNvPr id="32" name="Text 30"/>
-          <p:cNvSpPr/>
-          <p:nvPr/>
-        </p:nvSpPr>
-        <p:spPr>
-          <a:xfrm>
-            <a:off x="2438248" y="1234440"/>
-            <a:ext cx="1371600" cy="365760"/>
-          </a:xfrm>
-          <a:prstGeom prst="rect">
-            <a:avLst/>
-          </a:prstGeom>
-          <a:noFill/>
-          <a:ln/>
-        </p:spPr>
-        <p:txBody>
-          <a:bodyPr wrap="square" rtlCol="0" anchor="ctr"/>
-          <a:lstStyle/>
-          <a:p>
-            <a:pPr algn="r" indent="0" marL="0">
-              <a:buNone/>
-            </a:pPr>
-            <a:r>
-              <a:rPr lang="en-US" sz="1100" b="1" spc="200" kern="0" dirty="0">
-                <a:solidFill>
-                  <a:srgbClr val="74889A"/>
-                </a:solidFill>
-                <a:latin typeface="Calibri" pitchFamily="34" charset="0"/>
-                <a:ea typeface="Calibri" pitchFamily="34" charset="-122"/>
-                <a:cs typeface="Calibri" pitchFamily="34" charset="-120"/>
-              </a:rPr>
-              <a:t>EDGE</a:t>
-            </a:r>
-            <a:endParaRPr lang="en-US" sz="1100" dirty="0"/>
-          </a:p>
-        </p:txBody>
-      </p:sp>
-      <p:sp>
-        <p:nvSpPr>
-          <p:cNvPr id="33" name="Text 31"/>
-          <p:cNvSpPr/>
-          <p:nvPr/>
-        </p:nvSpPr>
-        <p:spPr>
-          <a:xfrm>
-            <a:off x="2438248" y="2990088"/>
-            <a:ext cx="1371600" cy="365760"/>
-          </a:xfrm>
-          <a:prstGeom prst="rect">
-            <a:avLst/>
-          </a:prstGeom>
-          <a:noFill/>
-          <a:ln/>
-        </p:spPr>
-        <p:txBody>
-          <a:bodyPr wrap="square" rtlCol="0" anchor="ctr"/>
-          <a:lstStyle/>
-          <a:p>
-            <a:pPr algn="r" indent="0" marL="0">
-              <a:buNone/>
-            </a:pPr>
-            <a:r>
-              <a:rPr lang="en-US" sz="1100" b="1" spc="200" kern="0" dirty="0">
-                <a:solidFill>
-                  <a:srgbClr val="33414F"/>
-                </a:solidFill>
-                <a:latin typeface="Calibri" pitchFamily="34" charset="0"/>
-                <a:ea typeface="Calibri" pitchFamily="34" charset="-122"/>
-                <a:cs typeface="Calibri" pitchFamily="34" charset="-120"/>
-              </a:rPr>
-              <a:t>CLOUD</a:t>
-            </a:r>
-            <a:endParaRPr lang="en-US" sz="1100" dirty="0"/>
-          </a:p>
-        </p:txBody>
-      </p:sp>
-      <p:sp>
-        <p:nvSpPr>
-          <p:cNvPr id="34" name="Text 32"/>
-          <p:cNvSpPr/>
-          <p:nvPr/>
-        </p:nvSpPr>
-        <p:spPr>
-          <a:xfrm>
-            <a:off x="8656168" y="2743200"/>
-            <a:ext cx="3291840" cy="2194560"/>
-          </a:xfrm>
-          <a:prstGeom prst="rect">
-            <a:avLst/>
-          </a:prstGeom>
-          <a:noFill/>
-          <a:ln/>
-        </p:spPr>
-        <p:txBody>
-          <a:bodyPr wrap="square" rtlCol="0" anchor="ctr"/>
-          <a:lstStyle/>
-          <a:p>
-            <a:pPr indent="0" marL="0">
-              <a:buNone/>
-            </a:pPr>
-            <a:r>
-              <a:rPr lang="en-US" sz="1500" i="1" dirty="0">
-                <a:solidFill>
-                  <a:srgbClr val="33414F"/>
-                </a:solidFill>
-                <a:latin typeface="Calibri" pitchFamily="34" charset="0"/>
-                <a:ea typeface="Calibri" pitchFamily="34" charset="-122"/>
-                <a:cs typeface="Calibri" pitchFamily="34" charset="-120"/>
-              </a:rPr>
-              <a:t>Only compact window aggregates cross to the cloud; raw samples never leave the edge, and alerts fire beside the robots.</a:t>
-            </a:r>
-            <a:endParaRPr lang="en-US" sz="1500" dirty="0"/>
+            <a:endParaRPr lang="en-US" sz="900" dirty="0"/>
           </a:p>
         </p:txBody>
       </p:sp>
@@ -2565,7 +2490,7 @@
     <p:bg>
       <p:bgPr>
         <a:solidFill>
-          <a:srgbClr val="FFFFFF"/>
+          <a:srgbClr val="05070A"/>
         </a:solidFill>
       </p:bgPr>
     </p:bg>
@@ -2585,14 +2510,177 @@
       </p:grpSpPr>
       <p:sp>
         <p:nvSpPr>
-          <p:cNvPr id="2" name="Text 0"/>
-          <p:cNvSpPr/>
-          <p:nvPr/>
-        </p:nvSpPr>
-        <p:spPr>
-          <a:xfrm>
-            <a:off x="640080" y="457200"/>
-            <a:ext cx="7315200" cy="640080"/>
+          <p:cNvPr id="2" name="Shape 0"/>
+          <p:cNvSpPr/>
+          <p:nvPr/>
+        </p:nvSpPr>
+        <p:spPr>
+          <a:xfrm>
+            <a:off x="457200" y="548640"/>
+            <a:ext cx="0" cy="5760720"/>
+          </a:xfrm>
+          <a:prstGeom prst="line">
+            <a:avLst/>
+          </a:prstGeom>
+          <a:noFill/>
+          <a:ln w="31750">
+            <a:solidFill>
+              <a:srgbClr val="FF8A1E"/>
+            </a:solidFill>
+            <a:prstDash val="solid"/>
+          </a:ln>
+        </p:spPr>
+      </p:sp>
+      <p:sp>
+        <p:nvSpPr>
+          <p:cNvPr id="3" name="Shape 1"/>
+          <p:cNvSpPr/>
+          <p:nvPr/>
+        </p:nvSpPr>
+        <p:spPr>
+          <a:xfrm>
+            <a:off x="11734495" y="548640"/>
+            <a:ext cx="0" cy="5760720"/>
+          </a:xfrm>
+          <a:prstGeom prst="line">
+            <a:avLst/>
+          </a:prstGeom>
+          <a:noFill/>
+          <a:ln w="31750">
+            <a:solidFill>
+              <a:srgbClr val="FF8A1E"/>
+            </a:solidFill>
+            <a:prstDash val="solid"/>
+          </a:ln>
+        </p:spPr>
+      </p:sp>
+      <p:sp>
+        <p:nvSpPr>
+          <p:cNvPr id="4" name="Text 2"/>
+          <p:cNvSpPr/>
+          <p:nvPr/>
+        </p:nvSpPr>
+        <p:spPr>
+          <a:xfrm>
+            <a:off x="914400" y="731520"/>
+            <a:ext cx="914400" cy="640080"/>
+          </a:xfrm>
+          <a:prstGeom prst="rect">
+            <a:avLst/>
+          </a:prstGeom>
+          <a:noFill/>
+          <a:ln/>
+        </p:spPr>
+        <p:txBody>
+          <a:bodyPr wrap="square" lIns="0" tIns="0" rIns="0" bIns="0" rtlCol="0" anchor="ctr"/>
+          <a:lstStyle/>
+          <a:p>
+            <a:pPr indent="0" marL="0">
+              <a:buNone/>
+            </a:pPr>
+            <a:r>
+              <a:rPr lang="en-US" sz="3000" b="1" dirty="0">
+                <a:solidFill>
+                  <a:srgbClr val="FF8A1E"/>
+                </a:solidFill>
+                <a:latin typeface="Century Gothic" pitchFamily="34" charset="0"/>
+                <a:ea typeface="Century Gothic" pitchFamily="34" charset="-122"/>
+                <a:cs typeface="Century Gothic" pitchFamily="34" charset="-120"/>
+              </a:rPr>
+              <a:t>02</a:t>
+            </a:r>
+            <a:endParaRPr lang="en-US" sz="3000" dirty="0"/>
+          </a:p>
+        </p:txBody>
+      </p:sp>
+      <p:sp>
+        <p:nvSpPr>
+          <p:cNvPr id="5" name="Text 3"/>
+          <p:cNvSpPr/>
+          <p:nvPr/>
+        </p:nvSpPr>
+        <p:spPr>
+          <a:xfrm>
+            <a:off x="1783080" y="905256"/>
+            <a:ext cx="9494215" cy="274320"/>
+          </a:xfrm>
+          <a:prstGeom prst="rect">
+            <a:avLst/>
+          </a:prstGeom>
+          <a:noFill/>
+          <a:ln/>
+        </p:spPr>
+        <p:txBody>
+          <a:bodyPr wrap="square" lIns="0" tIns="0" rIns="0" bIns="0" rtlCol="0" anchor="ctr"/>
+          <a:lstStyle/>
+          <a:p>
+            <a:pPr indent="0" marL="0">
+              <a:buNone/>
+            </a:pPr>
+            <a:r>
+              <a:rPr lang="en-US" sz="1100" b="1" spc="200" kern="0" dirty="0">
+                <a:solidFill>
+                  <a:srgbClr val="8B98A6"/>
+                </a:solidFill>
+                <a:latin typeface="Calibri" pitchFamily="34" charset="0"/>
+                <a:ea typeface="Calibri" pitchFamily="34" charset="-122"/>
+                <a:cs typeface="Calibri" pitchFamily="34" charset="-120"/>
+              </a:rPr>
+              <a:t>LIVE DEMO</a:t>
+            </a:r>
+            <a:endParaRPr lang="en-US" sz="1100" dirty="0"/>
+          </a:p>
+        </p:txBody>
+      </p:sp>
+      <p:sp>
+        <p:nvSpPr>
+          <p:cNvPr id="6" name="Text 4"/>
+          <p:cNvSpPr/>
+          <p:nvPr/>
+        </p:nvSpPr>
+        <p:spPr>
+          <a:xfrm>
+            <a:off x="914400" y="1380744"/>
+            <a:ext cx="10362895" cy="640080"/>
+          </a:xfrm>
+          <a:prstGeom prst="rect">
+            <a:avLst/>
+          </a:prstGeom>
+          <a:noFill/>
+          <a:ln/>
+        </p:spPr>
+        <p:txBody>
+          <a:bodyPr wrap="square" lIns="0" tIns="0" rIns="0" bIns="0" rtlCol="0" anchor="ctr"/>
+          <a:lstStyle/>
+          <a:p>
+            <a:pPr indent="0" marL="0">
+              <a:buNone/>
+            </a:pPr>
+            <a:r>
+              <a:rPr lang="en-US" sz="2300" b="1" dirty="0">
+                <a:solidFill>
+                  <a:srgbClr val="E6EDF3"/>
+                </a:solidFill>
+                <a:latin typeface="Century Gothic" pitchFamily="34" charset="0"/>
+                <a:ea typeface="Century Gothic" pitchFamily="34" charset="-122"/>
+                <a:cs typeface="Century Gothic" pitchFamily="34" charset="-120"/>
+              </a:rPr>
+              <a:t>See it running on AWS</a:t>
+            </a:r>
+            <a:endParaRPr lang="en-US" sz="2300" dirty="0"/>
+          </a:p>
+        </p:txBody>
+      </p:sp>
+      <p:sp>
+        <p:nvSpPr>
+          <p:cNvPr id="7" name="Text 5"/>
+          <p:cNvSpPr/>
+          <p:nvPr/>
+        </p:nvSpPr>
+        <p:spPr>
+          <a:xfrm>
+            <a:off x="914400" y="1901952"/>
+            <a:ext cx="10362895" cy="274320"/>
           </a:xfrm>
           <a:prstGeom prst="rect">
             <a:avLst/>
@@ -2608,48 +2696,9 @@
               <a:buNone/>
             </a:pPr>
             <a:r>
-              <a:rPr lang="en-US" sz="3000" b="1" dirty="0">
-                <a:solidFill>
-                  <a:srgbClr val="20262D"/>
-                </a:solidFill>
-                <a:latin typeface="Times New Roman" pitchFamily="34" charset="0"/>
-                <a:ea typeface="Times New Roman" pitchFamily="34" charset="-122"/>
-                <a:cs typeface="Times New Roman" pitchFamily="34" charset="-120"/>
-              </a:rPr>
-              <a:t>Live Demo</a:t>
-            </a:r>
-            <a:endParaRPr lang="en-US" sz="3000" dirty="0"/>
-          </a:p>
-        </p:txBody>
-      </p:sp>
-      <p:sp>
-        <p:nvSpPr>
-          <p:cNvPr id="3" name="Text 1"/>
-          <p:cNvSpPr/>
-          <p:nvPr/>
-        </p:nvSpPr>
-        <p:spPr>
-          <a:xfrm>
-            <a:off x="658368" y="1143000"/>
-            <a:ext cx="10972800" cy="365760"/>
-          </a:xfrm>
-          <a:prstGeom prst="rect">
-            <a:avLst/>
-          </a:prstGeom>
-          <a:noFill/>
-          <a:ln/>
-        </p:spPr>
-        <p:txBody>
-          <a:bodyPr wrap="square" rtlCol="0" anchor="ctr"/>
-          <a:lstStyle/>
-          <a:p>
-            <a:pPr indent="0" marL="0">
-              <a:buNone/>
-            </a:pPr>
-            <a:r>
-              <a:rPr lang="en-US" sz="1400" dirty="0">
-                <a:solidFill>
-                  <a:srgbClr val="4C6579"/>
+              <a:rPr lang="en-US" sz="1100" dirty="0">
+                <a:solidFill>
+                  <a:srgbClr val="FF8A1E"/>
                 </a:solidFill>
                 <a:latin typeface="Consolas" pitchFamily="34" charset="0"/>
                 <a:ea typeface="Consolas" pitchFamily="34" charset="-122"/>
@@ -2657,32 +2706,30 @@
               </a:rPr>
               <a:t>wrf-frontend-789399341650.s3.us-east-1.amazonaws.com</a:t>
             </a:r>
-            <a:endParaRPr lang="en-US" sz="1400" dirty="0"/>
-          </a:p>
-        </p:txBody>
-      </p:sp>
-      <p:sp>
-        <p:nvSpPr>
-          <p:cNvPr id="4" name="Shape 2"/>
-          <p:cNvSpPr/>
-          <p:nvPr/>
-        </p:nvSpPr>
-        <p:spPr>
-          <a:xfrm>
-            <a:off x="640080" y="1828800"/>
-            <a:ext cx="10881360" cy="1371600"/>
+            <a:endParaRPr lang="en-US" sz="1100" dirty="0"/>
+          </a:p>
+        </p:txBody>
+      </p:sp>
+      <p:sp>
+        <p:nvSpPr>
+          <p:cNvPr id="8" name="Shape 6"/>
+          <p:cNvSpPr/>
+          <p:nvPr/>
+        </p:nvSpPr>
+        <p:spPr>
+          <a:xfrm>
+            <a:off x="914400" y="2514600"/>
+            <a:ext cx="3210458" cy="3566160"/>
           </a:xfrm>
           <a:prstGeom prst="roundRect">
-            <a:avLst>
-              <a:gd name="adj" fmla="val 6667"/>
-            </a:avLst>
+            <a:avLst/>
           </a:prstGeom>
           <a:solidFill>
-            <a:srgbClr val="EEF1F4"/>
+            <a:srgbClr val="12151B"/>
           </a:solidFill>
-          <a:ln w="15240">
+          <a:ln w="12700">
             <a:solidFill>
-              <a:srgbClr val="4C6579"/>
+              <a:srgbClr val="26292F"/>
             </a:solidFill>
             <a:prstDash val="solid"/>
           </a:ln>
@@ -2690,34 +2737,14 @@
       </p:sp>
       <p:sp>
         <p:nvSpPr>
-          <p:cNvPr id="5" name="Shape 3"/>
-          <p:cNvSpPr/>
-          <p:nvPr/>
-        </p:nvSpPr>
-        <p:spPr>
-          <a:xfrm>
-            <a:off x="960120" y="2203704"/>
-            <a:ext cx="621792" cy="621792"/>
-          </a:xfrm>
-          <a:prstGeom prst="ellipse">
-            <a:avLst/>
-          </a:prstGeom>
-          <a:solidFill>
-            <a:srgbClr val="33414F"/>
-          </a:solidFill>
-          <a:ln/>
-        </p:spPr>
-      </p:sp>
-      <p:sp>
-        <p:nvSpPr>
-          <p:cNvPr id="6" name="Text 4"/>
-          <p:cNvSpPr/>
-          <p:nvPr/>
-        </p:nvSpPr>
-        <p:spPr>
-          <a:xfrm>
-            <a:off x="960120" y="2203704"/>
-            <a:ext cx="621792" cy="621792"/>
+          <p:cNvPr id="9" name="Text 7"/>
+          <p:cNvSpPr/>
+          <p:nvPr/>
+        </p:nvSpPr>
+        <p:spPr>
+          <a:xfrm>
+            <a:off x="1188720" y="2752344"/>
+            <a:ext cx="1828800" cy="777240"/>
           </a:xfrm>
           <a:prstGeom prst="rect">
             <a:avLst/>
@@ -2729,34 +2756,76 @@
           <a:bodyPr wrap="square" lIns="0" tIns="0" rIns="0" bIns="0" rtlCol="0" anchor="ctr"/>
           <a:lstStyle/>
           <a:p>
-            <a:pPr algn="ctr" indent="0" marL="0">
-              <a:buNone/>
-            </a:pPr>
-            <a:r>
-              <a:rPr lang="en-US" sz="2200" b="1" dirty="0">
-                <a:solidFill>
-                  <a:srgbClr val="FFFFFF"/>
-                </a:solidFill>
-                <a:latin typeface="Times New Roman" pitchFamily="34" charset="0"/>
-                <a:ea typeface="Times New Roman" pitchFamily="34" charset="-122"/>
-                <a:cs typeface="Times New Roman" pitchFamily="34" charset="-120"/>
-              </a:rPr>
-              <a:t>1</a:t>
-            </a:r>
-            <a:endParaRPr lang="en-US" sz="2200" dirty="0"/>
-          </a:p>
-        </p:txBody>
-      </p:sp>
-      <p:sp>
-        <p:nvSpPr>
-          <p:cNvPr id="7" name="Text 5"/>
-          <p:cNvSpPr/>
-          <p:nvPr/>
-        </p:nvSpPr>
-        <p:spPr>
-          <a:xfrm>
-            <a:off x="1828800" y="2029968"/>
-            <a:ext cx="9418320" cy="411480"/>
+            <a:pPr indent="0" marL="0">
+              <a:buNone/>
+            </a:pPr>
+            <a:r>
+              <a:rPr lang="en-US" sz="3800" b="1" dirty="0">
+                <a:solidFill>
+                  <a:srgbClr val="FF8A1E"/>
+                </a:solidFill>
+                <a:latin typeface="Century Gothic" pitchFamily="34" charset="0"/>
+                <a:ea typeface="Century Gothic" pitchFamily="34" charset="-122"/>
+                <a:cs typeface="Century Gothic" pitchFamily="34" charset="-120"/>
+              </a:rPr>
+              <a:t>01</a:t>
+            </a:r>
+            <a:endParaRPr lang="en-US" sz="3800" dirty="0"/>
+          </a:p>
+        </p:txBody>
+      </p:sp>
+      <p:sp>
+        <p:nvSpPr>
+          <p:cNvPr id="10" name="Text 8"/>
+          <p:cNvSpPr/>
+          <p:nvPr/>
+        </p:nvSpPr>
+        <p:spPr>
+          <a:xfrm>
+            <a:off x="1207008" y="3566160"/>
+            <a:ext cx="2661818" cy="868680"/>
+          </a:xfrm>
+          <a:prstGeom prst="rect">
+            <a:avLst/>
+          </a:prstGeom>
+          <a:noFill/>
+          <a:ln/>
+        </p:spPr>
+        <p:txBody>
+          <a:bodyPr wrap="square" lIns="0" tIns="0" rIns="0" bIns="0" rtlCol="0" anchor="t"/>
+          <a:lstStyle/>
+          <a:p>
+            <a:pPr indent="0" marL="0">
+              <a:lnSpc>
+                <a:spcPct val="100000"/>
+              </a:lnSpc>
+              <a:buNone/>
+            </a:pPr>
+            <a:r>
+              <a:rPr lang="en-US" sz="1550" b="1" dirty="0">
+                <a:solidFill>
+                  <a:srgbClr val="E6EDF3"/>
+                </a:solidFill>
+                <a:latin typeface="Century Gothic" pitchFamily="34" charset="0"/>
+                <a:ea typeface="Century Gothic" pitchFamily="34" charset="-122"/>
+                <a:cs typeface="Century Gothic" pitchFamily="34" charset="-120"/>
+              </a:rPr>
+              <a:t>Ten robots across two zones</a:t>
+            </a:r>
+            <a:endParaRPr lang="en-US" sz="1550" dirty="0"/>
+          </a:p>
+        </p:txBody>
+      </p:sp>
+      <p:sp>
+        <p:nvSpPr>
+          <p:cNvPr id="11" name="Text 9"/>
+          <p:cNvSpPr/>
+          <p:nvPr/>
+        </p:nvSpPr>
+        <p:spPr>
+          <a:xfrm>
+            <a:off x="1207008" y="4434840"/>
+            <a:ext cx="2661818" cy="1463040"/>
           </a:xfrm>
           <a:prstGeom prst="rect">
             <a:avLst/>
@@ -2769,33 +2838,61 @@
           <a:lstStyle/>
           <a:p>
             <a:pPr indent="0" marL="0">
-              <a:buNone/>
-            </a:pPr>
-            <a:r>
-              <a:rPr lang="en-US" sz="1700" b="1" dirty="0">
-                <a:solidFill>
-                  <a:srgbClr val="20262D"/>
+              <a:lnSpc>
+                <a:spcPct val="120000"/>
+              </a:lnSpc>
+              <a:buNone/>
+            </a:pPr>
+            <a:r>
+              <a:rPr lang="en-US" sz="1200" dirty="0">
+                <a:solidFill>
+                  <a:srgbClr val="8B98A6"/>
                 </a:solidFill>
                 <a:latin typeface="Calibri" pitchFamily="34" charset="0"/>
                 <a:ea typeface="Calibri" pitchFamily="34" charset="-122"/>
                 <a:cs typeface="Calibri" pitchFamily="34" charset="-120"/>
               </a:rPr>
-              <a:t>Ten robots across two zones</a:t>
-            </a:r>
-            <a:endParaRPr lang="en-US" sz="1700" dirty="0"/>
-          </a:p>
-        </p:txBody>
-      </p:sp>
-      <p:sp>
-        <p:nvSpPr>
-          <p:cNvPr id="8" name="Text 6"/>
-          <p:cNvSpPr/>
-          <p:nvPr/>
-        </p:nvSpPr>
-        <p:spPr>
-          <a:xfrm>
-            <a:off x="1828800" y="2450592"/>
-            <a:ext cx="9418320" cy="594360"/>
+              <a:t>Battery, position, task load, motor and temperature for every robot, fifty live signals updating on the fleet board.</a:t>
+            </a:r>
+            <a:endParaRPr lang="en-US" sz="1200" dirty="0"/>
+          </a:p>
+        </p:txBody>
+      </p:sp>
+      <p:sp>
+        <p:nvSpPr>
+          <p:cNvPr id="12" name="Shape 10"/>
+          <p:cNvSpPr/>
+          <p:nvPr/>
+        </p:nvSpPr>
+        <p:spPr>
+          <a:xfrm>
+            <a:off x="4490618" y="2514600"/>
+            <a:ext cx="3210458" cy="3566160"/>
+          </a:xfrm>
+          <a:prstGeom prst="roundRect">
+            <a:avLst/>
+          </a:prstGeom>
+          <a:solidFill>
+            <a:srgbClr val="12151B"/>
+          </a:solidFill>
+          <a:ln w="12700">
+            <a:solidFill>
+              <a:srgbClr val="26292F"/>
+            </a:solidFill>
+            <a:prstDash val="solid"/>
+          </a:ln>
+        </p:spPr>
+      </p:sp>
+      <p:sp>
+        <p:nvSpPr>
+          <p:cNvPr id="13" name="Text 11"/>
+          <p:cNvSpPr/>
+          <p:nvPr/>
+        </p:nvSpPr>
+        <p:spPr>
+          <a:xfrm>
+            <a:off x="4764938" y="2752344"/>
+            <a:ext cx="1828800" cy="777240"/>
           </a:xfrm>
           <a:prstGeom prst="rect">
             <a:avLst/>
@@ -2808,48 +2905,127 @@
           <a:lstStyle/>
           <a:p>
             <a:pPr indent="0" marL="0">
+              <a:buNone/>
+            </a:pPr>
+            <a:r>
+              <a:rPr lang="en-US" sz="3800" b="1" dirty="0">
+                <a:solidFill>
+                  <a:srgbClr val="FF8A1E"/>
+                </a:solidFill>
+                <a:latin typeface="Century Gothic" pitchFamily="34" charset="0"/>
+                <a:ea typeface="Century Gothic" pitchFamily="34" charset="-122"/>
+                <a:cs typeface="Century Gothic" pitchFamily="34" charset="-120"/>
+              </a:rPr>
+              <a:t>02</a:t>
+            </a:r>
+            <a:endParaRPr lang="en-US" sz="3800" dirty="0"/>
+          </a:p>
+        </p:txBody>
+      </p:sp>
+      <p:sp>
+        <p:nvSpPr>
+          <p:cNvPr id="14" name="Text 12"/>
+          <p:cNvSpPr/>
+          <p:nvPr/>
+        </p:nvSpPr>
+        <p:spPr>
+          <a:xfrm>
+            <a:off x="4783226" y="3566160"/>
+            <a:ext cx="2661818" cy="868680"/>
+          </a:xfrm>
+          <a:prstGeom prst="rect">
+            <a:avLst/>
+          </a:prstGeom>
+          <a:noFill/>
+          <a:ln/>
+        </p:spPr>
+        <p:txBody>
+          <a:bodyPr wrap="square" lIns="0" tIns="0" rIns="0" bIns="0" rtlCol="0" anchor="t"/>
+          <a:lstStyle/>
+          <a:p>
+            <a:pPr indent="0" marL="0">
               <a:lnSpc>
-                <a:spcPct val="105000"/>
+                <a:spcPct val="100000"/>
               </a:lnSpc>
               <a:buNone/>
             </a:pPr>
             <a:r>
-              <a:rPr lang="en-US" sz="1300" dirty="0">
-                <a:solidFill>
-                  <a:srgbClr val="626E78"/>
+              <a:rPr lang="en-US" sz="1550" b="1" dirty="0">
+                <a:solidFill>
+                  <a:srgbClr val="E6EDF3"/>
+                </a:solidFill>
+                <a:latin typeface="Century Gothic" pitchFamily="34" charset="0"/>
+                <a:ea typeface="Century Gothic" pitchFamily="34" charset="-122"/>
+                <a:cs typeface="Century Gothic" pitchFamily="34" charset="-120"/>
+              </a:rPr>
+              <a:t>Battery degradation, visible early</a:t>
+            </a:r>
+            <a:endParaRPr lang="en-US" sz="1550" dirty="0"/>
+          </a:p>
+        </p:txBody>
+      </p:sp>
+      <p:sp>
+        <p:nvSpPr>
+          <p:cNvPr id="15" name="Text 13"/>
+          <p:cNvSpPr/>
+          <p:nvPr/>
+        </p:nvSpPr>
+        <p:spPr>
+          <a:xfrm>
+            <a:off x="4783226" y="4434840"/>
+            <a:ext cx="2661818" cy="1463040"/>
+          </a:xfrm>
+          <a:prstGeom prst="rect">
+            <a:avLst/>
+          </a:prstGeom>
+          <a:noFill/>
+          <a:ln/>
+        </p:spPr>
+        <p:txBody>
+          <a:bodyPr wrap="square" lIns="0" tIns="0" rIns="0" bIns="0" rtlCol="0" anchor="ctr"/>
+          <a:lstStyle/>
+          <a:p>
+            <a:pPr indent="0" marL="0">
+              <a:lnSpc>
+                <a:spcPct val="120000"/>
+              </a:lnSpc>
+              <a:buNone/>
+            </a:pPr>
+            <a:r>
+              <a:rPr lang="en-US" sz="1200" dirty="0">
+                <a:solidFill>
+                  <a:srgbClr val="8B98A6"/>
                 </a:solidFill>
                 <a:latin typeface="Calibri" pitchFamily="34" charset="0"/>
                 <a:ea typeface="Calibri" pitchFamily="34" charset="-122"/>
                 <a:cs typeface="Calibri" pitchFamily="34" charset="-120"/>
               </a:rPr>
-              <a:t>Battery, position, task load, motor and temperature for every robot, fifty live signals updating on the fleet board.</a:t>
-            </a:r>
-            <a:endParaRPr lang="en-US" sz="1300" dirty="0"/>
-          </a:p>
-        </p:txBody>
-      </p:sp>
-      <p:sp>
-        <p:nvSpPr>
-          <p:cNvPr id="9" name="Shape 7"/>
-          <p:cNvSpPr/>
-          <p:nvPr/>
-        </p:nvSpPr>
-        <p:spPr>
-          <a:xfrm>
-            <a:off x="640080" y="3401568"/>
-            <a:ext cx="5303520" cy="2606040"/>
+              <a:t>The battery telemetry shows the slow decline a periodic check misses, and an alert raises when a robot crosses its threshold.</a:t>
+            </a:r>
+            <a:endParaRPr lang="en-US" sz="1200" dirty="0"/>
+          </a:p>
+        </p:txBody>
+      </p:sp>
+      <p:sp>
+        <p:nvSpPr>
+          <p:cNvPr id="16" name="Shape 14"/>
+          <p:cNvSpPr/>
+          <p:nvPr/>
+        </p:nvSpPr>
+        <p:spPr>
+          <a:xfrm>
+            <a:off x="8066837" y="2514600"/>
+            <a:ext cx="3210458" cy="3566160"/>
           </a:xfrm>
           <a:prstGeom prst="roundRect">
-            <a:avLst>
-              <a:gd name="adj" fmla="val 3509"/>
-            </a:avLst>
+            <a:avLst/>
           </a:prstGeom>
           <a:solidFill>
-            <a:srgbClr val="EEF1F4"/>
+            <a:srgbClr val="12151B"/>
           </a:solidFill>
-          <a:ln w="15240">
+          <a:ln w="12700">
             <a:solidFill>
-              <a:srgbClr val="4C6579"/>
+              <a:srgbClr val="26292F"/>
             </a:solidFill>
             <a:prstDash val="solid"/>
           </a:ln>
@@ -2857,34 +3033,14 @@
       </p:sp>
       <p:sp>
         <p:nvSpPr>
-          <p:cNvPr id="10" name="Shape 8"/>
-          <p:cNvSpPr/>
-          <p:nvPr/>
-        </p:nvSpPr>
-        <p:spPr>
-          <a:xfrm>
-            <a:off x="914400" y="3675888"/>
-            <a:ext cx="603504" cy="603504"/>
-          </a:xfrm>
-          <a:prstGeom prst="ellipse">
-            <a:avLst/>
-          </a:prstGeom>
-          <a:solidFill>
-            <a:srgbClr val="33414F"/>
-          </a:solidFill>
-          <a:ln/>
-        </p:spPr>
-      </p:sp>
-      <p:sp>
-        <p:nvSpPr>
-          <p:cNvPr id="11" name="Text 9"/>
-          <p:cNvSpPr/>
-          <p:nvPr/>
-        </p:nvSpPr>
-        <p:spPr>
-          <a:xfrm>
-            <a:off x="914400" y="3675888"/>
-            <a:ext cx="603504" cy="603504"/>
+          <p:cNvPr id="17" name="Text 15"/>
+          <p:cNvSpPr/>
+          <p:nvPr/>
+        </p:nvSpPr>
+        <p:spPr>
+          <a:xfrm>
+            <a:off x="8341157" y="2752344"/>
+            <a:ext cx="1828800" cy="777240"/>
           </a:xfrm>
           <a:prstGeom prst="rect">
             <a:avLst/>
@@ -2896,34 +3052,76 @@
           <a:bodyPr wrap="square" lIns="0" tIns="0" rIns="0" bIns="0" rtlCol="0" anchor="ctr"/>
           <a:lstStyle/>
           <a:p>
-            <a:pPr algn="ctr" indent="0" marL="0">
-              <a:buNone/>
-            </a:pPr>
-            <a:r>
-              <a:rPr lang="en-US" sz="2200" b="1" dirty="0">
-                <a:solidFill>
-                  <a:srgbClr val="FFFFFF"/>
-                </a:solidFill>
-                <a:latin typeface="Times New Roman" pitchFamily="34" charset="0"/>
-                <a:ea typeface="Times New Roman" pitchFamily="34" charset="-122"/>
-                <a:cs typeface="Times New Roman" pitchFamily="34" charset="-120"/>
-              </a:rPr>
-              <a:t>2</a:t>
-            </a:r>
-            <a:endParaRPr lang="en-US" sz="2200" dirty="0"/>
-          </a:p>
-        </p:txBody>
-      </p:sp>
-      <p:sp>
-        <p:nvSpPr>
-          <p:cNvPr id="12" name="Text 10"/>
-          <p:cNvSpPr/>
-          <p:nvPr/>
-        </p:nvSpPr>
-        <p:spPr>
-          <a:xfrm>
-            <a:off x="914400" y="4425696"/>
-            <a:ext cx="4754880" cy="777240"/>
+            <a:pPr indent="0" marL="0">
+              <a:buNone/>
+            </a:pPr>
+            <a:r>
+              <a:rPr lang="en-US" sz="3800" b="1" dirty="0">
+                <a:solidFill>
+                  <a:srgbClr val="FF8A1E"/>
+                </a:solidFill>
+                <a:latin typeface="Century Gothic" pitchFamily="34" charset="0"/>
+                <a:ea typeface="Century Gothic" pitchFamily="34" charset="-122"/>
+                <a:cs typeface="Century Gothic" pitchFamily="34" charset="-120"/>
+              </a:rPr>
+              <a:t>03</a:t>
+            </a:r>
+            <a:endParaRPr lang="en-US" sz="3800" dirty="0"/>
+          </a:p>
+        </p:txBody>
+      </p:sp>
+      <p:sp>
+        <p:nvSpPr>
+          <p:cNvPr id="18" name="Text 16"/>
+          <p:cNvSpPr/>
+          <p:nvPr/>
+        </p:nvSpPr>
+        <p:spPr>
+          <a:xfrm>
+            <a:off x="8359445" y="3566160"/>
+            <a:ext cx="2661818" cy="868680"/>
+          </a:xfrm>
+          <a:prstGeom prst="rect">
+            <a:avLst/>
+          </a:prstGeom>
+          <a:noFill/>
+          <a:ln/>
+        </p:spPr>
+        <p:txBody>
+          <a:bodyPr wrap="square" lIns="0" tIns="0" rIns="0" bIns="0" rtlCol="0" anchor="t"/>
+          <a:lstStyle/>
+          <a:p>
+            <a:pPr indent="0" marL="0">
+              <a:lnSpc>
+                <a:spcPct val="100000"/>
+              </a:lnSpc>
+              <a:buNone/>
+            </a:pPr>
+            <a:r>
+              <a:rPr lang="en-US" sz="1550" b="1" dirty="0">
+                <a:solidFill>
+                  <a:srgbClr val="E6EDF3"/>
+                </a:solidFill>
+                <a:latin typeface="Century Gothic" pitchFamily="34" charset="0"/>
+                <a:ea typeface="Century Gothic" pitchFamily="34" charset="-122"/>
+                <a:cs typeface="Century Gothic" pitchFamily="34" charset="-120"/>
+              </a:rPr>
+              <a:t>Provisioned by one command</a:t>
+            </a:r>
+            <a:endParaRPr lang="en-US" sz="1550" dirty="0"/>
+          </a:p>
+        </p:txBody>
+      </p:sp>
+      <p:sp>
+        <p:nvSpPr>
+          <p:cNvPr id="19" name="Text 17"/>
+          <p:cNvSpPr/>
+          <p:nvPr/>
+        </p:nvSpPr>
+        <p:spPr>
+          <a:xfrm>
+            <a:off x="8359445" y="4434840"/>
+            <a:ext cx="2661818" cy="1463040"/>
           </a:xfrm>
           <a:prstGeom prst="rect">
             <a:avLst/>
@@ -2936,229 +3134,23 @@
           <a:lstStyle/>
           <a:p>
             <a:pPr indent="0" marL="0">
-              <a:buNone/>
-            </a:pPr>
-            <a:r>
-              <a:rPr lang="en-US" sz="1600" b="1" dirty="0">
-                <a:solidFill>
-                  <a:srgbClr val="20262D"/>
+              <a:lnSpc>
+                <a:spcPct val="120000"/>
+              </a:lnSpc>
+              <a:buNone/>
+            </a:pPr>
+            <a:r>
+              <a:rPr lang="en-US" sz="1200" dirty="0">
+                <a:solidFill>
+                  <a:srgbClr val="8B98A6"/>
                 </a:solidFill>
                 <a:latin typeface="Calibri" pitchFamily="34" charset="0"/>
                 <a:ea typeface="Calibri" pitchFamily="34" charset="-122"/>
                 <a:cs typeface="Calibri" pitchFamily="34" charset="-120"/>
               </a:rPr>
-              <a:t>Battery degradation, visible early</a:t>
-            </a:r>
-            <a:endParaRPr lang="en-US" sz="1600" dirty="0"/>
-          </a:p>
-        </p:txBody>
-      </p:sp>
-      <p:sp>
-        <p:nvSpPr>
-          <p:cNvPr id="13" name="Text 11"/>
-          <p:cNvSpPr/>
-          <p:nvPr/>
-        </p:nvSpPr>
-        <p:spPr>
-          <a:xfrm>
-            <a:off x="914400" y="5184648"/>
-            <a:ext cx="4754880" cy="640080"/>
-          </a:xfrm>
-          <a:prstGeom prst="rect">
-            <a:avLst/>
-          </a:prstGeom>
-          <a:noFill/>
-          <a:ln/>
-        </p:spPr>
-        <p:txBody>
-          <a:bodyPr wrap="square" lIns="0" tIns="0" rIns="0" bIns="0" rtlCol="0" anchor="ctr"/>
-          <a:lstStyle/>
-          <a:p>
-            <a:pPr indent="0" marL="0">
-              <a:lnSpc>
-                <a:spcPct val="106000"/>
-              </a:lnSpc>
-              <a:buNone/>
-            </a:pPr>
-            <a:r>
-              <a:rPr lang="en-US" sz="1250" dirty="0">
-                <a:solidFill>
-                  <a:srgbClr val="626E78"/>
-                </a:solidFill>
-                <a:latin typeface="Calibri" pitchFamily="34" charset="0"/>
-                <a:ea typeface="Calibri" pitchFamily="34" charset="-122"/>
-                <a:cs typeface="Calibri" pitchFamily="34" charset="-120"/>
-              </a:rPr>
-              <a:t>The battery telemetry shows the slow decline a periodic check misses, and an alert raises when a robot crosses its threshold.</a:t>
-            </a:r>
-            <a:endParaRPr lang="en-US" sz="1250" dirty="0"/>
-          </a:p>
-        </p:txBody>
-      </p:sp>
-      <p:sp>
-        <p:nvSpPr>
-          <p:cNvPr id="14" name="Shape 12"/>
-          <p:cNvSpPr/>
-          <p:nvPr/>
-        </p:nvSpPr>
-        <p:spPr>
-          <a:xfrm>
-            <a:off x="6217920" y="3401568"/>
-            <a:ext cx="5303520" cy="2606040"/>
-          </a:xfrm>
-          <a:prstGeom prst="roundRect">
-            <a:avLst>
-              <a:gd name="adj" fmla="val 3509"/>
-            </a:avLst>
-          </a:prstGeom>
-          <a:solidFill>
-            <a:srgbClr val="EEF1F4"/>
-          </a:solidFill>
-          <a:ln w="15240">
-            <a:solidFill>
-              <a:srgbClr val="4C6579"/>
-            </a:solidFill>
-            <a:prstDash val="solid"/>
-          </a:ln>
-        </p:spPr>
-      </p:sp>
-      <p:sp>
-        <p:nvSpPr>
-          <p:cNvPr id="15" name="Shape 13"/>
-          <p:cNvSpPr/>
-          <p:nvPr/>
-        </p:nvSpPr>
-        <p:spPr>
-          <a:xfrm>
-            <a:off x="6492240" y="3675888"/>
-            <a:ext cx="603504" cy="603504"/>
-          </a:xfrm>
-          <a:prstGeom prst="ellipse">
-            <a:avLst/>
-          </a:prstGeom>
-          <a:solidFill>
-            <a:srgbClr val="33414F"/>
-          </a:solidFill>
-          <a:ln/>
-        </p:spPr>
-      </p:sp>
-      <p:sp>
-        <p:nvSpPr>
-          <p:cNvPr id="16" name="Text 14"/>
-          <p:cNvSpPr/>
-          <p:nvPr/>
-        </p:nvSpPr>
-        <p:spPr>
-          <a:xfrm>
-            <a:off x="6492240" y="3675888"/>
-            <a:ext cx="603504" cy="603504"/>
-          </a:xfrm>
-          <a:prstGeom prst="rect">
-            <a:avLst/>
-          </a:prstGeom>
-          <a:noFill/>
-          <a:ln/>
-        </p:spPr>
-        <p:txBody>
-          <a:bodyPr wrap="square" lIns="0" tIns="0" rIns="0" bIns="0" rtlCol="0" anchor="ctr"/>
-          <a:lstStyle/>
-          <a:p>
-            <a:pPr algn="ctr" indent="0" marL="0">
-              <a:buNone/>
-            </a:pPr>
-            <a:r>
-              <a:rPr lang="en-US" sz="2200" b="1" dirty="0">
-                <a:solidFill>
-                  <a:srgbClr val="FFFFFF"/>
-                </a:solidFill>
-                <a:latin typeface="Times New Roman" pitchFamily="34" charset="0"/>
-                <a:ea typeface="Times New Roman" pitchFamily="34" charset="-122"/>
-                <a:cs typeface="Times New Roman" pitchFamily="34" charset="-120"/>
-              </a:rPr>
-              <a:t>3</a:t>
-            </a:r>
-            <a:endParaRPr lang="en-US" sz="2200" dirty="0"/>
-          </a:p>
-        </p:txBody>
-      </p:sp>
-      <p:sp>
-        <p:nvSpPr>
-          <p:cNvPr id="17" name="Text 15"/>
-          <p:cNvSpPr/>
-          <p:nvPr/>
-        </p:nvSpPr>
-        <p:spPr>
-          <a:xfrm>
-            <a:off x="6492240" y="4425696"/>
-            <a:ext cx="4754880" cy="777240"/>
-          </a:xfrm>
-          <a:prstGeom prst="rect">
-            <a:avLst/>
-          </a:prstGeom>
-          <a:noFill/>
-          <a:ln/>
-        </p:spPr>
-        <p:txBody>
-          <a:bodyPr wrap="square" lIns="0" tIns="0" rIns="0" bIns="0" rtlCol="0" anchor="ctr"/>
-          <a:lstStyle/>
-          <a:p>
-            <a:pPr indent="0" marL="0">
-              <a:buNone/>
-            </a:pPr>
-            <a:r>
-              <a:rPr lang="en-US" sz="1600" b="1" dirty="0">
-                <a:solidFill>
-                  <a:srgbClr val="20262D"/>
-                </a:solidFill>
-                <a:latin typeface="Calibri" pitchFamily="34" charset="0"/>
-                <a:ea typeface="Calibri" pitchFamily="34" charset="-122"/>
-                <a:cs typeface="Calibri" pitchFamily="34" charset="-120"/>
-              </a:rPr>
-              <a:t>Provisioned by one command</a:t>
-            </a:r>
-            <a:endParaRPr lang="en-US" sz="1600" dirty="0"/>
-          </a:p>
-        </p:txBody>
-      </p:sp>
-      <p:sp>
-        <p:nvSpPr>
-          <p:cNvPr id="18" name="Text 16"/>
-          <p:cNvSpPr/>
-          <p:nvPr/>
-        </p:nvSpPr>
-        <p:spPr>
-          <a:xfrm>
-            <a:off x="6492240" y="5184648"/>
-            <a:ext cx="4754880" cy="640080"/>
-          </a:xfrm>
-          <a:prstGeom prst="rect">
-            <a:avLst/>
-          </a:prstGeom>
-          <a:noFill/>
-          <a:ln/>
-        </p:spPr>
-        <p:txBody>
-          <a:bodyPr wrap="square" lIns="0" tIns="0" rIns="0" bIns="0" rtlCol="0" anchor="ctr"/>
-          <a:lstStyle/>
-          <a:p>
-            <a:pPr indent="0" marL="0">
-              <a:lnSpc>
-                <a:spcPct val="106000"/>
-              </a:lnSpc>
-              <a:buNone/>
-            </a:pPr>
-            <a:r>
-              <a:rPr lang="en-US" sz="1250" dirty="0">
-                <a:solidFill>
-                  <a:srgbClr val="626E78"/>
-                </a:solidFill>
-                <a:latin typeface="Calibri" pitchFamily="34" charset="0"/>
-                <a:ea typeface="Calibri" pitchFamily="34" charset="-122"/>
-                <a:cs typeface="Calibri" pitchFamily="34" charset="-120"/>
-              </a:rPr>
               <a:t>Every resource behind this board came from a single Terraform apply — twenty-four resources, nothing clicked by hand.</a:t>
             </a:r>
-            <a:endParaRPr lang="en-US" sz="1250" dirty="0"/>
+            <a:endParaRPr lang="en-US" sz="1200" dirty="0"/>
           </a:p>
         </p:txBody>
       </p:sp>
@@ -3176,7 +3168,7 @@
     <p:bg>
       <p:bgPr>
         <a:solidFill>
-          <a:srgbClr val="FFFFFF"/>
+          <a:srgbClr val="05070A"/>
         </a:solidFill>
       </p:bgPr>
     </p:bg>
@@ -3196,65 +3188,22 @@
       </p:grpSpPr>
       <p:sp>
         <p:nvSpPr>
-          <p:cNvPr id="2" name="Text 0"/>
-          <p:cNvSpPr/>
-          <p:nvPr/>
-        </p:nvSpPr>
-        <p:spPr>
-          <a:xfrm>
-            <a:off x="640080" y="502920"/>
-            <a:ext cx="10972800" cy="822960"/>
-          </a:xfrm>
-          <a:prstGeom prst="rect">
-            <a:avLst/>
-          </a:prstGeom>
-          <a:noFill/>
-          <a:ln/>
-        </p:spPr>
-        <p:txBody>
-          <a:bodyPr wrap="square" rtlCol="0" anchor="t"/>
-          <a:lstStyle/>
-          <a:p>
-            <a:pPr indent="0" marL="0">
-              <a:buNone/>
-            </a:pPr>
-            <a:r>
-              <a:rPr lang="en-US" sz="2800" b="1" dirty="0">
-                <a:solidFill>
-                  <a:srgbClr val="20262D"/>
-                </a:solidFill>
-                <a:latin typeface="Times New Roman" pitchFamily="34" charset="0"/>
-                <a:ea typeface="Times New Roman" pitchFamily="34" charset="-122"/>
-                <a:cs typeface="Times New Roman" pitchFamily="34" charset="-120"/>
-              </a:rPr>
-              <a:t>Hardest Part — the bug only real AWS could expose</a:t>
-            </a:r>
-            <a:endParaRPr lang="en-US" sz="2800" dirty="0"/>
-          </a:p>
-        </p:txBody>
-      </p:sp>
-      <p:sp>
-        <p:nvSpPr>
-          <p:cNvPr id="3" name="Shape 1"/>
-          <p:cNvSpPr/>
-          <p:nvPr/>
-        </p:nvSpPr>
-        <p:spPr>
-          <a:xfrm>
-            <a:off x="640080" y="1874520"/>
-            <a:ext cx="4937760" cy="4160520"/>
-          </a:xfrm>
-          <a:prstGeom prst="roundRect">
-            <a:avLst>
-              <a:gd name="adj" fmla="val 2198"/>
-            </a:avLst>
-          </a:prstGeom>
-          <a:solidFill>
-            <a:srgbClr val="EEF1F4"/>
-          </a:solidFill>
-          <a:ln w="19050">
+          <p:cNvPr id="2" name="Shape 0"/>
+          <p:cNvSpPr/>
+          <p:nvPr/>
+        </p:nvSpPr>
+        <p:spPr>
+          <a:xfrm>
+            <a:off x="457200" y="548640"/>
+            <a:ext cx="0" cy="5760720"/>
+          </a:xfrm>
+          <a:prstGeom prst="line">
+            <a:avLst/>
+          </a:prstGeom>
+          <a:noFill/>
+          <a:ln w="31750">
             <a:solidFill>
-              <a:srgbClr val="EC7A2E"/>
+              <a:srgbClr val="FF8A1E"/>
             </a:solidFill>
             <a:prstDash val="solid"/>
           </a:ln>
@@ -3262,14 +3211,37 @@
       </p:sp>
       <p:sp>
         <p:nvSpPr>
+          <p:cNvPr id="3" name="Shape 1"/>
+          <p:cNvSpPr/>
+          <p:nvPr/>
+        </p:nvSpPr>
+        <p:spPr>
+          <a:xfrm>
+            <a:off x="11734495" y="548640"/>
+            <a:ext cx="0" cy="5760720"/>
+          </a:xfrm>
+          <a:prstGeom prst="line">
+            <a:avLst/>
+          </a:prstGeom>
+          <a:noFill/>
+          <a:ln w="31750">
+            <a:solidFill>
+              <a:srgbClr val="FF8A1E"/>
+            </a:solidFill>
+            <a:prstDash val="solid"/>
+          </a:ln>
+        </p:spPr>
+      </p:sp>
+      <p:sp>
+        <p:nvSpPr>
           <p:cNvPr id="4" name="Text 2"/>
           <p:cNvSpPr/>
           <p:nvPr/>
         </p:nvSpPr>
         <p:spPr>
           <a:xfrm>
-            <a:off x="960120" y="2103120"/>
-            <a:ext cx="3657600" cy="457200"/>
+            <a:off x="914400" y="731520"/>
+            <a:ext cx="914400" cy="640080"/>
           </a:xfrm>
           <a:prstGeom prst="rect">
             <a:avLst/>
@@ -3285,17 +3257,17 @@
               <a:buNone/>
             </a:pPr>
             <a:r>
-              <a:rPr lang="en-US" sz="1900" b="1" dirty="0">
-                <a:solidFill>
-                  <a:srgbClr val="EC7A2E"/>
-                </a:solidFill>
-                <a:latin typeface="Times New Roman" pitchFamily="34" charset="0"/>
-                <a:ea typeface="Times New Roman" pitchFamily="34" charset="-122"/>
-                <a:cs typeface="Times New Roman" pitchFamily="34" charset="-120"/>
-              </a:rPr>
-              <a:t>Problem</a:t>
-            </a:r>
-            <a:endParaRPr lang="en-US" sz="1900" dirty="0"/>
+              <a:rPr lang="en-US" sz="3000" b="1" dirty="0">
+                <a:solidFill>
+                  <a:srgbClr val="FF8A1E"/>
+                </a:solidFill>
+                <a:latin typeface="Century Gothic" pitchFamily="34" charset="0"/>
+                <a:ea typeface="Century Gothic" pitchFamily="34" charset="-122"/>
+                <a:cs typeface="Century Gothic" pitchFamily="34" charset="-120"/>
+              </a:rPr>
+              <a:t>03</a:t>
+            </a:r>
+            <a:endParaRPr lang="en-US" sz="3000" dirty="0"/>
           </a:p>
         </p:txBody>
       </p:sp>
@@ -3307,8 +3279,8 @@
         </p:nvSpPr>
         <p:spPr>
           <a:xfrm>
-            <a:off x="960120" y="2651760"/>
-            <a:ext cx="4343400" cy="3200400"/>
+            <a:off x="1783080" y="905256"/>
+            <a:ext cx="9494215" cy="274320"/>
           </a:xfrm>
           <a:prstGeom prst="rect">
             <a:avLst/>
@@ -3321,48 +3293,82 @@
           <a:lstStyle/>
           <a:p>
             <a:pPr indent="0" marL="0">
-              <a:lnSpc>
-                <a:spcPct val="112000"/>
-              </a:lnSpc>
-              <a:buNone/>
-            </a:pPr>
-            <a:r>
-              <a:rPr lang="en-US" sz="1350" dirty="0">
-                <a:solidFill>
-                  <a:srgbClr val="20262D"/>
+              <a:buNone/>
+            </a:pPr>
+            <a:r>
+              <a:rPr lang="en-US" sz="1100" b="1" spc="200" kern="0" dirty="0">
+                <a:solidFill>
+                  <a:srgbClr val="8B98A6"/>
                 </a:solidFill>
                 <a:latin typeface="Calibri" pitchFamily="34" charset="0"/>
                 <a:ea typeface="Calibri" pitchFamily="34" charset="-122"/>
                 <a:cs typeface="Calibri" pitchFamily="34" charset="-120"/>
               </a:rPr>
-              <a:t>All three AWS-facing components always built static test credentials for the local emulator, and the fog publisher always applied its endpoint override — even on real AWS. Every one of the 116 tests passed and the full stack ran cleanly on the emulator, but on real AWS the Lambdas would override their execution-role credentials and be rejected, and the fog node would crash at startup on a missing endpoint.</a:t>
-            </a:r>
-            <a:endParaRPr lang="en-US" sz="1350" dirty="0"/>
-          </a:p>
-        </p:txBody>
-      </p:sp>
-      <p:sp>
-        <p:nvSpPr>
-          <p:cNvPr id="6" name="Shape 4"/>
-          <p:cNvSpPr/>
-          <p:nvPr/>
-        </p:nvSpPr>
-        <p:spPr>
-          <a:xfrm>
-            <a:off x="6611112" y="1874520"/>
-            <a:ext cx="4937760" cy="4160520"/>
+              <a:t>CHALLENGE</a:t>
+            </a:r>
+            <a:endParaRPr lang="en-US" sz="1100" dirty="0"/>
+          </a:p>
+        </p:txBody>
+      </p:sp>
+      <p:sp>
+        <p:nvSpPr>
+          <p:cNvPr id="6" name="Text 4"/>
+          <p:cNvSpPr/>
+          <p:nvPr/>
+        </p:nvSpPr>
+        <p:spPr>
+          <a:xfrm>
+            <a:off x="914400" y="1380744"/>
+            <a:ext cx="10362895" cy="640080"/>
+          </a:xfrm>
+          <a:prstGeom prst="rect">
+            <a:avLst/>
+          </a:prstGeom>
+          <a:noFill/>
+          <a:ln/>
+        </p:spPr>
+        <p:txBody>
+          <a:bodyPr wrap="square" lIns="0" tIns="0" rIns="0" bIns="0" rtlCol="0" anchor="ctr"/>
+          <a:lstStyle/>
+          <a:p>
+            <a:pPr indent="0" marL="0">
+              <a:buNone/>
+            </a:pPr>
+            <a:r>
+              <a:rPr lang="en-US" sz="2300" b="1" dirty="0">
+                <a:solidFill>
+                  <a:srgbClr val="E6EDF3"/>
+                </a:solidFill>
+                <a:latin typeface="Century Gothic" pitchFamily="34" charset="0"/>
+                <a:ea typeface="Century Gothic" pitchFamily="34" charset="-122"/>
+                <a:cs typeface="Century Gothic" pitchFamily="34" charset="-120"/>
+              </a:rPr>
+              <a:t>catching a battery before it dies</a:t>
+            </a:r>
+            <a:endParaRPr lang="en-US" sz="2300" dirty="0"/>
+          </a:p>
+        </p:txBody>
+      </p:sp>
+      <p:sp>
+        <p:nvSpPr>
+          <p:cNvPr id="7" name="Shape 5"/>
+          <p:cNvSpPr/>
+          <p:nvPr/>
+        </p:nvSpPr>
+        <p:spPr>
+          <a:xfrm>
+            <a:off x="914400" y="2423160"/>
+            <a:ext cx="4952848" cy="3657600"/>
           </a:xfrm>
           <a:prstGeom prst="roundRect">
-            <a:avLst>
-              <a:gd name="adj" fmla="val 2198"/>
-            </a:avLst>
+            <a:avLst/>
           </a:prstGeom>
           <a:solidFill>
-            <a:srgbClr val="EEF1F4"/>
+            <a:srgbClr val="12151B"/>
           </a:solidFill>
-          <a:ln w="19050">
+          <a:ln w="12700">
             <a:solidFill>
-              <a:srgbClr val="4C6579"/>
+              <a:srgbClr val="26292F"/>
             </a:solidFill>
             <a:prstDash val="solid"/>
           </a:ln>
@@ -3370,14 +3376,14 @@
       </p:sp>
       <p:sp>
         <p:nvSpPr>
-          <p:cNvPr id="7" name="Text 5"/>
-          <p:cNvSpPr/>
-          <p:nvPr/>
-        </p:nvSpPr>
-        <p:spPr>
-          <a:xfrm>
-            <a:off x="6931152" y="2103120"/>
-            <a:ext cx="3657600" cy="457200"/>
+          <p:cNvPr id="8" name="Text 6"/>
+          <p:cNvSpPr/>
+          <p:nvPr/>
+        </p:nvSpPr>
+        <p:spPr>
+          <a:xfrm>
+            <a:off x="1234440" y="2697480"/>
+            <a:ext cx="4312768" cy="320040"/>
           </a:xfrm>
           <a:prstGeom prst="rect">
             <a:avLst/>
@@ -3393,57 +3399,80 @@
               <a:buNone/>
             </a:pPr>
             <a:r>
-              <a:rPr lang="en-US" sz="1900" b="1" dirty="0">
-                <a:solidFill>
-                  <a:srgbClr val="4C6579"/>
-                </a:solidFill>
-                <a:latin typeface="Times New Roman" pitchFamily="34" charset="0"/>
-                <a:ea typeface="Times New Roman" pitchFamily="34" charset="-122"/>
-                <a:cs typeface="Times New Roman" pitchFamily="34" charset="-120"/>
-              </a:rPr>
-              <a:t>Solution</a:t>
-            </a:r>
-            <a:endParaRPr lang="en-US" sz="1900" dirty="0"/>
-          </a:p>
-        </p:txBody>
-      </p:sp>
-      <p:sp>
-        <p:nvSpPr>
-          <p:cNvPr id="8" name="Text 6"/>
-          <p:cNvSpPr/>
-          <p:nvPr/>
-        </p:nvSpPr>
-        <p:spPr>
-          <a:xfrm>
-            <a:off x="6931152" y="2651760"/>
-            <a:ext cx="4343400" cy="3200400"/>
-          </a:xfrm>
-          <a:prstGeom prst="rect">
-            <a:avLst/>
-          </a:prstGeom>
-          <a:noFill/>
-          <a:ln/>
-        </p:spPr>
-        <p:txBody>
-          <a:bodyPr wrap="square" lIns="0" tIns="0" rIns="0" bIns="0" rtlCol="0" anchor="ctr"/>
-          <a:lstStyle/>
-          <a:p>
-            <a:pPr indent="0" marL="0">
-              <a:lnSpc>
-                <a:spcPct val="112000"/>
-              </a:lnSpc>
-              <a:buNone/>
-            </a:pPr>
-            <a:r>
-              <a:rPr lang="en-US" sz="1350" dirty="0">
-                <a:solidFill>
-                  <a:srgbClr val="20262D"/>
+              <a:rPr lang="en-US" sz="1200" b="1" spc="200" kern="0" dirty="0">
+                <a:solidFill>
+                  <a:srgbClr val="FF4D4D"/>
                 </a:solidFill>
                 <a:latin typeface="Calibri" pitchFamily="34" charset="0"/>
                 <a:ea typeface="Calibri" pitchFamily="34" charset="-122"/>
                 <a:cs typeface="Calibri" pitchFamily="34" charset="-120"/>
               </a:rPr>
-              <a:t>Gate on the endpoint setting itself: present means emulator credentials, absent means the real AWS role — exactly as one class already did correctly. Deployed with this fix, every health check came up green on the first attempt. One of four defects a pre-deployment audit caught, none visible to a green 116-test suite.</a:t>
+              <a:t>PROBLEM</a:t>
+            </a:r>
+            <a:endParaRPr lang="en-US" sz="1200" dirty="0"/>
+          </a:p>
+        </p:txBody>
+      </p:sp>
+      <p:sp>
+        <p:nvSpPr>
+          <p:cNvPr id="9" name="Shape 7"/>
+          <p:cNvSpPr/>
+          <p:nvPr/>
+        </p:nvSpPr>
+        <p:spPr>
+          <a:xfrm>
+            <a:off x="1234440" y="3081528"/>
+            <a:ext cx="4312768" cy="0"/>
+          </a:xfrm>
+          <a:prstGeom prst="line">
+            <a:avLst/>
+          </a:prstGeom>
+          <a:noFill/>
+          <a:ln w="19050">
+            <a:solidFill>
+              <a:srgbClr val="FF4D4D"/>
+            </a:solidFill>
+            <a:prstDash val="solid"/>
+          </a:ln>
+        </p:spPr>
+      </p:sp>
+      <p:sp>
+        <p:nvSpPr>
+          <p:cNvPr id="10" name="Text 8"/>
+          <p:cNvSpPr/>
+          <p:nvPr/>
+        </p:nvSpPr>
+        <p:spPr>
+          <a:xfrm>
+            <a:off x="1234440" y="3246120"/>
+            <a:ext cx="4312768" cy="2651760"/>
+          </a:xfrm>
+          <a:prstGeom prst="rect">
+            <a:avLst/>
+          </a:prstGeom>
+          <a:noFill/>
+          <a:ln/>
+        </p:spPr>
+        <p:txBody>
+          <a:bodyPr wrap="square" lIns="0" tIns="0" rIns="0" bIns="0" rtlCol="0" anchor="t"/>
+          <a:lstStyle/>
+          <a:p>
+            <a:pPr indent="0" marL="0">
+              <a:lnSpc>
+                <a:spcPct val="128000"/>
+              </a:lnSpc>
+              <a:buNone/>
+            </a:pPr>
+            <a:r>
+              <a:rPr lang="en-US" sz="1350" dirty="0">
+                <a:solidFill>
+                  <a:srgbClr val="E6EDF3"/>
+                </a:solidFill>
+                <a:latin typeface="Calibri" pitchFamily="34" charset="0"/>
+                <a:ea typeface="Calibri" pitchFamily="34" charset="-122"/>
+                <a:cs typeface="Calibri" pitchFamily="34" charset="-120"/>
+              </a:rPr>
+              <a:t>A robot that fails mid-shift halts a whole zone, and the failure that matters — a degrading battery — never announces itself with a single bad reading. It shows only as a trend across many windows, which a threshold on any one reading will miss until it is already too late.</a:t>
             </a:r>
             <a:endParaRPr lang="en-US" sz="1350" dirty="0"/>
           </a:p>
@@ -3451,23 +3480,132 @@
       </p:sp>
       <p:sp>
         <p:nvSpPr>
-          <p:cNvPr id="9" name="Shape 7"/>
-          <p:cNvSpPr/>
-          <p:nvPr/>
-        </p:nvSpPr>
-        <p:spPr>
-          <a:xfrm>
-            <a:off x="5669280" y="3703320"/>
-            <a:ext cx="841248" cy="512064"/>
-          </a:xfrm>
-          <a:prstGeom prst="rightArrow">
+          <p:cNvPr id="11" name="Shape 9"/>
+          <p:cNvSpPr/>
+          <p:nvPr/>
+        </p:nvSpPr>
+        <p:spPr>
+          <a:xfrm>
+            <a:off x="6324448" y="2423160"/>
+            <a:ext cx="4952848" cy="3657600"/>
+          </a:xfrm>
+          <a:prstGeom prst="roundRect">
             <a:avLst/>
           </a:prstGeom>
           <a:solidFill>
-            <a:srgbClr val="33414F"/>
+            <a:srgbClr val="12151B"/>
           </a:solidFill>
-          <a:ln/>
-        </p:spPr>
+          <a:ln w="12700">
+            <a:solidFill>
+              <a:srgbClr val="26292F"/>
+            </a:solidFill>
+            <a:prstDash val="solid"/>
+          </a:ln>
+        </p:spPr>
+      </p:sp>
+      <p:sp>
+        <p:nvSpPr>
+          <p:cNvPr id="12" name="Text 10"/>
+          <p:cNvSpPr/>
+          <p:nvPr/>
+        </p:nvSpPr>
+        <p:spPr>
+          <a:xfrm>
+            <a:off x="6644488" y="2697480"/>
+            <a:ext cx="4312768" cy="320040"/>
+          </a:xfrm>
+          <a:prstGeom prst="rect">
+            <a:avLst/>
+          </a:prstGeom>
+          <a:noFill/>
+          <a:ln/>
+        </p:spPr>
+        <p:txBody>
+          <a:bodyPr wrap="square" lIns="0" tIns="0" rIns="0" bIns="0" rtlCol="0" anchor="ctr"/>
+          <a:lstStyle/>
+          <a:p>
+            <a:pPr indent="0" marL="0">
+              <a:buNone/>
+            </a:pPr>
+            <a:r>
+              <a:rPr lang="en-US" sz="1200" b="1" spc="200" kern="0" dirty="0">
+                <a:solidFill>
+                  <a:srgbClr val="3DDC84"/>
+                </a:solidFill>
+                <a:latin typeface="Calibri" pitchFamily="34" charset="0"/>
+                <a:ea typeface="Calibri" pitchFamily="34" charset="-122"/>
+                <a:cs typeface="Calibri" pitchFamily="34" charset="-120"/>
+              </a:rPr>
+              <a:t>SOLUTION</a:t>
+            </a:r>
+            <a:endParaRPr lang="en-US" sz="1200" dirty="0"/>
+          </a:p>
+        </p:txBody>
+      </p:sp>
+      <p:sp>
+        <p:nvSpPr>
+          <p:cNvPr id="13" name="Shape 11"/>
+          <p:cNvSpPr/>
+          <p:nvPr/>
+        </p:nvSpPr>
+        <p:spPr>
+          <a:xfrm>
+            <a:off x="6644488" y="3081528"/>
+            <a:ext cx="4312768" cy="0"/>
+          </a:xfrm>
+          <a:prstGeom prst="line">
+            <a:avLst/>
+          </a:prstGeom>
+          <a:noFill/>
+          <a:ln w="19050">
+            <a:solidFill>
+              <a:srgbClr val="3DDC84"/>
+            </a:solidFill>
+            <a:prstDash val="solid"/>
+          </a:ln>
+        </p:spPr>
+      </p:sp>
+      <p:sp>
+        <p:nvSpPr>
+          <p:cNvPr id="14" name="Text 12"/>
+          <p:cNvSpPr/>
+          <p:nvPr/>
+        </p:nvSpPr>
+        <p:spPr>
+          <a:xfrm>
+            <a:off x="6644488" y="3246120"/>
+            <a:ext cx="4312768" cy="2651760"/>
+          </a:xfrm>
+          <a:prstGeom prst="rect">
+            <a:avLst/>
+          </a:prstGeom>
+          <a:noFill/>
+          <a:ln/>
+        </p:spPr>
+        <p:txBody>
+          <a:bodyPr wrap="square" lIns="0" tIns="0" rIns="0" bIns="0" rtlCol="0" anchor="t"/>
+          <a:lstStyle/>
+          <a:p>
+            <a:pPr indent="0" marL="0">
+              <a:lnSpc>
+                <a:spcPct val="128000"/>
+              </a:lnSpc>
+              <a:buNone/>
+            </a:pPr>
+            <a:r>
+              <a:rPr lang="en-US" sz="1350" dirty="0">
+                <a:solidFill>
+                  <a:srgbClr val="E6EDF3"/>
+                </a:solidFill>
+                <a:latin typeface="Calibri" pitchFamily="34" charset="0"/>
+                <a:ea typeface="Calibri" pitchFamily="34" charset="-122"/>
+                <a:cs typeface="Calibri" pitchFamily="34" charset="-120"/>
+              </a:rPr>
+              <a:t>Battery telemetry gets particular attention in the fog rule set: rather than alarming on an instantaneous value, the gateway watches the aggregated window so a degradation trend surfaces well before an outright failure, in the spirit of predictive IIoT battery monitoring for autonomous-robot fleets. The same rule logic runs behind both the local server and the real gateway through one shared entry point.</a:t>
+            </a:r>
+            <a:endParaRPr lang="en-US" sz="1350" dirty="0"/>
+          </a:p>
+        </p:txBody>
       </p:sp>
     </p:spTree>
   </p:cSld>
